--- a/downloads/presentations/modules/lesson-44-ai-audit-readiness-and-evidence-management.pptx
+++ b/downloads/presentations/modules/lesson-44-ai-audit-readiness-and-evidence-management.pptx
@@ -3092,6 +3092,45 @@
           </a:p>
         </p:txBody>
       </p:sp>
+      <p:sp>
+        <p:nvSpPr>
+          <p:cNvPr id="8" name="Text 5"/>
+          <p:cNvSpPr/>
+          <p:nvPr/>
+        </p:nvSpPr>
+        <p:spPr>
+          <a:xfrm>
+            <a:off x="11137392" y="6510528"/>
+            <a:ext cx="411480" cy="201168"/>
+          </a:xfrm>
+          <a:prstGeom prst="rect">
+            <a:avLst/>
+          </a:prstGeom>
+          <a:noFill/>
+          <a:ln/>
+        </p:spPr>
+        <p:txBody>
+          <a:bodyPr wrap="square" lIns="0" tIns="0" rIns="0" bIns="0" rtlCol="0" anchor="ctr"/>
+          <a:lstStyle/>
+          <a:p>
+            <a:pPr algn="r" indent="0" marL="0">
+              <a:buNone/>
+            </a:pPr>
+            <a:r>
+              <a:rPr lang="en-US" sz="900" dirty="0">
+                <a:solidFill>
+                  <a:srgbClr val="5F7181"/>
+                </a:solidFill>
+                <a:latin typeface="Aptos" pitchFamily="34" charset="0"/>
+                <a:ea typeface="Aptos" pitchFamily="34" charset="-122"/>
+                <a:cs typeface="Aptos" pitchFamily="34" charset="-120"/>
+              </a:rPr>
+              <a:t>1</a:t>
+            </a:r>
+            <a:endParaRPr lang="en-US" sz="900" dirty="0"/>
+          </a:p>
+        </p:txBody>
+      </p:sp>
     </p:spTree>
   </p:cSld>
   <p:clrMapOvr>
@@ -3285,7 +3324,7 @@
                 <a:ea typeface="Aptos" pitchFamily="34" charset="-122"/>
                 <a:cs typeface="Aptos" pitchFamily="34" charset="-120"/>
               </a:rPr>
-              <a:t>© Paula Soper</a:t>
+              <a:t>Â© Paula Soper</a:t>
             </a:r>
             <a:endParaRPr lang="en-US" sz="800" dirty="0"/>
           </a:p>
@@ -3299,8 +3338,47 @@
         </p:nvSpPr>
         <p:spPr>
           <a:xfrm>
+            <a:off x="11137392" y="6510528"/>
+            <a:ext cx="411480" cy="201168"/>
+          </a:xfrm>
+          <a:prstGeom prst="rect">
+            <a:avLst/>
+          </a:prstGeom>
+          <a:noFill/>
+          <a:ln/>
+        </p:spPr>
+        <p:txBody>
+          <a:bodyPr wrap="square" lIns="0" tIns="0" rIns="0" bIns="0" rtlCol="0" anchor="ctr"/>
+          <a:lstStyle/>
+          <a:p>
+            <a:pPr algn="r" indent="0" marL="0">
+              <a:buNone/>
+            </a:pPr>
+            <a:r>
+              <a:rPr lang="en-US" sz="900" dirty="0">
+                <a:solidFill>
+                  <a:srgbClr val="5F7181"/>
+                </a:solidFill>
+                <a:latin typeface="Aptos" pitchFamily="34" charset="0"/>
+                <a:ea typeface="Aptos" pitchFamily="34" charset="-122"/>
+                <a:cs typeface="Aptos" pitchFamily="34" charset="-120"/>
+              </a:rPr>
+              <a:t>10</a:t>
+            </a:r>
+            <a:endParaRPr lang="en-US" sz="900" dirty="0"/>
+          </a:p>
+        </p:txBody>
+      </p:sp>
+      <p:sp>
+        <p:nvSpPr>
+          <p:cNvPr id="8" name="Text 6"/>
+          <p:cNvSpPr/>
+          <p:nvPr/>
+        </p:nvSpPr>
+        <p:spPr>
+          <a:xfrm>
             <a:off x="640080" y="658368"/>
-            <a:ext cx="10881360" cy="566928"/>
+            <a:ext cx="10881360" cy="713232"/>
           </a:xfrm>
           <a:prstGeom prst="rect">
             <a:avLst/>
@@ -3318,7 +3396,7 @@
               <a:buNone/>
             </a:pPr>
             <a:r>
-              <a:rPr lang="en-US" sz="2700" b="1" dirty="0">
+              <a:rPr lang="en-US" sz="3400" b="1" dirty="0">
                 <a:solidFill>
                   <a:srgbClr val="003A63"/>
                 </a:solidFill>
@@ -3328,20 +3406,20 @@
               </a:rPr>
               <a:t>Technical and Operational Deep Dive Continued</a:t>
             </a:r>
-            <a:endParaRPr lang="en-US" sz="2700" dirty="0"/>
-          </a:p>
-        </p:txBody>
-      </p:sp>
-      <p:sp>
-        <p:nvSpPr>
-          <p:cNvPr id="8" name="Text 6"/>
-          <p:cNvSpPr/>
-          <p:nvPr/>
-        </p:nvSpPr>
-        <p:spPr>
-          <a:xfrm>
-            <a:off x="868680" y="1417320"/>
-            <a:ext cx="6675120" cy="4434840"/>
+            <a:endParaRPr lang="en-US" sz="3400" dirty="0"/>
+          </a:p>
+        </p:txBody>
+      </p:sp>
+      <p:sp>
+        <p:nvSpPr>
+          <p:cNvPr id="9" name="Text 7"/>
+          <p:cNvSpPr/>
+          <p:nvPr/>
+        </p:nvSpPr>
+        <p:spPr>
+          <a:xfrm>
+            <a:off x="868680" y="1508760"/>
+            <a:ext cx="6537960" cy="4160520"/>
           </a:xfrm>
           <a:prstGeom prst="rect">
             <a:avLst/>
@@ -3356,7 +3434,7 @@
           <a:lstStyle/>
           <a:p>
             <a:r>
-              <a:rPr lang="en-US" sz="1700" dirty="0">
+              <a:rPr lang="en-US" sz="2100" dirty="0">
                 <a:solidFill>
                   <a:srgbClr val="17364A"/>
                 </a:solidFill>
@@ -3366,11 +3444,11 @@
               </a:rPr>
               <a:t>Evidence management requires ownership and retention rules.</a:t>
             </a:r>
-            <a:endParaRPr lang="en-US" sz="1700" dirty="0"/>
-          </a:p>
-          <a:p>
-            <a:r>
-              <a:rPr lang="en-US" sz="1700" dirty="0">
+            <a:endParaRPr lang="en-US" sz="2100" dirty="0"/>
+          </a:p>
+          <a:p>
+            <a:r>
+              <a:rPr lang="en-US" sz="2100" dirty="0">
                 <a:solidFill>
                   <a:srgbClr val="17364A"/>
                 </a:solidFill>
@@ -3378,13 +3456,13 @@
                 <a:ea typeface="Aptos" pitchFamily="34" charset="-122"/>
                 <a:cs typeface="Aptos" pitchFamily="34" charset="-120"/>
               </a:rPr>
-              <a:t>Governance bodies should define who stores each artifact, where it is stored, how long it is retained, who can access it,.</a:t>
-            </a:r>
-            <a:endParaRPr lang="en-US" sz="1700" dirty="0"/>
-          </a:p>
-          <a:p>
-            <a:r>
-              <a:rPr lang="en-US" sz="1700" dirty="0">
+              <a:t>Governance bodies should define who stores each artifact, where it is stored, how long it is retained,.</a:t>
+            </a:r>
+            <a:endParaRPr lang="en-US" sz="2100" dirty="0"/>
+          </a:p>
+          <a:p>
+            <a:r>
+              <a:rPr lang="en-US" sz="2100" dirty="0">
                 <a:solidFill>
                   <a:srgbClr val="17364A"/>
                 </a:solidFill>
@@ -3394,13 +3472,13 @@
               </a:rPr>
               <a:t>Audit readiness depends on consistent records, not scattered files and informal emails.</a:t>
             </a:r>
-            <a:endParaRPr lang="en-US" sz="1700" dirty="0"/>
-          </a:p>
-        </p:txBody>
-      </p:sp>
-      <p:sp>
-        <p:nvSpPr>
-          <p:cNvPr id="9" name="Shape 7"/>
+            <a:endParaRPr lang="en-US" sz="2100" dirty="0"/>
+          </a:p>
+        </p:txBody>
+      </p:sp>
+      <p:sp>
+        <p:nvSpPr>
+          <p:cNvPr id="10" name="Shape 8"/>
           <p:cNvSpPr/>
           <p:nvPr/>
         </p:nvSpPr>
@@ -3427,14 +3505,14 @@
       </p:sp>
       <p:sp>
         <p:nvSpPr>
-          <p:cNvPr id="10" name="Text 8"/>
+          <p:cNvPr id="11" name="Text 9"/>
           <p:cNvSpPr/>
           <p:nvPr/>
         </p:nvSpPr>
         <p:spPr>
           <a:xfrm>
             <a:off x="8074152" y="1563624"/>
-            <a:ext cx="2825496" cy="201168"/>
+            <a:ext cx="2825496" cy="256032"/>
           </a:xfrm>
           <a:prstGeom prst="rect">
             <a:avLst/>
@@ -3450,7 +3528,7 @@
               <a:buNone/>
             </a:pPr>
             <a:r>
-              <a:rPr lang="en-US" sz="950" b="1" dirty="0">
+              <a:rPr lang="en-US" sz="1300" b="1" dirty="0">
                 <a:solidFill>
                   <a:srgbClr val="0068B7"/>
                 </a:solidFill>
@@ -3460,20 +3538,20 @@
               </a:rPr>
               <a:t>Key idea</a:t>
             </a:r>
-            <a:endParaRPr lang="en-US" sz="950" dirty="0"/>
-          </a:p>
-        </p:txBody>
-      </p:sp>
-      <p:sp>
-        <p:nvSpPr>
-          <p:cNvPr id="11" name="Text 9"/>
-          <p:cNvSpPr/>
-          <p:nvPr/>
-        </p:nvSpPr>
-        <p:spPr>
-          <a:xfrm>
-            <a:off x="8074152" y="1856232"/>
-            <a:ext cx="2825496" cy="1261872"/>
+            <a:endParaRPr lang="en-US" sz="1300" dirty="0"/>
+          </a:p>
+        </p:txBody>
+      </p:sp>
+      <p:sp>
+        <p:nvSpPr>
+          <p:cNvPr id="12" name="Text 10"/>
+          <p:cNvSpPr/>
+          <p:nvPr/>
+        </p:nvSpPr>
+        <p:spPr>
+          <a:xfrm>
+            <a:off x="8074152" y="1920240"/>
+            <a:ext cx="2825496" cy="1188720"/>
           </a:xfrm>
           <a:prstGeom prst="rect">
             <a:avLst/>
@@ -3491,7 +3569,7 @@
               <a:buNone/>
             </a:pPr>
             <a:r>
-              <a:rPr lang="en-US" sz="1250" dirty="0">
+              <a:rPr lang="en-US" sz="1550" dirty="0">
                 <a:solidFill>
                   <a:srgbClr val="17364A"/>
                 </a:solidFill>
@@ -3501,13 +3579,13 @@
               </a:rPr>
               <a:t>Evidence management requires ownership and retention rules.</a:t>
             </a:r>
-            <a:endParaRPr lang="en-US" sz="1250" dirty="0"/>
-          </a:p>
-        </p:txBody>
-      </p:sp>
-      <p:sp>
-        <p:nvSpPr>
-          <p:cNvPr id="12" name="Shape 10"/>
+            <a:endParaRPr lang="en-US" sz="1550" dirty="0"/>
+          </a:p>
+        </p:txBody>
+      </p:sp>
+      <p:sp>
+        <p:nvSpPr>
+          <p:cNvPr id="13" name="Shape 11"/>
           <p:cNvSpPr/>
           <p:nvPr/>
         </p:nvSpPr>
@@ -3534,14 +3612,14 @@
       </p:sp>
       <p:sp>
         <p:nvSpPr>
-          <p:cNvPr id="13" name="Text 11"/>
+          <p:cNvPr id="14" name="Text 12"/>
           <p:cNvSpPr/>
           <p:nvPr/>
         </p:nvSpPr>
         <p:spPr>
           <a:xfrm>
             <a:off x="8074152" y="3666744"/>
-            <a:ext cx="2825496" cy="201168"/>
+            <a:ext cx="2825496" cy="256032"/>
           </a:xfrm>
           <a:prstGeom prst="rect">
             <a:avLst/>
@@ -3557,7 +3635,7 @@
               <a:buNone/>
             </a:pPr>
             <a:r>
-              <a:rPr lang="en-US" sz="950" b="1" dirty="0">
+              <a:rPr lang="en-US" sz="1300" b="1" dirty="0">
                 <a:solidFill>
                   <a:srgbClr val="0068B7"/>
                 </a:solidFill>
@@ -3567,20 +3645,20 @@
               </a:rPr>
               <a:t>Use this for</a:t>
             </a:r>
-            <a:endParaRPr lang="en-US" sz="950" dirty="0"/>
-          </a:p>
-        </p:txBody>
-      </p:sp>
-      <p:sp>
-        <p:nvSpPr>
-          <p:cNvPr id="14" name="Text 12"/>
-          <p:cNvSpPr/>
-          <p:nvPr/>
-        </p:nvSpPr>
-        <p:spPr>
-          <a:xfrm>
-            <a:off x="8074152" y="3959352"/>
-            <a:ext cx="2825496" cy="1170432"/>
+            <a:endParaRPr lang="en-US" sz="1300" dirty="0"/>
+          </a:p>
+        </p:txBody>
+      </p:sp>
+      <p:sp>
+        <p:nvSpPr>
+          <p:cNvPr id="15" name="Text 13"/>
+          <p:cNvSpPr/>
+          <p:nvPr/>
+        </p:nvSpPr>
+        <p:spPr>
+          <a:xfrm>
+            <a:off x="8074152" y="4023360"/>
+            <a:ext cx="2825496" cy="1097280"/>
           </a:xfrm>
           <a:prstGeom prst="rect">
             <a:avLst/>
@@ -3598,7 +3676,7 @@
               <a:buNone/>
             </a:pPr>
             <a:r>
-              <a:rPr lang="en-US" sz="1250" dirty="0">
+              <a:rPr lang="en-US" sz="1550" dirty="0">
                 <a:solidFill>
                   <a:srgbClr val="17364A"/>
                 </a:solidFill>
@@ -3608,7 +3686,7 @@
               </a:rPr>
               <a:t>Connect the concept to public health decisions, safeguards, documentation, or implementation work.</a:t>
             </a:r>
-            <a:endParaRPr lang="en-US" sz="1250" dirty="0"/>
+            <a:endParaRPr lang="en-US" sz="1550" dirty="0"/>
           </a:p>
         </p:txBody>
       </p:sp>
@@ -3805,7 +3883,7 @@
                 <a:ea typeface="Aptos" pitchFamily="34" charset="-122"/>
                 <a:cs typeface="Aptos" pitchFamily="34" charset="-120"/>
               </a:rPr>
-              <a:t>© Paula Soper</a:t>
+              <a:t>Â© Paula Soper</a:t>
             </a:r>
             <a:endParaRPr lang="en-US" sz="800" dirty="0"/>
           </a:p>
@@ -3813,7 +3891,46 @@
       </p:sp>
       <p:sp>
         <p:nvSpPr>
-          <p:cNvPr id="7" name="Shape 5"/>
+          <p:cNvPr id="7" name="Text 5"/>
+          <p:cNvSpPr/>
+          <p:nvPr/>
+        </p:nvSpPr>
+        <p:spPr>
+          <a:xfrm>
+            <a:off x="11137392" y="6510528"/>
+            <a:ext cx="411480" cy="201168"/>
+          </a:xfrm>
+          <a:prstGeom prst="rect">
+            <a:avLst/>
+          </a:prstGeom>
+          <a:noFill/>
+          <a:ln/>
+        </p:spPr>
+        <p:txBody>
+          <a:bodyPr wrap="square" lIns="0" tIns="0" rIns="0" bIns="0" rtlCol="0" anchor="ctr"/>
+          <a:lstStyle/>
+          <a:p>
+            <a:pPr algn="r" indent="0" marL="0">
+              <a:buNone/>
+            </a:pPr>
+            <a:r>
+              <a:rPr lang="en-US" sz="900" dirty="0">
+                <a:solidFill>
+                  <a:srgbClr val="5F7181"/>
+                </a:solidFill>
+                <a:latin typeface="Aptos" pitchFamily="34" charset="0"/>
+                <a:ea typeface="Aptos" pitchFamily="34" charset="-122"/>
+                <a:cs typeface="Aptos" pitchFamily="34" charset="-120"/>
+              </a:rPr>
+              <a:t>11</a:t>
+            </a:r>
+            <a:endParaRPr lang="en-US" sz="900" dirty="0"/>
+          </a:p>
+        </p:txBody>
+      </p:sp>
+      <p:sp>
+        <p:nvSpPr>
+          <p:cNvPr id="8" name="Shape 6"/>
           <p:cNvSpPr/>
           <p:nvPr/>
         </p:nvSpPr>
@@ -3838,7 +3955,7 @@
       </p:sp>
       <p:sp>
         <p:nvSpPr>
-          <p:cNvPr id="8" name="Text 6"/>
+          <p:cNvPr id="9" name="Text 7"/>
           <p:cNvSpPr/>
           <p:nvPr/>
         </p:nvSpPr>
@@ -3877,14 +3994,14 @@
       </p:sp>
       <p:sp>
         <p:nvSpPr>
-          <p:cNvPr id="9" name="Text 7"/>
+          <p:cNvPr id="10" name="Text 8"/>
           <p:cNvSpPr/>
           <p:nvPr/>
         </p:nvSpPr>
         <p:spPr>
           <a:xfrm>
             <a:off x="640080" y="621792"/>
-            <a:ext cx="10881360" cy="566928"/>
+            <a:ext cx="10881360" cy="713232"/>
           </a:xfrm>
           <a:prstGeom prst="rect">
             <a:avLst/>
@@ -3902,7 +4019,7 @@
               <a:buNone/>
             </a:pPr>
             <a:r>
-              <a:rPr lang="en-US" sz="2700" b="1" dirty="0">
+              <a:rPr lang="en-US" sz="3400" b="1" dirty="0">
                 <a:solidFill>
                   <a:srgbClr val="003A63"/>
                 </a:solidFill>
@@ -3912,20 +4029,20 @@
               </a:rPr>
               <a:t>Risks, Failure Modes, and Guardrails</a:t>
             </a:r>
-            <a:endParaRPr lang="en-US" sz="2700" dirty="0"/>
-          </a:p>
-        </p:txBody>
-      </p:sp>
-      <p:sp>
-        <p:nvSpPr>
-          <p:cNvPr id="10" name="Text 8"/>
-          <p:cNvSpPr/>
-          <p:nvPr/>
-        </p:nvSpPr>
-        <p:spPr>
-          <a:xfrm>
-            <a:off x="868680" y="1417320"/>
-            <a:ext cx="6675120" cy="4434840"/>
+            <a:endParaRPr lang="en-US" sz="3400" dirty="0"/>
+          </a:p>
+        </p:txBody>
+      </p:sp>
+      <p:sp>
+        <p:nvSpPr>
+          <p:cNvPr id="11" name="Text 9"/>
+          <p:cNvSpPr/>
+          <p:nvPr/>
+        </p:nvSpPr>
+        <p:spPr>
+          <a:xfrm>
+            <a:off x="868680" y="1508760"/>
+            <a:ext cx="6537960" cy="4160520"/>
           </a:xfrm>
           <a:prstGeom prst="rect">
             <a:avLst/>
@@ -3940,7 +4057,7 @@
           <a:lstStyle/>
           <a:p>
             <a:r>
-              <a:rPr lang="en-US" sz="1700" dirty="0">
+              <a:rPr lang="en-US" sz="2100" dirty="0">
                 <a:solidFill>
                   <a:srgbClr val="17364A"/>
                 </a:solidFill>
@@ -3950,11 +4067,11 @@
               </a:rPr>
               <a:t>Risks and failure modes include the following:</a:t>
             </a:r>
-            <a:endParaRPr lang="en-US" sz="1700" dirty="0"/>
-          </a:p>
-          <a:p>
-            <a:r>
-              <a:rPr lang="en-US" sz="1700" dirty="0">
+            <a:endParaRPr lang="en-US" sz="2100" dirty="0"/>
+          </a:p>
+          <a:p>
+            <a:r>
+              <a:rPr lang="en-US" sz="2100" dirty="0">
                 <a:solidFill>
                   <a:srgbClr val="17364A"/>
                 </a:solidFill>
@@ -3964,11 +4081,11 @@
               </a:rPr>
               <a:t>Approvals without records of conditions or rationale.</a:t>
             </a:r>
-            <a:endParaRPr lang="en-US" sz="1700" dirty="0"/>
-          </a:p>
-          <a:p>
-            <a:r>
-              <a:rPr lang="en-US" sz="1700" dirty="0">
+            <a:endParaRPr lang="en-US" sz="2100" dirty="0"/>
+          </a:p>
+          <a:p>
+            <a:r>
+              <a:rPr lang="en-US" sz="2100" dirty="0">
                 <a:solidFill>
                   <a:srgbClr val="17364A"/>
                 </a:solidFill>
@@ -3978,13 +4095,13 @@
               </a:rPr>
               <a:t>Validation results stored informally or not retained.</a:t>
             </a:r>
-            <a:endParaRPr lang="en-US" sz="1700" dirty="0"/>
-          </a:p>
-        </p:txBody>
-      </p:sp>
-      <p:sp>
-        <p:nvSpPr>
-          <p:cNvPr id="11" name="Shape 9"/>
+            <a:endParaRPr lang="en-US" sz="2100" dirty="0"/>
+          </a:p>
+        </p:txBody>
+      </p:sp>
+      <p:sp>
+        <p:nvSpPr>
+          <p:cNvPr id="12" name="Shape 10"/>
           <p:cNvSpPr/>
           <p:nvPr/>
         </p:nvSpPr>
@@ -4011,14 +4128,14 @@
       </p:sp>
       <p:sp>
         <p:nvSpPr>
-          <p:cNvPr id="12" name="Text 10"/>
+          <p:cNvPr id="13" name="Text 11"/>
           <p:cNvSpPr/>
           <p:nvPr/>
         </p:nvSpPr>
         <p:spPr>
           <a:xfrm>
             <a:off x="8074152" y="1563624"/>
-            <a:ext cx="2825496" cy="201168"/>
+            <a:ext cx="2825496" cy="256032"/>
           </a:xfrm>
           <a:prstGeom prst="rect">
             <a:avLst/>
@@ -4034,7 +4151,7 @@
               <a:buNone/>
             </a:pPr>
             <a:r>
-              <a:rPr lang="en-US" sz="950" b="1" dirty="0">
+              <a:rPr lang="en-US" sz="1300" b="1" dirty="0">
                 <a:solidFill>
                   <a:srgbClr val="0068B7"/>
                 </a:solidFill>
@@ -4044,20 +4161,20 @@
               </a:rPr>
               <a:t>Key idea</a:t>
             </a:r>
-            <a:endParaRPr lang="en-US" sz="950" dirty="0"/>
-          </a:p>
-        </p:txBody>
-      </p:sp>
-      <p:sp>
-        <p:nvSpPr>
-          <p:cNvPr id="13" name="Text 11"/>
-          <p:cNvSpPr/>
-          <p:nvPr/>
-        </p:nvSpPr>
-        <p:spPr>
-          <a:xfrm>
-            <a:off x="8074152" y="1856232"/>
-            <a:ext cx="2825496" cy="1261872"/>
+            <a:endParaRPr lang="en-US" sz="1300" dirty="0"/>
+          </a:p>
+        </p:txBody>
+      </p:sp>
+      <p:sp>
+        <p:nvSpPr>
+          <p:cNvPr id="14" name="Text 12"/>
+          <p:cNvSpPr/>
+          <p:nvPr/>
+        </p:nvSpPr>
+        <p:spPr>
+          <a:xfrm>
+            <a:off x="8074152" y="1920240"/>
+            <a:ext cx="2825496" cy="1188720"/>
           </a:xfrm>
           <a:prstGeom prst="rect">
             <a:avLst/>
@@ -4075,7 +4192,7 @@
               <a:buNone/>
             </a:pPr>
             <a:r>
-              <a:rPr lang="en-US" sz="1250" dirty="0">
+              <a:rPr lang="en-US" sz="1550" dirty="0">
                 <a:solidFill>
                   <a:srgbClr val="17364A"/>
                 </a:solidFill>
@@ -4085,13 +4202,13 @@
               </a:rPr>
               <a:t>Risks and failure modes include the following:</a:t>
             </a:r>
-            <a:endParaRPr lang="en-US" sz="1250" dirty="0"/>
-          </a:p>
-        </p:txBody>
-      </p:sp>
-      <p:sp>
-        <p:nvSpPr>
-          <p:cNvPr id="14" name="Shape 12"/>
+            <a:endParaRPr lang="en-US" sz="1550" dirty="0"/>
+          </a:p>
+        </p:txBody>
+      </p:sp>
+      <p:sp>
+        <p:nvSpPr>
+          <p:cNvPr id="15" name="Shape 13"/>
           <p:cNvSpPr/>
           <p:nvPr/>
         </p:nvSpPr>
@@ -4118,14 +4235,14 @@
       </p:sp>
       <p:sp>
         <p:nvSpPr>
-          <p:cNvPr id="15" name="Text 13"/>
+          <p:cNvPr id="16" name="Text 14"/>
           <p:cNvSpPr/>
           <p:nvPr/>
         </p:nvSpPr>
         <p:spPr>
           <a:xfrm>
             <a:off x="8074152" y="3666744"/>
-            <a:ext cx="2825496" cy="201168"/>
+            <a:ext cx="2825496" cy="256032"/>
           </a:xfrm>
           <a:prstGeom prst="rect">
             <a:avLst/>
@@ -4141,7 +4258,7 @@
               <a:buNone/>
             </a:pPr>
             <a:r>
-              <a:rPr lang="en-US" sz="950" b="1" dirty="0">
+              <a:rPr lang="en-US" sz="1300" b="1" dirty="0">
                 <a:solidFill>
                   <a:srgbClr val="0068B7"/>
                 </a:solidFill>
@@ -4151,20 +4268,20 @@
               </a:rPr>
               <a:t>Use this for</a:t>
             </a:r>
-            <a:endParaRPr lang="en-US" sz="950" dirty="0"/>
-          </a:p>
-        </p:txBody>
-      </p:sp>
-      <p:sp>
-        <p:nvSpPr>
-          <p:cNvPr id="16" name="Text 14"/>
-          <p:cNvSpPr/>
-          <p:nvPr/>
-        </p:nvSpPr>
-        <p:spPr>
-          <a:xfrm>
-            <a:off x="8074152" y="3959352"/>
-            <a:ext cx="2825496" cy="1170432"/>
+            <a:endParaRPr lang="en-US" sz="1300" dirty="0"/>
+          </a:p>
+        </p:txBody>
+      </p:sp>
+      <p:sp>
+        <p:nvSpPr>
+          <p:cNvPr id="17" name="Text 15"/>
+          <p:cNvSpPr/>
+          <p:nvPr/>
+        </p:nvSpPr>
+        <p:spPr>
+          <a:xfrm>
+            <a:off x="8074152" y="4023360"/>
+            <a:ext cx="2825496" cy="1097280"/>
           </a:xfrm>
           <a:prstGeom prst="rect">
             <a:avLst/>
@@ -4182,7 +4299,7 @@
               <a:buNone/>
             </a:pPr>
             <a:r>
-              <a:rPr lang="en-US" sz="1250" dirty="0">
+              <a:rPr lang="en-US" sz="1550" dirty="0">
                 <a:solidFill>
                   <a:srgbClr val="17364A"/>
                 </a:solidFill>
@@ -4192,7 +4309,7 @@
               </a:rPr>
               <a:t>Connect the concept to public health decisions, safeguards, documentation, or implementation work.</a:t>
             </a:r>
-            <a:endParaRPr lang="en-US" sz="1250" dirty="0"/>
+            <a:endParaRPr lang="en-US" sz="1550" dirty="0"/>
           </a:p>
         </p:txBody>
       </p:sp>
@@ -4389,7 +4506,7 @@
                 <a:ea typeface="Aptos" pitchFamily="34" charset="-122"/>
                 <a:cs typeface="Aptos" pitchFamily="34" charset="-120"/>
               </a:rPr>
-              <a:t>© Paula Soper</a:t>
+              <a:t>Â© Paula Soper</a:t>
             </a:r>
             <a:endParaRPr lang="en-US" sz="800" dirty="0"/>
           </a:p>
@@ -4403,8 +4520,47 @@
         </p:nvSpPr>
         <p:spPr>
           <a:xfrm>
+            <a:off x="11137392" y="6510528"/>
+            <a:ext cx="411480" cy="201168"/>
+          </a:xfrm>
+          <a:prstGeom prst="rect">
+            <a:avLst/>
+          </a:prstGeom>
+          <a:noFill/>
+          <a:ln/>
+        </p:spPr>
+        <p:txBody>
+          <a:bodyPr wrap="square" lIns="0" tIns="0" rIns="0" bIns="0" rtlCol="0" anchor="ctr"/>
+          <a:lstStyle/>
+          <a:p>
+            <a:pPr algn="r" indent="0" marL="0">
+              <a:buNone/>
+            </a:pPr>
+            <a:r>
+              <a:rPr lang="en-US" sz="900" dirty="0">
+                <a:solidFill>
+                  <a:srgbClr val="5F7181"/>
+                </a:solidFill>
+                <a:latin typeface="Aptos" pitchFamily="34" charset="0"/>
+                <a:ea typeface="Aptos" pitchFamily="34" charset="-122"/>
+                <a:cs typeface="Aptos" pitchFamily="34" charset="-120"/>
+              </a:rPr>
+              <a:t>12</a:t>
+            </a:r>
+            <a:endParaRPr lang="en-US" sz="900" dirty="0"/>
+          </a:p>
+        </p:txBody>
+      </p:sp>
+      <p:sp>
+        <p:nvSpPr>
+          <p:cNvPr id="8" name="Text 6"/>
+          <p:cNvSpPr/>
+          <p:nvPr/>
+        </p:nvSpPr>
+        <p:spPr>
+          <a:xfrm>
             <a:off x="640080" y="658368"/>
-            <a:ext cx="10881360" cy="566928"/>
+            <a:ext cx="10881360" cy="713232"/>
           </a:xfrm>
           <a:prstGeom prst="rect">
             <a:avLst/>
@@ -4422,7 +4578,7 @@
               <a:buNone/>
             </a:pPr>
             <a:r>
-              <a:rPr lang="en-US" sz="2700" b="1" dirty="0">
+              <a:rPr lang="en-US" sz="3400" b="1" dirty="0">
                 <a:solidFill>
                   <a:srgbClr val="003A63"/>
                 </a:solidFill>
@@ -4432,20 +4588,20 @@
               </a:rPr>
               <a:t>Risks, Failure Modes, and Guardrails Continued</a:t>
             </a:r>
-            <a:endParaRPr lang="en-US" sz="2700" dirty="0"/>
-          </a:p>
-        </p:txBody>
-      </p:sp>
-      <p:sp>
-        <p:nvSpPr>
-          <p:cNvPr id="8" name="Text 6"/>
-          <p:cNvSpPr/>
-          <p:nvPr/>
-        </p:nvSpPr>
-        <p:spPr>
-          <a:xfrm>
-            <a:off x="868680" y="1417320"/>
-            <a:ext cx="6675120" cy="4434840"/>
+            <a:endParaRPr lang="en-US" sz="3400" dirty="0"/>
+          </a:p>
+        </p:txBody>
+      </p:sp>
+      <p:sp>
+        <p:nvSpPr>
+          <p:cNvPr id="9" name="Text 7"/>
+          <p:cNvSpPr/>
+          <p:nvPr/>
+        </p:nvSpPr>
+        <p:spPr>
+          <a:xfrm>
+            <a:off x="868680" y="1508760"/>
+            <a:ext cx="6537960" cy="4160520"/>
           </a:xfrm>
           <a:prstGeom prst="rect">
             <a:avLst/>
@@ -4460,7 +4616,7 @@
           <a:lstStyle/>
           <a:p>
             <a:r>
-              <a:rPr lang="en-US" sz="1700" dirty="0">
+              <a:rPr lang="en-US" sz="2100" dirty="0">
                 <a:solidFill>
                   <a:srgbClr val="17364A"/>
                 </a:solidFill>
@@ -4470,11 +4626,11 @@
               </a:rPr>
               <a:t>Vendor documentation accepted without agency review or local evidence.</a:t>
             </a:r>
-            <a:endParaRPr lang="en-US" sz="1700" dirty="0"/>
-          </a:p>
-          <a:p>
-            <a:r>
-              <a:rPr lang="en-US" sz="1700" dirty="0">
+            <a:endParaRPr lang="en-US" sz="2100" dirty="0"/>
+          </a:p>
+          <a:p>
+            <a:r>
+              <a:rPr lang="en-US" sz="2100" dirty="0">
                 <a:solidFill>
                   <a:srgbClr val="17364A"/>
                 </a:solidFill>
@@ -4484,11 +4640,11 @@
               </a:rPr>
               <a:t>Incidents that cannot be reconstructed because logs or decisions were not preserved.</a:t>
             </a:r>
-            <a:endParaRPr lang="en-US" sz="1700" dirty="0"/>
-          </a:p>
-          <a:p>
-            <a:r>
-              <a:rPr lang="en-US" sz="1700" dirty="0">
+            <a:endParaRPr lang="en-US" sz="2100" dirty="0"/>
+          </a:p>
+          <a:p>
+            <a:r>
+              <a:rPr lang="en-US" sz="2100" dirty="0">
                 <a:solidFill>
                   <a:srgbClr val="17364A"/>
                 </a:solidFill>
@@ -4498,13 +4654,13 @@
               </a:rPr>
               <a:t>Public records or audit responses delayed because artifacts are scattered.</a:t>
             </a:r>
-            <a:endParaRPr lang="en-US" sz="1700" dirty="0"/>
-          </a:p>
-        </p:txBody>
-      </p:sp>
-      <p:sp>
-        <p:nvSpPr>
-          <p:cNvPr id="9" name="Shape 7"/>
+            <a:endParaRPr lang="en-US" sz="2100" dirty="0"/>
+          </a:p>
+        </p:txBody>
+      </p:sp>
+      <p:sp>
+        <p:nvSpPr>
+          <p:cNvPr id="10" name="Shape 8"/>
           <p:cNvSpPr/>
           <p:nvPr/>
         </p:nvSpPr>
@@ -4531,14 +4687,14 @@
       </p:sp>
       <p:sp>
         <p:nvSpPr>
-          <p:cNvPr id="10" name="Text 8"/>
+          <p:cNvPr id="11" name="Text 9"/>
           <p:cNvSpPr/>
           <p:nvPr/>
         </p:nvSpPr>
         <p:spPr>
           <a:xfrm>
             <a:off x="8074152" y="1563624"/>
-            <a:ext cx="2825496" cy="201168"/>
+            <a:ext cx="2825496" cy="256032"/>
           </a:xfrm>
           <a:prstGeom prst="rect">
             <a:avLst/>
@@ -4554,7 +4710,7 @@
               <a:buNone/>
             </a:pPr>
             <a:r>
-              <a:rPr lang="en-US" sz="950" b="1" dirty="0">
+              <a:rPr lang="en-US" sz="1300" b="1" dirty="0">
                 <a:solidFill>
                   <a:srgbClr val="0068B7"/>
                 </a:solidFill>
@@ -4564,20 +4720,20 @@
               </a:rPr>
               <a:t>Key idea</a:t>
             </a:r>
-            <a:endParaRPr lang="en-US" sz="950" dirty="0"/>
-          </a:p>
-        </p:txBody>
-      </p:sp>
-      <p:sp>
-        <p:nvSpPr>
-          <p:cNvPr id="11" name="Text 9"/>
-          <p:cNvSpPr/>
-          <p:nvPr/>
-        </p:nvSpPr>
-        <p:spPr>
-          <a:xfrm>
-            <a:off x="8074152" y="1856232"/>
-            <a:ext cx="2825496" cy="1261872"/>
+            <a:endParaRPr lang="en-US" sz="1300" dirty="0"/>
+          </a:p>
+        </p:txBody>
+      </p:sp>
+      <p:sp>
+        <p:nvSpPr>
+          <p:cNvPr id="12" name="Text 10"/>
+          <p:cNvSpPr/>
+          <p:nvPr/>
+        </p:nvSpPr>
+        <p:spPr>
+          <a:xfrm>
+            <a:off x="8074152" y="1920240"/>
+            <a:ext cx="2825496" cy="1188720"/>
           </a:xfrm>
           <a:prstGeom prst="rect">
             <a:avLst/>
@@ -4595,7 +4751,7 @@
               <a:buNone/>
             </a:pPr>
             <a:r>
-              <a:rPr lang="en-US" sz="1250" dirty="0">
+              <a:rPr lang="en-US" sz="1550" dirty="0">
                 <a:solidFill>
                   <a:srgbClr val="17364A"/>
                 </a:solidFill>
@@ -4605,13 +4761,13 @@
               </a:rPr>
               <a:t>Vendor documentation accepted without agency review or local evidence.</a:t>
             </a:r>
-            <a:endParaRPr lang="en-US" sz="1250" dirty="0"/>
-          </a:p>
-        </p:txBody>
-      </p:sp>
-      <p:sp>
-        <p:nvSpPr>
-          <p:cNvPr id="12" name="Shape 10"/>
+            <a:endParaRPr lang="en-US" sz="1550" dirty="0"/>
+          </a:p>
+        </p:txBody>
+      </p:sp>
+      <p:sp>
+        <p:nvSpPr>
+          <p:cNvPr id="13" name="Shape 11"/>
           <p:cNvSpPr/>
           <p:nvPr/>
         </p:nvSpPr>
@@ -4638,14 +4794,14 @@
       </p:sp>
       <p:sp>
         <p:nvSpPr>
-          <p:cNvPr id="13" name="Text 11"/>
+          <p:cNvPr id="14" name="Text 12"/>
           <p:cNvSpPr/>
           <p:nvPr/>
         </p:nvSpPr>
         <p:spPr>
           <a:xfrm>
             <a:off x="8074152" y="3666744"/>
-            <a:ext cx="2825496" cy="201168"/>
+            <a:ext cx="2825496" cy="256032"/>
           </a:xfrm>
           <a:prstGeom prst="rect">
             <a:avLst/>
@@ -4661,7 +4817,7 @@
               <a:buNone/>
             </a:pPr>
             <a:r>
-              <a:rPr lang="en-US" sz="950" b="1" dirty="0">
+              <a:rPr lang="en-US" sz="1300" b="1" dirty="0">
                 <a:solidFill>
                   <a:srgbClr val="0068B7"/>
                 </a:solidFill>
@@ -4671,20 +4827,20 @@
               </a:rPr>
               <a:t>Use this for</a:t>
             </a:r>
-            <a:endParaRPr lang="en-US" sz="950" dirty="0"/>
-          </a:p>
-        </p:txBody>
-      </p:sp>
-      <p:sp>
-        <p:nvSpPr>
-          <p:cNvPr id="14" name="Text 12"/>
-          <p:cNvSpPr/>
-          <p:nvPr/>
-        </p:nvSpPr>
-        <p:spPr>
-          <a:xfrm>
-            <a:off x="8074152" y="3959352"/>
-            <a:ext cx="2825496" cy="1170432"/>
+            <a:endParaRPr lang="en-US" sz="1300" dirty="0"/>
+          </a:p>
+        </p:txBody>
+      </p:sp>
+      <p:sp>
+        <p:nvSpPr>
+          <p:cNvPr id="15" name="Text 13"/>
+          <p:cNvSpPr/>
+          <p:nvPr/>
+        </p:nvSpPr>
+        <p:spPr>
+          <a:xfrm>
+            <a:off x="8074152" y="4023360"/>
+            <a:ext cx="2825496" cy="1097280"/>
           </a:xfrm>
           <a:prstGeom prst="rect">
             <a:avLst/>
@@ -4702,7 +4858,7 @@
               <a:buNone/>
             </a:pPr>
             <a:r>
-              <a:rPr lang="en-US" sz="1250" dirty="0">
+              <a:rPr lang="en-US" sz="1550" dirty="0">
                 <a:solidFill>
                   <a:srgbClr val="17364A"/>
                 </a:solidFill>
@@ -4712,7 +4868,7 @@
               </a:rPr>
               <a:t>Connect the concept to public health decisions, safeguards, documentation, or implementation work.</a:t>
             </a:r>
-            <a:endParaRPr lang="en-US" sz="1250" dirty="0"/>
+            <a:endParaRPr lang="en-US" sz="1550" dirty="0"/>
           </a:p>
         </p:txBody>
       </p:sp>
@@ -4909,7 +5065,7 @@
                 <a:ea typeface="Aptos" pitchFamily="34" charset="-122"/>
                 <a:cs typeface="Aptos" pitchFamily="34" charset="-120"/>
               </a:rPr>
-              <a:t>© Paula Soper</a:t>
+              <a:t>Â© Paula Soper</a:t>
             </a:r>
             <a:endParaRPr lang="en-US" sz="800" dirty="0"/>
           </a:p>
@@ -4923,8 +5079,47 @@
         </p:nvSpPr>
         <p:spPr>
           <a:xfrm>
+            <a:off x="11137392" y="6510528"/>
+            <a:ext cx="411480" cy="201168"/>
+          </a:xfrm>
+          <a:prstGeom prst="rect">
+            <a:avLst/>
+          </a:prstGeom>
+          <a:noFill/>
+          <a:ln/>
+        </p:spPr>
+        <p:txBody>
+          <a:bodyPr wrap="square" lIns="0" tIns="0" rIns="0" bIns="0" rtlCol="0" anchor="ctr"/>
+          <a:lstStyle/>
+          <a:p>
+            <a:pPr algn="r" indent="0" marL="0">
+              <a:buNone/>
+            </a:pPr>
+            <a:r>
+              <a:rPr lang="en-US" sz="900" dirty="0">
+                <a:solidFill>
+                  <a:srgbClr val="5F7181"/>
+                </a:solidFill>
+                <a:latin typeface="Aptos" pitchFamily="34" charset="0"/>
+                <a:ea typeface="Aptos" pitchFamily="34" charset="-122"/>
+                <a:cs typeface="Aptos" pitchFamily="34" charset="-120"/>
+              </a:rPr>
+              <a:t>13</a:t>
+            </a:r>
+            <a:endParaRPr lang="en-US" sz="900" dirty="0"/>
+          </a:p>
+        </p:txBody>
+      </p:sp>
+      <p:sp>
+        <p:nvSpPr>
+          <p:cNvPr id="8" name="Text 6"/>
+          <p:cNvSpPr/>
+          <p:nvPr/>
+        </p:nvSpPr>
+        <p:spPr>
+          <a:xfrm>
             <a:off x="640080" y="658368"/>
-            <a:ext cx="10881360" cy="566928"/>
+            <a:ext cx="10881360" cy="713232"/>
           </a:xfrm>
           <a:prstGeom prst="rect">
             <a:avLst/>
@@ -4942,7 +5137,7 @@
               <a:buNone/>
             </a:pPr>
             <a:r>
-              <a:rPr lang="en-US" sz="2700" b="1" dirty="0">
+              <a:rPr lang="en-US" sz="3400" b="1" dirty="0">
                 <a:solidFill>
                   <a:srgbClr val="003A63"/>
                 </a:solidFill>
@@ -4952,20 +5147,20 @@
               </a:rPr>
               <a:t>Risks, Failure Modes, and Guardrails Continued</a:t>
             </a:r>
-            <a:endParaRPr lang="en-US" sz="2700" dirty="0"/>
-          </a:p>
-        </p:txBody>
-      </p:sp>
-      <p:sp>
-        <p:nvSpPr>
-          <p:cNvPr id="8" name="Text 6"/>
-          <p:cNvSpPr/>
-          <p:nvPr/>
-        </p:nvSpPr>
-        <p:spPr>
-          <a:xfrm>
-            <a:off x="868680" y="1417320"/>
-            <a:ext cx="6675120" cy="4434840"/>
+            <a:endParaRPr lang="en-US" sz="3400" dirty="0"/>
+          </a:p>
+        </p:txBody>
+      </p:sp>
+      <p:sp>
+        <p:nvSpPr>
+          <p:cNvPr id="9" name="Text 7"/>
+          <p:cNvSpPr/>
+          <p:nvPr/>
+        </p:nvSpPr>
+        <p:spPr>
+          <a:xfrm>
+            <a:off x="868680" y="1508760"/>
+            <a:ext cx="6537960" cy="4160520"/>
           </a:xfrm>
           <a:prstGeom prst="rect">
             <a:avLst/>
@@ -4980,7 +5175,7 @@
           <a:lstStyle/>
           <a:p>
             <a:r>
-              <a:rPr lang="en-US" sz="1700" dirty="0">
+              <a:rPr lang="en-US" sz="2100" dirty="0">
                 <a:solidFill>
                   <a:srgbClr val="17364A"/>
                 </a:solidFill>
@@ -4990,11 +5185,11 @@
               </a:rPr>
               <a:t>Recommended guardrails include the following:</a:t>
             </a:r>
-            <a:endParaRPr lang="en-US" sz="1700" dirty="0"/>
-          </a:p>
-          <a:p>
-            <a:r>
-              <a:rPr lang="en-US" sz="1700" dirty="0">
+            <a:endParaRPr lang="en-US" sz="2100" dirty="0"/>
+          </a:p>
+          <a:p>
+            <a:r>
+              <a:rPr lang="en-US" sz="2100" dirty="0">
                 <a:solidFill>
                   <a:srgbClr val="17364A"/>
                 </a:solidFill>
@@ -5004,11 +5199,11 @@
               </a:rPr>
               <a:t>Maintain an AI evidence inventory for each approved AI use.</a:t>
             </a:r>
-            <a:endParaRPr lang="en-US" sz="1700" dirty="0"/>
-          </a:p>
-          <a:p>
-            <a:r>
-              <a:rPr lang="en-US" sz="1700" dirty="0">
+            <a:endParaRPr lang="en-US" sz="2100" dirty="0"/>
+          </a:p>
+          <a:p>
+            <a:r>
+              <a:rPr lang="en-US" sz="2100" dirty="0">
                 <a:solidFill>
                   <a:srgbClr val="17364A"/>
                 </a:solidFill>
@@ -5018,13 +5213,13 @@
               </a:rPr>
               <a:t>Use decision logs for approvals, deferrals, conditions, changes, and retirement.</a:t>
             </a:r>
-            <a:endParaRPr lang="en-US" sz="1700" dirty="0"/>
-          </a:p>
-        </p:txBody>
-      </p:sp>
-      <p:sp>
-        <p:nvSpPr>
-          <p:cNvPr id="9" name="Shape 7"/>
+            <a:endParaRPr lang="en-US" sz="2100" dirty="0"/>
+          </a:p>
+        </p:txBody>
+      </p:sp>
+      <p:sp>
+        <p:nvSpPr>
+          <p:cNvPr id="10" name="Shape 8"/>
           <p:cNvSpPr/>
           <p:nvPr/>
         </p:nvSpPr>
@@ -5051,14 +5246,14 @@
       </p:sp>
       <p:sp>
         <p:nvSpPr>
-          <p:cNvPr id="10" name="Text 8"/>
+          <p:cNvPr id="11" name="Text 9"/>
           <p:cNvSpPr/>
           <p:nvPr/>
         </p:nvSpPr>
         <p:spPr>
           <a:xfrm>
             <a:off x="8074152" y="1563624"/>
-            <a:ext cx="2825496" cy="201168"/>
+            <a:ext cx="2825496" cy="256032"/>
           </a:xfrm>
           <a:prstGeom prst="rect">
             <a:avLst/>
@@ -5074,7 +5269,7 @@
               <a:buNone/>
             </a:pPr>
             <a:r>
-              <a:rPr lang="en-US" sz="950" b="1" dirty="0">
+              <a:rPr lang="en-US" sz="1300" b="1" dirty="0">
                 <a:solidFill>
                   <a:srgbClr val="0068B7"/>
                 </a:solidFill>
@@ -5084,20 +5279,20 @@
               </a:rPr>
               <a:t>Key idea</a:t>
             </a:r>
-            <a:endParaRPr lang="en-US" sz="950" dirty="0"/>
-          </a:p>
-        </p:txBody>
-      </p:sp>
-      <p:sp>
-        <p:nvSpPr>
-          <p:cNvPr id="11" name="Text 9"/>
-          <p:cNvSpPr/>
-          <p:nvPr/>
-        </p:nvSpPr>
-        <p:spPr>
-          <a:xfrm>
-            <a:off x="8074152" y="1856232"/>
-            <a:ext cx="2825496" cy="1261872"/>
+            <a:endParaRPr lang="en-US" sz="1300" dirty="0"/>
+          </a:p>
+        </p:txBody>
+      </p:sp>
+      <p:sp>
+        <p:nvSpPr>
+          <p:cNvPr id="12" name="Text 10"/>
+          <p:cNvSpPr/>
+          <p:nvPr/>
+        </p:nvSpPr>
+        <p:spPr>
+          <a:xfrm>
+            <a:off x="8074152" y="1920240"/>
+            <a:ext cx="2825496" cy="1188720"/>
           </a:xfrm>
           <a:prstGeom prst="rect">
             <a:avLst/>
@@ -5115,7 +5310,7 @@
               <a:buNone/>
             </a:pPr>
             <a:r>
-              <a:rPr lang="en-US" sz="1250" dirty="0">
+              <a:rPr lang="en-US" sz="1550" dirty="0">
                 <a:solidFill>
                   <a:srgbClr val="17364A"/>
                 </a:solidFill>
@@ -5125,13 +5320,13 @@
               </a:rPr>
               <a:t>Recommended guardrails include the following:</a:t>
             </a:r>
-            <a:endParaRPr lang="en-US" sz="1250" dirty="0"/>
-          </a:p>
-        </p:txBody>
-      </p:sp>
-      <p:sp>
-        <p:nvSpPr>
-          <p:cNvPr id="12" name="Shape 10"/>
+            <a:endParaRPr lang="en-US" sz="1550" dirty="0"/>
+          </a:p>
+        </p:txBody>
+      </p:sp>
+      <p:sp>
+        <p:nvSpPr>
+          <p:cNvPr id="13" name="Shape 11"/>
           <p:cNvSpPr/>
           <p:nvPr/>
         </p:nvSpPr>
@@ -5158,14 +5353,14 @@
       </p:sp>
       <p:sp>
         <p:nvSpPr>
-          <p:cNvPr id="13" name="Text 11"/>
+          <p:cNvPr id="14" name="Text 12"/>
           <p:cNvSpPr/>
           <p:nvPr/>
         </p:nvSpPr>
         <p:spPr>
           <a:xfrm>
             <a:off x="8074152" y="3666744"/>
-            <a:ext cx="2825496" cy="201168"/>
+            <a:ext cx="2825496" cy="256032"/>
           </a:xfrm>
           <a:prstGeom prst="rect">
             <a:avLst/>
@@ -5181,7 +5376,7 @@
               <a:buNone/>
             </a:pPr>
             <a:r>
-              <a:rPr lang="en-US" sz="950" b="1" dirty="0">
+              <a:rPr lang="en-US" sz="1300" b="1" dirty="0">
                 <a:solidFill>
                   <a:srgbClr val="0068B7"/>
                 </a:solidFill>
@@ -5191,20 +5386,20 @@
               </a:rPr>
               <a:t>Use this for</a:t>
             </a:r>
-            <a:endParaRPr lang="en-US" sz="950" dirty="0"/>
-          </a:p>
-        </p:txBody>
-      </p:sp>
-      <p:sp>
-        <p:nvSpPr>
-          <p:cNvPr id="14" name="Text 12"/>
-          <p:cNvSpPr/>
-          <p:nvPr/>
-        </p:nvSpPr>
-        <p:spPr>
-          <a:xfrm>
-            <a:off x="8074152" y="3959352"/>
-            <a:ext cx="2825496" cy="1170432"/>
+            <a:endParaRPr lang="en-US" sz="1300" dirty="0"/>
+          </a:p>
+        </p:txBody>
+      </p:sp>
+      <p:sp>
+        <p:nvSpPr>
+          <p:cNvPr id="15" name="Text 13"/>
+          <p:cNvSpPr/>
+          <p:nvPr/>
+        </p:nvSpPr>
+        <p:spPr>
+          <a:xfrm>
+            <a:off x="8074152" y="4023360"/>
+            <a:ext cx="2825496" cy="1097280"/>
           </a:xfrm>
           <a:prstGeom prst="rect">
             <a:avLst/>
@@ -5222,7 +5417,7 @@
               <a:buNone/>
             </a:pPr>
             <a:r>
-              <a:rPr lang="en-US" sz="1250" dirty="0">
+              <a:rPr lang="en-US" sz="1550" dirty="0">
                 <a:solidFill>
                   <a:srgbClr val="17364A"/>
                 </a:solidFill>
@@ -5232,7 +5427,7 @@
               </a:rPr>
               <a:t>Connect the concept to public health decisions, safeguards, documentation, or implementation work.</a:t>
             </a:r>
-            <a:endParaRPr lang="en-US" sz="1250" dirty="0"/>
+            <a:endParaRPr lang="en-US" sz="1550" dirty="0"/>
           </a:p>
         </p:txBody>
       </p:sp>
@@ -5429,7 +5624,7 @@
                 <a:ea typeface="Aptos" pitchFamily="34" charset="-122"/>
                 <a:cs typeface="Aptos" pitchFamily="34" charset="-120"/>
               </a:rPr>
-              <a:t>© Paula Soper</a:t>
+              <a:t>Â© Paula Soper</a:t>
             </a:r>
             <a:endParaRPr lang="en-US" sz="800" dirty="0"/>
           </a:p>
@@ -5443,8 +5638,47 @@
         </p:nvSpPr>
         <p:spPr>
           <a:xfrm>
+            <a:off x="11137392" y="6510528"/>
+            <a:ext cx="411480" cy="201168"/>
+          </a:xfrm>
+          <a:prstGeom prst="rect">
+            <a:avLst/>
+          </a:prstGeom>
+          <a:noFill/>
+          <a:ln/>
+        </p:spPr>
+        <p:txBody>
+          <a:bodyPr wrap="square" lIns="0" tIns="0" rIns="0" bIns="0" rtlCol="0" anchor="ctr"/>
+          <a:lstStyle/>
+          <a:p>
+            <a:pPr algn="r" indent="0" marL="0">
+              <a:buNone/>
+            </a:pPr>
+            <a:r>
+              <a:rPr lang="en-US" sz="900" dirty="0">
+                <a:solidFill>
+                  <a:srgbClr val="5F7181"/>
+                </a:solidFill>
+                <a:latin typeface="Aptos" pitchFamily="34" charset="0"/>
+                <a:ea typeface="Aptos" pitchFamily="34" charset="-122"/>
+                <a:cs typeface="Aptos" pitchFamily="34" charset="-120"/>
+              </a:rPr>
+              <a:t>14</a:t>
+            </a:r>
+            <a:endParaRPr lang="en-US" sz="900" dirty="0"/>
+          </a:p>
+        </p:txBody>
+      </p:sp>
+      <p:sp>
+        <p:nvSpPr>
+          <p:cNvPr id="8" name="Text 6"/>
+          <p:cNvSpPr/>
+          <p:nvPr/>
+        </p:nvSpPr>
+        <p:spPr>
+          <a:xfrm>
             <a:off x="640080" y="658368"/>
-            <a:ext cx="10881360" cy="566928"/>
+            <a:ext cx="10881360" cy="713232"/>
           </a:xfrm>
           <a:prstGeom prst="rect">
             <a:avLst/>
@@ -5462,7 +5696,7 @@
               <a:buNone/>
             </a:pPr>
             <a:r>
-              <a:rPr lang="en-US" sz="2700" b="1" dirty="0">
+              <a:rPr lang="en-US" sz="3400" b="1" dirty="0">
                 <a:solidFill>
                   <a:srgbClr val="003A63"/>
                 </a:solidFill>
@@ -5472,20 +5706,20 @@
               </a:rPr>
               <a:t>Risks, Failure Modes, and Guardrails Continued</a:t>
             </a:r>
-            <a:endParaRPr lang="en-US" sz="2700" dirty="0"/>
-          </a:p>
-        </p:txBody>
-      </p:sp>
-      <p:sp>
-        <p:nvSpPr>
-          <p:cNvPr id="8" name="Text 6"/>
-          <p:cNvSpPr/>
-          <p:nvPr/>
-        </p:nvSpPr>
-        <p:spPr>
-          <a:xfrm>
-            <a:off x="868680" y="1417320"/>
-            <a:ext cx="6675120" cy="4434840"/>
+            <a:endParaRPr lang="en-US" sz="3400" dirty="0"/>
+          </a:p>
+        </p:txBody>
+      </p:sp>
+      <p:sp>
+        <p:nvSpPr>
+          <p:cNvPr id="9" name="Text 7"/>
+          <p:cNvSpPr/>
+          <p:nvPr/>
+        </p:nvSpPr>
+        <p:spPr>
+          <a:xfrm>
+            <a:off x="868680" y="1508760"/>
+            <a:ext cx="6537960" cy="4160520"/>
           </a:xfrm>
           <a:prstGeom prst="rect">
             <a:avLst/>
@@ -5500,7 +5734,7 @@
           <a:lstStyle/>
           <a:p>
             <a:r>
-              <a:rPr lang="en-US" sz="1700" dirty="0">
+              <a:rPr lang="en-US" sz="2100" dirty="0">
                 <a:solidFill>
                   <a:srgbClr val="17364A"/>
                 </a:solidFill>
@@ -5510,11 +5744,11 @@
               </a:rPr>
               <a:t>Preserve validation, testing, monitoring, training, SOP, and incident records.</a:t>
             </a:r>
-            <a:endParaRPr lang="en-US" sz="1700" dirty="0"/>
-          </a:p>
-          <a:p>
-            <a:r>
-              <a:rPr lang="en-US" sz="1700" dirty="0">
+            <a:endParaRPr lang="en-US" sz="2100" dirty="0"/>
+          </a:p>
+          <a:p>
+            <a:r>
+              <a:rPr lang="en-US" sz="2100" dirty="0">
                 <a:solidFill>
                   <a:srgbClr val="17364A"/>
                 </a:solidFill>
@@ -5524,11 +5758,11 @@
               </a:rPr>
               <a:t>Assign artifact ownership and retention expectations.</a:t>
             </a:r>
-            <a:endParaRPr lang="en-US" sz="1700" dirty="0"/>
-          </a:p>
-          <a:p>
-            <a:r>
-              <a:rPr lang="en-US" sz="1700" dirty="0">
+            <a:endParaRPr lang="en-US" sz="2100" dirty="0"/>
+          </a:p>
+          <a:p>
+            <a:r>
+              <a:rPr lang="en-US" sz="2100" dirty="0">
                 <a:solidFill>
                   <a:srgbClr val="17364A"/>
                 </a:solidFill>
@@ -5538,13 +5772,13 @@
               </a:rPr>
               <a:t>Review evidence completeness during periodic governance review.</a:t>
             </a:r>
-            <a:endParaRPr lang="en-US" sz="1700" dirty="0"/>
-          </a:p>
-        </p:txBody>
-      </p:sp>
-      <p:sp>
-        <p:nvSpPr>
-          <p:cNvPr id="9" name="Shape 7"/>
+            <a:endParaRPr lang="en-US" sz="2100" dirty="0"/>
+          </a:p>
+        </p:txBody>
+      </p:sp>
+      <p:sp>
+        <p:nvSpPr>
+          <p:cNvPr id="10" name="Shape 8"/>
           <p:cNvSpPr/>
           <p:nvPr/>
         </p:nvSpPr>
@@ -5571,14 +5805,14 @@
       </p:sp>
       <p:sp>
         <p:nvSpPr>
-          <p:cNvPr id="10" name="Text 8"/>
+          <p:cNvPr id="11" name="Text 9"/>
           <p:cNvSpPr/>
           <p:nvPr/>
         </p:nvSpPr>
         <p:spPr>
           <a:xfrm>
             <a:off x="8074152" y="1563624"/>
-            <a:ext cx="2825496" cy="201168"/>
+            <a:ext cx="2825496" cy="256032"/>
           </a:xfrm>
           <a:prstGeom prst="rect">
             <a:avLst/>
@@ -5594,7 +5828,7 @@
               <a:buNone/>
             </a:pPr>
             <a:r>
-              <a:rPr lang="en-US" sz="950" b="1" dirty="0">
+              <a:rPr lang="en-US" sz="1300" b="1" dirty="0">
                 <a:solidFill>
                   <a:srgbClr val="0068B7"/>
                 </a:solidFill>
@@ -5604,20 +5838,20 @@
               </a:rPr>
               <a:t>Key idea</a:t>
             </a:r>
-            <a:endParaRPr lang="en-US" sz="950" dirty="0"/>
-          </a:p>
-        </p:txBody>
-      </p:sp>
-      <p:sp>
-        <p:nvSpPr>
-          <p:cNvPr id="11" name="Text 9"/>
-          <p:cNvSpPr/>
-          <p:nvPr/>
-        </p:nvSpPr>
-        <p:spPr>
-          <a:xfrm>
-            <a:off x="8074152" y="1856232"/>
-            <a:ext cx="2825496" cy="1261872"/>
+            <a:endParaRPr lang="en-US" sz="1300" dirty="0"/>
+          </a:p>
+        </p:txBody>
+      </p:sp>
+      <p:sp>
+        <p:nvSpPr>
+          <p:cNvPr id="12" name="Text 10"/>
+          <p:cNvSpPr/>
+          <p:nvPr/>
+        </p:nvSpPr>
+        <p:spPr>
+          <a:xfrm>
+            <a:off x="8074152" y="1920240"/>
+            <a:ext cx="2825496" cy="1188720"/>
           </a:xfrm>
           <a:prstGeom prst="rect">
             <a:avLst/>
@@ -5635,7 +5869,7 @@
               <a:buNone/>
             </a:pPr>
             <a:r>
-              <a:rPr lang="en-US" sz="1250" dirty="0">
+              <a:rPr lang="en-US" sz="1550" dirty="0">
                 <a:solidFill>
                   <a:srgbClr val="17364A"/>
                 </a:solidFill>
@@ -5645,13 +5879,13 @@
               </a:rPr>
               <a:t>Preserve validation, testing, monitoring, training, SOP, and incident records.</a:t>
             </a:r>
-            <a:endParaRPr lang="en-US" sz="1250" dirty="0"/>
-          </a:p>
-        </p:txBody>
-      </p:sp>
-      <p:sp>
-        <p:nvSpPr>
-          <p:cNvPr id="12" name="Shape 10"/>
+            <a:endParaRPr lang="en-US" sz="1550" dirty="0"/>
+          </a:p>
+        </p:txBody>
+      </p:sp>
+      <p:sp>
+        <p:nvSpPr>
+          <p:cNvPr id="13" name="Shape 11"/>
           <p:cNvSpPr/>
           <p:nvPr/>
         </p:nvSpPr>
@@ -5678,14 +5912,14 @@
       </p:sp>
       <p:sp>
         <p:nvSpPr>
-          <p:cNvPr id="13" name="Text 11"/>
+          <p:cNvPr id="14" name="Text 12"/>
           <p:cNvSpPr/>
           <p:nvPr/>
         </p:nvSpPr>
         <p:spPr>
           <a:xfrm>
             <a:off x="8074152" y="3666744"/>
-            <a:ext cx="2825496" cy="201168"/>
+            <a:ext cx="2825496" cy="256032"/>
           </a:xfrm>
           <a:prstGeom prst="rect">
             <a:avLst/>
@@ -5701,7 +5935,7 @@
               <a:buNone/>
             </a:pPr>
             <a:r>
-              <a:rPr lang="en-US" sz="950" b="1" dirty="0">
+              <a:rPr lang="en-US" sz="1300" b="1" dirty="0">
                 <a:solidFill>
                   <a:srgbClr val="0068B7"/>
                 </a:solidFill>
@@ -5711,20 +5945,20 @@
               </a:rPr>
               <a:t>Use this for</a:t>
             </a:r>
-            <a:endParaRPr lang="en-US" sz="950" dirty="0"/>
-          </a:p>
-        </p:txBody>
-      </p:sp>
-      <p:sp>
-        <p:nvSpPr>
-          <p:cNvPr id="14" name="Text 12"/>
-          <p:cNvSpPr/>
-          <p:nvPr/>
-        </p:nvSpPr>
-        <p:spPr>
-          <a:xfrm>
-            <a:off x="8074152" y="3959352"/>
-            <a:ext cx="2825496" cy="1170432"/>
+            <a:endParaRPr lang="en-US" sz="1300" dirty="0"/>
+          </a:p>
+        </p:txBody>
+      </p:sp>
+      <p:sp>
+        <p:nvSpPr>
+          <p:cNvPr id="15" name="Text 13"/>
+          <p:cNvSpPr/>
+          <p:nvPr/>
+        </p:nvSpPr>
+        <p:spPr>
+          <a:xfrm>
+            <a:off x="8074152" y="4023360"/>
+            <a:ext cx="2825496" cy="1097280"/>
           </a:xfrm>
           <a:prstGeom prst="rect">
             <a:avLst/>
@@ -5742,7 +5976,7 @@
               <a:buNone/>
             </a:pPr>
             <a:r>
-              <a:rPr lang="en-US" sz="1250" dirty="0">
+              <a:rPr lang="en-US" sz="1550" dirty="0">
                 <a:solidFill>
                   <a:srgbClr val="17364A"/>
                 </a:solidFill>
@@ -5752,7 +5986,7 @@
               </a:rPr>
               <a:t>Connect the concept to public health decisions, safeguards, documentation, or implementation work.</a:t>
             </a:r>
-            <a:endParaRPr lang="en-US" sz="1250" dirty="0"/>
+            <a:endParaRPr lang="en-US" sz="1550" dirty="0"/>
           </a:p>
         </p:txBody>
       </p:sp>
@@ -5949,7 +6183,7 @@
                 <a:ea typeface="Aptos" pitchFamily="34" charset="-122"/>
                 <a:cs typeface="Aptos" pitchFamily="34" charset="-120"/>
               </a:rPr>
-              <a:t>© Paula Soper</a:t>
+              <a:t>Â© Paula Soper</a:t>
             </a:r>
             <a:endParaRPr lang="en-US" sz="800" dirty="0"/>
           </a:p>
@@ -5957,7 +6191,46 @@
       </p:sp>
       <p:sp>
         <p:nvSpPr>
-          <p:cNvPr id="7" name="Shape 5"/>
+          <p:cNvPr id="7" name="Text 5"/>
+          <p:cNvSpPr/>
+          <p:nvPr/>
+        </p:nvSpPr>
+        <p:spPr>
+          <a:xfrm>
+            <a:off x="11137392" y="6510528"/>
+            <a:ext cx="411480" cy="201168"/>
+          </a:xfrm>
+          <a:prstGeom prst="rect">
+            <a:avLst/>
+          </a:prstGeom>
+          <a:noFill/>
+          <a:ln/>
+        </p:spPr>
+        <p:txBody>
+          <a:bodyPr wrap="square" lIns="0" tIns="0" rIns="0" bIns="0" rtlCol="0" anchor="ctr"/>
+          <a:lstStyle/>
+          <a:p>
+            <a:pPr algn="r" indent="0" marL="0">
+              <a:buNone/>
+            </a:pPr>
+            <a:r>
+              <a:rPr lang="en-US" sz="900" dirty="0">
+                <a:solidFill>
+                  <a:srgbClr val="5F7181"/>
+                </a:solidFill>
+                <a:latin typeface="Aptos" pitchFamily="34" charset="0"/>
+                <a:ea typeface="Aptos" pitchFamily="34" charset="-122"/>
+                <a:cs typeface="Aptos" pitchFamily="34" charset="-120"/>
+              </a:rPr>
+              <a:t>15</a:t>
+            </a:r>
+            <a:endParaRPr lang="en-US" sz="900" dirty="0"/>
+          </a:p>
+        </p:txBody>
+      </p:sp>
+      <p:sp>
+        <p:nvSpPr>
+          <p:cNvPr id="8" name="Shape 6"/>
           <p:cNvSpPr/>
           <p:nvPr/>
         </p:nvSpPr>
@@ -5982,7 +6255,7 @@
       </p:sp>
       <p:sp>
         <p:nvSpPr>
-          <p:cNvPr id="8" name="Text 6"/>
+          <p:cNvPr id="9" name="Text 7"/>
           <p:cNvSpPr/>
           <p:nvPr/>
         </p:nvSpPr>
@@ -6021,14 +6294,14 @@
       </p:sp>
       <p:sp>
         <p:nvSpPr>
-          <p:cNvPr id="9" name="Text 7"/>
+          <p:cNvPr id="10" name="Text 8"/>
           <p:cNvSpPr/>
           <p:nvPr/>
         </p:nvSpPr>
         <p:spPr>
           <a:xfrm>
             <a:off x="640080" y="621792"/>
-            <a:ext cx="10881360" cy="566928"/>
+            <a:ext cx="10881360" cy="713232"/>
           </a:xfrm>
           <a:prstGeom prst="rect">
             <a:avLst/>
@@ -6046,7 +6319,7 @@
               <a:buNone/>
             </a:pPr>
             <a:r>
-              <a:rPr lang="en-US" sz="2700" b="1" dirty="0">
+              <a:rPr lang="en-US" sz="3400" b="1" dirty="0">
                 <a:solidFill>
                   <a:srgbClr val="003A63"/>
                 </a:solidFill>
@@ -6056,20 +6329,20 @@
               </a:rPr>
               <a:t>Reflection Questions</a:t>
             </a:r>
-            <a:endParaRPr lang="en-US" sz="2700" dirty="0"/>
-          </a:p>
-        </p:txBody>
-      </p:sp>
-      <p:sp>
-        <p:nvSpPr>
-          <p:cNvPr id="10" name="Text 8"/>
-          <p:cNvSpPr/>
-          <p:nvPr/>
-        </p:nvSpPr>
-        <p:spPr>
-          <a:xfrm>
-            <a:off x="868680" y="1417320"/>
-            <a:ext cx="6675120" cy="4434840"/>
+            <a:endParaRPr lang="en-US" sz="3400" dirty="0"/>
+          </a:p>
+        </p:txBody>
+      </p:sp>
+      <p:sp>
+        <p:nvSpPr>
+          <p:cNvPr id="11" name="Text 9"/>
+          <p:cNvSpPr/>
+          <p:nvPr/>
+        </p:nvSpPr>
+        <p:spPr>
+          <a:xfrm>
+            <a:off x="868680" y="1508760"/>
+            <a:ext cx="6537960" cy="4160520"/>
           </a:xfrm>
           <a:prstGeom prst="rect">
             <a:avLst/>
@@ -6084,7 +6357,7 @@
           <a:lstStyle/>
           <a:p>
             <a:r>
-              <a:rPr lang="en-US" sz="1700" dirty="0">
+              <a:rPr lang="en-US" sz="2100" dirty="0">
                 <a:solidFill>
                   <a:srgbClr val="17364A"/>
                 </a:solidFill>
@@ -6094,11 +6367,11 @@
               </a:rPr>
               <a:t>Where does this topic appear in your agency, program, or workflow?</a:t>
             </a:r>
-            <a:endParaRPr lang="en-US" sz="1700" dirty="0"/>
-          </a:p>
-          <a:p>
-            <a:r>
-              <a:rPr lang="en-US" sz="1700" dirty="0">
+            <a:endParaRPr lang="en-US" sz="2100" dirty="0"/>
+          </a:p>
+          <a:p>
+            <a:r>
+              <a:rPr lang="en-US" sz="2100" dirty="0">
                 <a:solidFill>
                   <a:srgbClr val="17364A"/>
                 </a:solidFill>
@@ -6108,11 +6381,11 @@
               </a:rPr>
               <a:t>Which staff roles would need to understand or apply this concept before AI use is approved?</a:t>
             </a:r>
-            <a:endParaRPr lang="en-US" sz="1700" dirty="0"/>
-          </a:p>
-          <a:p>
-            <a:r>
-              <a:rPr lang="en-US" sz="1700" dirty="0">
+            <a:endParaRPr lang="en-US" sz="2100" dirty="0"/>
+          </a:p>
+          <a:p>
+            <a:r>
+              <a:rPr lang="en-US" sz="2100" dirty="0">
                 <a:solidFill>
                   <a:srgbClr val="17364A"/>
                 </a:solidFill>
@@ -6122,13 +6395,13 @@
               </a:rPr>
               <a:t>What could go wrong if this topic is not addressed before implementation?</a:t>
             </a:r>
-            <a:endParaRPr lang="en-US" sz="1700" dirty="0"/>
-          </a:p>
-        </p:txBody>
-      </p:sp>
-      <p:sp>
-        <p:nvSpPr>
-          <p:cNvPr id="11" name="Shape 9"/>
+            <a:endParaRPr lang="en-US" sz="2100" dirty="0"/>
+          </a:p>
+        </p:txBody>
+      </p:sp>
+      <p:sp>
+        <p:nvSpPr>
+          <p:cNvPr id="12" name="Shape 10"/>
           <p:cNvSpPr/>
           <p:nvPr/>
         </p:nvSpPr>
@@ -6155,14 +6428,14 @@
       </p:sp>
       <p:sp>
         <p:nvSpPr>
-          <p:cNvPr id="12" name="Text 10"/>
+          <p:cNvPr id="13" name="Text 11"/>
           <p:cNvSpPr/>
           <p:nvPr/>
         </p:nvSpPr>
         <p:spPr>
           <a:xfrm>
             <a:off x="8074152" y="1563624"/>
-            <a:ext cx="2825496" cy="201168"/>
+            <a:ext cx="2825496" cy="256032"/>
           </a:xfrm>
           <a:prstGeom prst="rect">
             <a:avLst/>
@@ -6178,7 +6451,7 @@
               <a:buNone/>
             </a:pPr>
             <a:r>
-              <a:rPr lang="en-US" sz="950" b="1" dirty="0">
+              <a:rPr lang="en-US" sz="1300" b="1" dirty="0">
                 <a:solidFill>
                   <a:srgbClr val="0068B7"/>
                 </a:solidFill>
@@ -6188,20 +6461,20 @@
               </a:rPr>
               <a:t>Key idea</a:t>
             </a:r>
-            <a:endParaRPr lang="en-US" sz="950" dirty="0"/>
-          </a:p>
-        </p:txBody>
-      </p:sp>
-      <p:sp>
-        <p:nvSpPr>
-          <p:cNvPr id="13" name="Text 11"/>
-          <p:cNvSpPr/>
-          <p:nvPr/>
-        </p:nvSpPr>
-        <p:spPr>
-          <a:xfrm>
-            <a:off x="8074152" y="1856232"/>
-            <a:ext cx="2825496" cy="1261872"/>
+            <a:endParaRPr lang="en-US" sz="1300" dirty="0"/>
+          </a:p>
+        </p:txBody>
+      </p:sp>
+      <p:sp>
+        <p:nvSpPr>
+          <p:cNvPr id="14" name="Text 12"/>
+          <p:cNvSpPr/>
+          <p:nvPr/>
+        </p:nvSpPr>
+        <p:spPr>
+          <a:xfrm>
+            <a:off x="8074152" y="1920240"/>
+            <a:ext cx="2825496" cy="1188720"/>
           </a:xfrm>
           <a:prstGeom prst="rect">
             <a:avLst/>
@@ -6219,7 +6492,7 @@
               <a:buNone/>
             </a:pPr>
             <a:r>
-              <a:rPr lang="en-US" sz="1250" dirty="0">
+              <a:rPr lang="en-US" sz="1550" dirty="0">
                 <a:solidFill>
                   <a:srgbClr val="17364A"/>
                 </a:solidFill>
@@ -6229,13 +6502,13 @@
               </a:rPr>
               <a:t>Where does this topic appear in your agency, program, or workflow?</a:t>
             </a:r>
-            <a:endParaRPr lang="en-US" sz="1250" dirty="0"/>
-          </a:p>
-        </p:txBody>
-      </p:sp>
-      <p:sp>
-        <p:nvSpPr>
-          <p:cNvPr id="14" name="Shape 12"/>
+            <a:endParaRPr lang="en-US" sz="1550" dirty="0"/>
+          </a:p>
+        </p:txBody>
+      </p:sp>
+      <p:sp>
+        <p:nvSpPr>
+          <p:cNvPr id="15" name="Shape 13"/>
           <p:cNvSpPr/>
           <p:nvPr/>
         </p:nvSpPr>
@@ -6262,14 +6535,14 @@
       </p:sp>
       <p:sp>
         <p:nvSpPr>
-          <p:cNvPr id="15" name="Text 13"/>
+          <p:cNvPr id="16" name="Text 14"/>
           <p:cNvSpPr/>
           <p:nvPr/>
         </p:nvSpPr>
         <p:spPr>
           <a:xfrm>
             <a:off x="8074152" y="3666744"/>
-            <a:ext cx="2825496" cy="201168"/>
+            <a:ext cx="2825496" cy="256032"/>
           </a:xfrm>
           <a:prstGeom prst="rect">
             <a:avLst/>
@@ -6285,7 +6558,7 @@
               <a:buNone/>
             </a:pPr>
             <a:r>
-              <a:rPr lang="en-US" sz="950" b="1" dirty="0">
+              <a:rPr lang="en-US" sz="1300" b="1" dirty="0">
                 <a:solidFill>
                   <a:srgbClr val="0068B7"/>
                 </a:solidFill>
@@ -6295,20 +6568,20 @@
               </a:rPr>
               <a:t>Use this for</a:t>
             </a:r>
-            <a:endParaRPr lang="en-US" sz="950" dirty="0"/>
-          </a:p>
-        </p:txBody>
-      </p:sp>
-      <p:sp>
-        <p:nvSpPr>
-          <p:cNvPr id="16" name="Text 14"/>
-          <p:cNvSpPr/>
-          <p:nvPr/>
-        </p:nvSpPr>
-        <p:spPr>
-          <a:xfrm>
-            <a:off x="8074152" y="3959352"/>
-            <a:ext cx="2825496" cy="1170432"/>
+            <a:endParaRPr lang="en-US" sz="1300" dirty="0"/>
+          </a:p>
+        </p:txBody>
+      </p:sp>
+      <p:sp>
+        <p:nvSpPr>
+          <p:cNvPr id="17" name="Text 15"/>
+          <p:cNvSpPr/>
+          <p:nvPr/>
+        </p:nvSpPr>
+        <p:spPr>
+          <a:xfrm>
+            <a:off x="8074152" y="4023360"/>
+            <a:ext cx="2825496" cy="1097280"/>
           </a:xfrm>
           <a:prstGeom prst="rect">
             <a:avLst/>
@@ -6326,7 +6599,7 @@
               <a:buNone/>
             </a:pPr>
             <a:r>
-              <a:rPr lang="en-US" sz="1250" dirty="0">
+              <a:rPr lang="en-US" sz="1550" dirty="0">
                 <a:solidFill>
                   <a:srgbClr val="17364A"/>
                 </a:solidFill>
@@ -6336,7 +6609,7 @@
               </a:rPr>
               <a:t>Connect the concept to public health decisions, safeguards, documentation, or implementation work.</a:t>
             </a:r>
-            <a:endParaRPr lang="en-US" sz="1250" dirty="0"/>
+            <a:endParaRPr lang="en-US" sz="1550" dirty="0"/>
           </a:p>
         </p:txBody>
       </p:sp>
@@ -6533,7 +6806,7 @@
                 <a:ea typeface="Aptos" pitchFamily="34" charset="-122"/>
                 <a:cs typeface="Aptos" pitchFamily="34" charset="-120"/>
               </a:rPr>
-              <a:t>© Paula Soper</a:t>
+              <a:t>Â© Paula Soper</a:t>
             </a:r>
             <a:endParaRPr lang="en-US" sz="800" dirty="0"/>
           </a:p>
@@ -6547,8 +6820,47 @@
         </p:nvSpPr>
         <p:spPr>
           <a:xfrm>
+            <a:off x="11137392" y="6510528"/>
+            <a:ext cx="411480" cy="201168"/>
+          </a:xfrm>
+          <a:prstGeom prst="rect">
+            <a:avLst/>
+          </a:prstGeom>
+          <a:noFill/>
+          <a:ln/>
+        </p:spPr>
+        <p:txBody>
+          <a:bodyPr wrap="square" lIns="0" tIns="0" rIns="0" bIns="0" rtlCol="0" anchor="ctr"/>
+          <a:lstStyle/>
+          <a:p>
+            <a:pPr algn="r" indent="0" marL="0">
+              <a:buNone/>
+            </a:pPr>
+            <a:r>
+              <a:rPr lang="en-US" sz="900" dirty="0">
+                <a:solidFill>
+                  <a:srgbClr val="5F7181"/>
+                </a:solidFill>
+                <a:latin typeface="Aptos" pitchFamily="34" charset="0"/>
+                <a:ea typeface="Aptos" pitchFamily="34" charset="-122"/>
+                <a:cs typeface="Aptos" pitchFamily="34" charset="-120"/>
+              </a:rPr>
+              <a:t>16</a:t>
+            </a:r>
+            <a:endParaRPr lang="en-US" sz="900" dirty="0"/>
+          </a:p>
+        </p:txBody>
+      </p:sp>
+      <p:sp>
+        <p:nvSpPr>
+          <p:cNvPr id="8" name="Text 6"/>
+          <p:cNvSpPr/>
+          <p:nvPr/>
+        </p:nvSpPr>
+        <p:spPr>
+          <a:xfrm>
             <a:off x="640080" y="658368"/>
-            <a:ext cx="10881360" cy="566928"/>
+            <a:ext cx="10881360" cy="713232"/>
           </a:xfrm>
           <a:prstGeom prst="rect">
             <a:avLst/>
@@ -6566,7 +6878,7 @@
               <a:buNone/>
             </a:pPr>
             <a:r>
-              <a:rPr lang="en-US" sz="2700" b="1" dirty="0">
+              <a:rPr lang="en-US" sz="3400" b="1" dirty="0">
                 <a:solidFill>
                   <a:srgbClr val="003A63"/>
                 </a:solidFill>
@@ -6576,20 +6888,20 @@
               </a:rPr>
               <a:t>Reflection Questions Continued</a:t>
             </a:r>
-            <a:endParaRPr lang="en-US" sz="2700" dirty="0"/>
-          </a:p>
-        </p:txBody>
-      </p:sp>
-      <p:sp>
-        <p:nvSpPr>
-          <p:cNvPr id="8" name="Text 6"/>
-          <p:cNvSpPr/>
-          <p:nvPr/>
-        </p:nvSpPr>
-        <p:spPr>
-          <a:xfrm>
-            <a:off x="868680" y="1417320"/>
-            <a:ext cx="6675120" cy="4434840"/>
+            <a:endParaRPr lang="en-US" sz="3400" dirty="0"/>
+          </a:p>
+        </p:txBody>
+      </p:sp>
+      <p:sp>
+        <p:nvSpPr>
+          <p:cNvPr id="9" name="Text 7"/>
+          <p:cNvSpPr/>
+          <p:nvPr/>
+        </p:nvSpPr>
+        <p:spPr>
+          <a:xfrm>
+            <a:off x="868680" y="1508760"/>
+            <a:ext cx="6537960" cy="4160520"/>
           </a:xfrm>
           <a:prstGeom prst="rect">
             <a:avLst/>
@@ -6604,7 +6916,7 @@
           <a:lstStyle/>
           <a:p>
             <a:r>
-              <a:rPr lang="en-US" sz="1700" dirty="0">
+              <a:rPr lang="en-US" sz="2100" dirty="0">
                 <a:solidFill>
                   <a:srgbClr val="17364A"/>
                 </a:solidFill>
@@ -6614,11 +6926,11 @@
               </a:rPr>
               <a:t>What evidence would governance, leadership, or operations staff need before moving forward?</a:t>
             </a:r>
-            <a:endParaRPr lang="en-US" sz="1700" dirty="0"/>
-          </a:p>
-          <a:p>
-            <a:r>
-              <a:rPr lang="en-US" sz="1700" dirty="0">
+            <a:endParaRPr lang="en-US" sz="2100" dirty="0"/>
+          </a:p>
+          <a:p>
+            <a:r>
+              <a:rPr lang="en-US" sz="2100" dirty="0">
                 <a:solidFill>
                   <a:srgbClr val="17364A"/>
                 </a:solidFill>
@@ -6628,13 +6940,13 @@
               </a:rPr>
               <a:t>Which policy, data, equity, privacy, security, or workflow questions remain unresolved?</a:t>
             </a:r>
-            <a:endParaRPr lang="en-US" sz="1700" dirty="0"/>
-          </a:p>
-        </p:txBody>
-      </p:sp>
-      <p:sp>
-        <p:nvSpPr>
-          <p:cNvPr id="9" name="Shape 7"/>
+            <a:endParaRPr lang="en-US" sz="2100" dirty="0"/>
+          </a:p>
+        </p:txBody>
+      </p:sp>
+      <p:sp>
+        <p:nvSpPr>
+          <p:cNvPr id="10" name="Shape 8"/>
           <p:cNvSpPr/>
           <p:nvPr/>
         </p:nvSpPr>
@@ -6661,14 +6973,14 @@
       </p:sp>
       <p:sp>
         <p:nvSpPr>
-          <p:cNvPr id="10" name="Text 8"/>
+          <p:cNvPr id="11" name="Text 9"/>
           <p:cNvSpPr/>
           <p:nvPr/>
         </p:nvSpPr>
         <p:spPr>
           <a:xfrm>
             <a:off x="8074152" y="1563624"/>
-            <a:ext cx="2825496" cy="201168"/>
+            <a:ext cx="2825496" cy="256032"/>
           </a:xfrm>
           <a:prstGeom prst="rect">
             <a:avLst/>
@@ -6684,7 +6996,7 @@
               <a:buNone/>
             </a:pPr>
             <a:r>
-              <a:rPr lang="en-US" sz="950" b="1" dirty="0">
+              <a:rPr lang="en-US" sz="1300" b="1" dirty="0">
                 <a:solidFill>
                   <a:srgbClr val="0068B7"/>
                 </a:solidFill>
@@ -6694,20 +7006,20 @@
               </a:rPr>
               <a:t>Key idea</a:t>
             </a:r>
-            <a:endParaRPr lang="en-US" sz="950" dirty="0"/>
-          </a:p>
-        </p:txBody>
-      </p:sp>
-      <p:sp>
-        <p:nvSpPr>
-          <p:cNvPr id="11" name="Text 9"/>
-          <p:cNvSpPr/>
-          <p:nvPr/>
-        </p:nvSpPr>
-        <p:spPr>
-          <a:xfrm>
-            <a:off x="8074152" y="1856232"/>
-            <a:ext cx="2825496" cy="1261872"/>
+            <a:endParaRPr lang="en-US" sz="1300" dirty="0"/>
+          </a:p>
+        </p:txBody>
+      </p:sp>
+      <p:sp>
+        <p:nvSpPr>
+          <p:cNvPr id="12" name="Text 10"/>
+          <p:cNvSpPr/>
+          <p:nvPr/>
+        </p:nvSpPr>
+        <p:spPr>
+          <a:xfrm>
+            <a:off x="8074152" y="1920240"/>
+            <a:ext cx="2825496" cy="1188720"/>
           </a:xfrm>
           <a:prstGeom prst="rect">
             <a:avLst/>
@@ -6725,7 +7037,7 @@
               <a:buNone/>
             </a:pPr>
             <a:r>
-              <a:rPr lang="en-US" sz="1250" dirty="0">
+              <a:rPr lang="en-US" sz="1550" dirty="0">
                 <a:solidFill>
                   <a:srgbClr val="17364A"/>
                 </a:solidFill>
@@ -6735,13 +7047,13 @@
               </a:rPr>
               <a:t>What evidence would governance, leadership, or operations staff need before moving forward?</a:t>
             </a:r>
-            <a:endParaRPr lang="en-US" sz="1250" dirty="0"/>
-          </a:p>
-        </p:txBody>
-      </p:sp>
-      <p:sp>
-        <p:nvSpPr>
-          <p:cNvPr id="12" name="Shape 10"/>
+            <a:endParaRPr lang="en-US" sz="1550" dirty="0"/>
+          </a:p>
+        </p:txBody>
+      </p:sp>
+      <p:sp>
+        <p:nvSpPr>
+          <p:cNvPr id="13" name="Shape 11"/>
           <p:cNvSpPr/>
           <p:nvPr/>
         </p:nvSpPr>
@@ -6768,14 +7080,14 @@
       </p:sp>
       <p:sp>
         <p:nvSpPr>
-          <p:cNvPr id="13" name="Text 11"/>
+          <p:cNvPr id="14" name="Text 12"/>
           <p:cNvSpPr/>
           <p:nvPr/>
         </p:nvSpPr>
         <p:spPr>
           <a:xfrm>
             <a:off x="8074152" y="3666744"/>
-            <a:ext cx="2825496" cy="201168"/>
+            <a:ext cx="2825496" cy="256032"/>
           </a:xfrm>
           <a:prstGeom prst="rect">
             <a:avLst/>
@@ -6791,7 +7103,7 @@
               <a:buNone/>
             </a:pPr>
             <a:r>
-              <a:rPr lang="en-US" sz="950" b="1" dirty="0">
+              <a:rPr lang="en-US" sz="1300" b="1" dirty="0">
                 <a:solidFill>
                   <a:srgbClr val="0068B7"/>
                 </a:solidFill>
@@ -6801,20 +7113,20 @@
               </a:rPr>
               <a:t>Use this for</a:t>
             </a:r>
-            <a:endParaRPr lang="en-US" sz="950" dirty="0"/>
-          </a:p>
-        </p:txBody>
-      </p:sp>
-      <p:sp>
-        <p:nvSpPr>
-          <p:cNvPr id="14" name="Text 12"/>
-          <p:cNvSpPr/>
-          <p:nvPr/>
-        </p:nvSpPr>
-        <p:spPr>
-          <a:xfrm>
-            <a:off x="8074152" y="3959352"/>
-            <a:ext cx="2825496" cy="1170432"/>
+            <a:endParaRPr lang="en-US" sz="1300" dirty="0"/>
+          </a:p>
+        </p:txBody>
+      </p:sp>
+      <p:sp>
+        <p:nvSpPr>
+          <p:cNvPr id="15" name="Text 13"/>
+          <p:cNvSpPr/>
+          <p:nvPr/>
+        </p:nvSpPr>
+        <p:spPr>
+          <a:xfrm>
+            <a:off x="8074152" y="4023360"/>
+            <a:ext cx="2825496" cy="1097280"/>
           </a:xfrm>
           <a:prstGeom prst="rect">
             <a:avLst/>
@@ -6832,7 +7144,7 @@
               <a:buNone/>
             </a:pPr>
             <a:r>
-              <a:rPr lang="en-US" sz="1250" dirty="0">
+              <a:rPr lang="en-US" sz="1550" dirty="0">
                 <a:solidFill>
                   <a:srgbClr val="17364A"/>
                 </a:solidFill>
@@ -6842,7 +7154,7 @@
               </a:rPr>
               <a:t>Connect the concept to public health decisions, safeguards, documentation, or implementation work.</a:t>
             </a:r>
-            <a:endParaRPr lang="en-US" sz="1250" dirty="0"/>
+            <a:endParaRPr lang="en-US" sz="1550" dirty="0"/>
           </a:p>
         </p:txBody>
       </p:sp>
@@ -7039,7 +7351,7 @@
                 <a:ea typeface="Aptos" pitchFamily="34" charset="-122"/>
                 <a:cs typeface="Aptos" pitchFamily="34" charset="-120"/>
               </a:rPr>
-              <a:t>© Paula Soper</a:t>
+              <a:t>Â© Paula Soper</a:t>
             </a:r>
             <a:endParaRPr lang="en-US" sz="800" dirty="0"/>
           </a:p>
@@ -7047,7 +7359,46 @@
       </p:sp>
       <p:sp>
         <p:nvSpPr>
-          <p:cNvPr id="7" name="Shape 5"/>
+          <p:cNvPr id="7" name="Text 5"/>
+          <p:cNvSpPr/>
+          <p:nvPr/>
+        </p:nvSpPr>
+        <p:spPr>
+          <a:xfrm>
+            <a:off x="11137392" y="6510528"/>
+            <a:ext cx="411480" cy="201168"/>
+          </a:xfrm>
+          <a:prstGeom prst="rect">
+            <a:avLst/>
+          </a:prstGeom>
+          <a:noFill/>
+          <a:ln/>
+        </p:spPr>
+        <p:txBody>
+          <a:bodyPr wrap="square" lIns="0" tIns="0" rIns="0" bIns="0" rtlCol="0" anchor="ctr"/>
+          <a:lstStyle/>
+          <a:p>
+            <a:pPr algn="r" indent="0" marL="0">
+              <a:buNone/>
+            </a:pPr>
+            <a:r>
+              <a:rPr lang="en-US" sz="900" dirty="0">
+                <a:solidFill>
+                  <a:srgbClr val="5F7181"/>
+                </a:solidFill>
+                <a:latin typeface="Aptos" pitchFamily="34" charset="0"/>
+                <a:ea typeface="Aptos" pitchFamily="34" charset="-122"/>
+                <a:cs typeface="Aptos" pitchFamily="34" charset="-120"/>
+              </a:rPr>
+              <a:t>17</a:t>
+            </a:r>
+            <a:endParaRPr lang="en-US" sz="900" dirty="0"/>
+          </a:p>
+        </p:txBody>
+      </p:sp>
+      <p:sp>
+        <p:nvSpPr>
+          <p:cNvPr id="8" name="Shape 6"/>
           <p:cNvSpPr/>
           <p:nvPr/>
         </p:nvSpPr>
@@ -7072,7 +7423,7 @@
       </p:sp>
       <p:sp>
         <p:nvSpPr>
-          <p:cNvPr id="8" name="Text 6"/>
+          <p:cNvPr id="9" name="Text 7"/>
           <p:cNvSpPr/>
           <p:nvPr/>
         </p:nvSpPr>
@@ -7111,14 +7462,14 @@
       </p:sp>
       <p:sp>
         <p:nvSpPr>
-          <p:cNvPr id="9" name="Text 7"/>
+          <p:cNvPr id="10" name="Text 8"/>
           <p:cNvSpPr/>
           <p:nvPr/>
         </p:nvSpPr>
         <p:spPr>
           <a:xfrm>
             <a:off x="640080" y="621792"/>
-            <a:ext cx="10881360" cy="566928"/>
+            <a:ext cx="10881360" cy="713232"/>
           </a:xfrm>
           <a:prstGeom prst="rect">
             <a:avLst/>
@@ -7136,7 +7487,7 @@
               <a:buNone/>
             </a:pPr>
             <a:r>
-              <a:rPr lang="en-US" sz="2700" b="1" dirty="0">
+              <a:rPr lang="en-US" sz="3400" b="1" dirty="0">
                 <a:solidFill>
                   <a:srgbClr val="003A63"/>
                 </a:solidFill>
@@ -7146,20 +7497,20 @@
               </a:rPr>
               <a:t>Practical Exercise</a:t>
             </a:r>
-            <a:endParaRPr lang="en-US" sz="2700" dirty="0"/>
-          </a:p>
-        </p:txBody>
-      </p:sp>
-      <p:sp>
-        <p:nvSpPr>
-          <p:cNvPr id="10" name="Text 8"/>
-          <p:cNvSpPr/>
-          <p:nvPr/>
-        </p:nvSpPr>
-        <p:spPr>
-          <a:xfrm>
-            <a:off x="868680" y="1417320"/>
-            <a:ext cx="6675120" cy="4434840"/>
+            <a:endParaRPr lang="en-US" sz="3400" dirty="0"/>
+          </a:p>
+        </p:txBody>
+      </p:sp>
+      <p:sp>
+        <p:nvSpPr>
+          <p:cNvPr id="11" name="Text 9"/>
+          <p:cNvSpPr/>
+          <p:nvPr/>
+        </p:nvSpPr>
+        <p:spPr>
+          <a:xfrm>
+            <a:off x="868680" y="1508760"/>
+            <a:ext cx="6537960" cy="4160520"/>
           </a:xfrm>
           <a:prstGeom prst="rect">
             <a:avLst/>
@@ -7174,7 +7525,7 @@
           <a:lstStyle/>
           <a:p>
             <a:r>
-              <a:rPr lang="en-US" sz="1700" dirty="0">
+              <a:rPr lang="en-US" sz="2100" dirty="0">
                 <a:solidFill>
                   <a:srgbClr val="17364A"/>
                 </a:solidFill>
@@ -7184,11 +7535,11 @@
               </a:rPr>
               <a:t>Create an AI audit readiness evidence inventory for one AI use case.</a:t>
             </a:r>
-            <a:endParaRPr lang="en-US" sz="1700" dirty="0"/>
-          </a:p>
-          <a:p>
-            <a:r>
-              <a:rPr lang="en-US" sz="1700" dirty="0">
+            <a:endParaRPr lang="en-US" sz="2100" dirty="0"/>
+          </a:p>
+          <a:p>
+            <a:r>
+              <a:rPr lang="en-US" sz="2100" dirty="0">
                 <a:solidFill>
                   <a:srgbClr val="17364A"/>
                 </a:solidFill>
@@ -7196,15 +7547,15 @@
                 <a:ea typeface="Aptos" pitchFamily="34" charset="-122"/>
                 <a:cs typeface="Aptos" pitchFamily="34" charset="-120"/>
               </a:rPr>
-              <a:t>Identify required artifacts from intake through retirement, the owner of each artifact, storage location, retention.</a:t>
-            </a:r>
-            <a:endParaRPr lang="en-US" sz="1700" dirty="0"/>
-          </a:p>
-        </p:txBody>
-      </p:sp>
-      <p:sp>
-        <p:nvSpPr>
-          <p:cNvPr id="11" name="Shape 9"/>
+              <a:t>Identify required artifacts from intake through retirement, the owner of each artifact, storage.</a:t>
+            </a:r>
+            <a:endParaRPr lang="en-US" sz="2100" dirty="0"/>
+          </a:p>
+        </p:txBody>
+      </p:sp>
+      <p:sp>
+        <p:nvSpPr>
+          <p:cNvPr id="12" name="Shape 10"/>
           <p:cNvSpPr/>
           <p:nvPr/>
         </p:nvSpPr>
@@ -7231,14 +7582,14 @@
       </p:sp>
       <p:sp>
         <p:nvSpPr>
-          <p:cNvPr id="12" name="Text 10"/>
+          <p:cNvPr id="13" name="Text 11"/>
           <p:cNvSpPr/>
           <p:nvPr/>
         </p:nvSpPr>
         <p:spPr>
           <a:xfrm>
             <a:off x="8074152" y="1563624"/>
-            <a:ext cx="2825496" cy="201168"/>
+            <a:ext cx="2825496" cy="256032"/>
           </a:xfrm>
           <a:prstGeom prst="rect">
             <a:avLst/>
@@ -7254,7 +7605,7 @@
               <a:buNone/>
             </a:pPr>
             <a:r>
-              <a:rPr lang="en-US" sz="950" b="1" dirty="0">
+              <a:rPr lang="en-US" sz="1300" b="1" dirty="0">
                 <a:solidFill>
                   <a:srgbClr val="0068B7"/>
                 </a:solidFill>
@@ -7264,20 +7615,20 @@
               </a:rPr>
               <a:t>Key idea</a:t>
             </a:r>
-            <a:endParaRPr lang="en-US" sz="950" dirty="0"/>
-          </a:p>
-        </p:txBody>
-      </p:sp>
-      <p:sp>
-        <p:nvSpPr>
-          <p:cNvPr id="13" name="Text 11"/>
-          <p:cNvSpPr/>
-          <p:nvPr/>
-        </p:nvSpPr>
-        <p:spPr>
-          <a:xfrm>
-            <a:off x="8074152" y="1856232"/>
-            <a:ext cx="2825496" cy="1261872"/>
+            <a:endParaRPr lang="en-US" sz="1300" dirty="0"/>
+          </a:p>
+        </p:txBody>
+      </p:sp>
+      <p:sp>
+        <p:nvSpPr>
+          <p:cNvPr id="14" name="Text 12"/>
+          <p:cNvSpPr/>
+          <p:nvPr/>
+        </p:nvSpPr>
+        <p:spPr>
+          <a:xfrm>
+            <a:off x="8074152" y="1920240"/>
+            <a:ext cx="2825496" cy="1188720"/>
           </a:xfrm>
           <a:prstGeom prst="rect">
             <a:avLst/>
@@ -7295,7 +7646,7 @@
               <a:buNone/>
             </a:pPr>
             <a:r>
-              <a:rPr lang="en-US" sz="1250" dirty="0">
+              <a:rPr lang="en-US" sz="1550" dirty="0">
                 <a:solidFill>
                   <a:srgbClr val="17364A"/>
                 </a:solidFill>
@@ -7305,13 +7656,13 @@
               </a:rPr>
               <a:t>Create an AI audit readiness evidence inventory for one AI use case.</a:t>
             </a:r>
-            <a:endParaRPr lang="en-US" sz="1250" dirty="0"/>
-          </a:p>
-        </p:txBody>
-      </p:sp>
-      <p:sp>
-        <p:nvSpPr>
-          <p:cNvPr id="14" name="Shape 12"/>
+            <a:endParaRPr lang="en-US" sz="1550" dirty="0"/>
+          </a:p>
+        </p:txBody>
+      </p:sp>
+      <p:sp>
+        <p:nvSpPr>
+          <p:cNvPr id="15" name="Shape 13"/>
           <p:cNvSpPr/>
           <p:nvPr/>
         </p:nvSpPr>
@@ -7338,14 +7689,14 @@
       </p:sp>
       <p:sp>
         <p:nvSpPr>
-          <p:cNvPr id="15" name="Text 13"/>
+          <p:cNvPr id="16" name="Text 14"/>
           <p:cNvSpPr/>
           <p:nvPr/>
         </p:nvSpPr>
         <p:spPr>
           <a:xfrm>
             <a:off x="8074152" y="3666744"/>
-            <a:ext cx="2825496" cy="201168"/>
+            <a:ext cx="2825496" cy="256032"/>
           </a:xfrm>
           <a:prstGeom prst="rect">
             <a:avLst/>
@@ -7361,7 +7712,7 @@
               <a:buNone/>
             </a:pPr>
             <a:r>
-              <a:rPr lang="en-US" sz="950" b="1" dirty="0">
+              <a:rPr lang="en-US" sz="1300" b="1" dirty="0">
                 <a:solidFill>
                   <a:srgbClr val="0068B7"/>
                 </a:solidFill>
@@ -7371,20 +7722,20 @@
               </a:rPr>
               <a:t>Use this for</a:t>
             </a:r>
-            <a:endParaRPr lang="en-US" sz="950" dirty="0"/>
-          </a:p>
-        </p:txBody>
-      </p:sp>
-      <p:sp>
-        <p:nvSpPr>
-          <p:cNvPr id="16" name="Text 14"/>
-          <p:cNvSpPr/>
-          <p:nvPr/>
-        </p:nvSpPr>
-        <p:spPr>
-          <a:xfrm>
-            <a:off x="8074152" y="3959352"/>
-            <a:ext cx="2825496" cy="1170432"/>
+            <a:endParaRPr lang="en-US" sz="1300" dirty="0"/>
+          </a:p>
+        </p:txBody>
+      </p:sp>
+      <p:sp>
+        <p:nvSpPr>
+          <p:cNvPr id="17" name="Text 15"/>
+          <p:cNvSpPr/>
+          <p:nvPr/>
+        </p:nvSpPr>
+        <p:spPr>
+          <a:xfrm>
+            <a:off x="8074152" y="4023360"/>
+            <a:ext cx="2825496" cy="1097280"/>
           </a:xfrm>
           <a:prstGeom prst="rect">
             <a:avLst/>
@@ -7402,7 +7753,7 @@
               <a:buNone/>
             </a:pPr>
             <a:r>
-              <a:rPr lang="en-US" sz="1250" dirty="0">
+              <a:rPr lang="en-US" sz="1550" dirty="0">
                 <a:solidFill>
                   <a:srgbClr val="17364A"/>
                 </a:solidFill>
@@ -7412,7 +7763,7 @@
               </a:rPr>
               <a:t>Connect the concept to public health decisions, safeguards, documentation, or implementation work.</a:t>
             </a:r>
-            <a:endParaRPr lang="en-US" sz="1250" dirty="0"/>
+            <a:endParaRPr lang="en-US" sz="1550" dirty="0"/>
           </a:p>
         </p:txBody>
       </p:sp>
@@ -7609,7 +7960,7 @@
                 <a:ea typeface="Aptos" pitchFamily="34" charset="-122"/>
                 <a:cs typeface="Aptos" pitchFamily="34" charset="-120"/>
               </a:rPr>
-              <a:t>© Paula Soper</a:t>
+              <a:t>Â© Paula Soper</a:t>
             </a:r>
             <a:endParaRPr lang="en-US" sz="800" dirty="0"/>
           </a:p>
@@ -7617,7 +7968,46 @@
       </p:sp>
       <p:sp>
         <p:nvSpPr>
-          <p:cNvPr id="7" name="Shape 5"/>
+          <p:cNvPr id="7" name="Text 5"/>
+          <p:cNvSpPr/>
+          <p:nvPr/>
+        </p:nvSpPr>
+        <p:spPr>
+          <a:xfrm>
+            <a:off x="11137392" y="6510528"/>
+            <a:ext cx="411480" cy="201168"/>
+          </a:xfrm>
+          <a:prstGeom prst="rect">
+            <a:avLst/>
+          </a:prstGeom>
+          <a:noFill/>
+          <a:ln/>
+        </p:spPr>
+        <p:txBody>
+          <a:bodyPr wrap="square" lIns="0" tIns="0" rIns="0" bIns="0" rtlCol="0" anchor="ctr"/>
+          <a:lstStyle/>
+          <a:p>
+            <a:pPr algn="r" indent="0" marL="0">
+              <a:buNone/>
+            </a:pPr>
+            <a:r>
+              <a:rPr lang="en-US" sz="900" dirty="0">
+                <a:solidFill>
+                  <a:srgbClr val="5F7181"/>
+                </a:solidFill>
+                <a:latin typeface="Aptos" pitchFamily="34" charset="0"/>
+                <a:ea typeface="Aptos" pitchFamily="34" charset="-122"/>
+                <a:cs typeface="Aptos" pitchFamily="34" charset="-120"/>
+              </a:rPr>
+              <a:t>18</a:t>
+            </a:r>
+            <a:endParaRPr lang="en-US" sz="900" dirty="0"/>
+          </a:p>
+        </p:txBody>
+      </p:sp>
+      <p:sp>
+        <p:nvSpPr>
+          <p:cNvPr id="8" name="Shape 6"/>
           <p:cNvSpPr/>
           <p:nvPr/>
         </p:nvSpPr>
@@ -7642,7 +8032,7 @@
       </p:sp>
       <p:sp>
         <p:nvSpPr>
-          <p:cNvPr id="8" name="Text 6"/>
+          <p:cNvPr id="9" name="Text 7"/>
           <p:cNvSpPr/>
           <p:nvPr/>
         </p:nvSpPr>
@@ -7681,14 +8071,14 @@
       </p:sp>
       <p:sp>
         <p:nvSpPr>
-          <p:cNvPr id="9" name="Text 7"/>
+          <p:cNvPr id="10" name="Text 8"/>
           <p:cNvSpPr/>
           <p:nvPr/>
         </p:nvSpPr>
         <p:spPr>
           <a:xfrm>
             <a:off x="640080" y="621792"/>
-            <a:ext cx="10881360" cy="566928"/>
+            <a:ext cx="10881360" cy="713232"/>
           </a:xfrm>
           <a:prstGeom prst="rect">
             <a:avLst/>
@@ -7706,7 +8096,7 @@
               <a:buNone/>
             </a:pPr>
             <a:r>
-              <a:rPr lang="en-US" sz="2700" b="1" dirty="0">
+              <a:rPr lang="en-US" sz="3400" b="1" dirty="0">
                 <a:solidFill>
                   <a:srgbClr val="003A63"/>
                 </a:solidFill>
@@ -7716,20 +8106,20 @@
               </a:rPr>
               <a:t>Expected Artifact or Evidence</a:t>
             </a:r>
-            <a:endParaRPr lang="en-US" sz="2700" dirty="0"/>
-          </a:p>
-        </p:txBody>
-      </p:sp>
-      <p:sp>
-        <p:nvSpPr>
-          <p:cNvPr id="10" name="Text 8"/>
-          <p:cNvSpPr/>
-          <p:nvPr/>
-        </p:nvSpPr>
-        <p:spPr>
-          <a:xfrm>
-            <a:off x="868680" y="1417320"/>
-            <a:ext cx="6675120" cy="4434840"/>
+            <a:endParaRPr lang="en-US" sz="3400" dirty="0"/>
+          </a:p>
+        </p:txBody>
+      </p:sp>
+      <p:sp>
+        <p:nvSpPr>
+          <p:cNvPr id="11" name="Text 9"/>
+          <p:cNvSpPr/>
+          <p:nvPr/>
+        </p:nvSpPr>
+        <p:spPr>
+          <a:xfrm>
+            <a:off x="868680" y="1508760"/>
+            <a:ext cx="6537960" cy="4160520"/>
           </a:xfrm>
           <a:prstGeom prst="rect">
             <a:avLst/>
@@ -7744,7 +8134,7 @@
           <a:lstStyle/>
           <a:p>
             <a:r>
-              <a:rPr lang="en-US" sz="1700" dirty="0">
+              <a:rPr lang="en-US" sz="2100" dirty="0">
                 <a:solidFill>
                   <a:srgbClr val="17364A"/>
                 </a:solidFill>
@@ -7754,11 +8144,11 @@
               </a:rPr>
               <a:t>AI evidence inventory</a:t>
             </a:r>
-            <a:endParaRPr lang="en-US" sz="1700" dirty="0"/>
-          </a:p>
-          <a:p>
-            <a:r>
-              <a:rPr lang="en-US" sz="1700" dirty="0">
+            <a:endParaRPr lang="en-US" sz="2100" dirty="0"/>
+          </a:p>
+          <a:p>
+            <a:r>
+              <a:rPr lang="en-US" sz="2100" dirty="0">
                 <a:solidFill>
                   <a:srgbClr val="17364A"/>
                 </a:solidFill>
@@ -7768,11 +8158,11 @@
               </a:rPr>
               <a:t>Decision log template</a:t>
             </a:r>
-            <a:endParaRPr lang="en-US" sz="1700" dirty="0"/>
-          </a:p>
-          <a:p>
-            <a:r>
-              <a:rPr lang="en-US" sz="1700" dirty="0">
+            <a:endParaRPr lang="en-US" sz="2100" dirty="0"/>
+          </a:p>
+          <a:p>
+            <a:r>
+              <a:rPr lang="en-US" sz="2100" dirty="0">
                 <a:solidFill>
                   <a:srgbClr val="17364A"/>
                 </a:solidFill>
@@ -7782,13 +8172,13 @@
               </a:rPr>
               <a:t>Artifact ownership and retention table</a:t>
             </a:r>
-            <a:endParaRPr lang="en-US" sz="1700" dirty="0"/>
-          </a:p>
-        </p:txBody>
-      </p:sp>
-      <p:sp>
-        <p:nvSpPr>
-          <p:cNvPr id="11" name="Shape 9"/>
+            <a:endParaRPr lang="en-US" sz="2100" dirty="0"/>
+          </a:p>
+        </p:txBody>
+      </p:sp>
+      <p:sp>
+        <p:nvSpPr>
+          <p:cNvPr id="12" name="Shape 10"/>
           <p:cNvSpPr/>
           <p:nvPr/>
         </p:nvSpPr>
@@ -7815,14 +8205,14 @@
       </p:sp>
       <p:sp>
         <p:nvSpPr>
-          <p:cNvPr id="12" name="Text 10"/>
+          <p:cNvPr id="13" name="Text 11"/>
           <p:cNvSpPr/>
           <p:nvPr/>
         </p:nvSpPr>
         <p:spPr>
           <a:xfrm>
             <a:off x="8074152" y="1563624"/>
-            <a:ext cx="2825496" cy="201168"/>
+            <a:ext cx="2825496" cy="256032"/>
           </a:xfrm>
           <a:prstGeom prst="rect">
             <a:avLst/>
@@ -7838,7 +8228,7 @@
               <a:buNone/>
             </a:pPr>
             <a:r>
-              <a:rPr lang="en-US" sz="950" b="1" dirty="0">
+              <a:rPr lang="en-US" sz="1300" b="1" dirty="0">
                 <a:solidFill>
                   <a:srgbClr val="0068B7"/>
                 </a:solidFill>
@@ -7848,20 +8238,20 @@
               </a:rPr>
               <a:t>Key idea</a:t>
             </a:r>
-            <a:endParaRPr lang="en-US" sz="950" dirty="0"/>
-          </a:p>
-        </p:txBody>
-      </p:sp>
-      <p:sp>
-        <p:nvSpPr>
-          <p:cNvPr id="13" name="Text 11"/>
-          <p:cNvSpPr/>
-          <p:nvPr/>
-        </p:nvSpPr>
-        <p:spPr>
-          <a:xfrm>
-            <a:off x="8074152" y="1856232"/>
-            <a:ext cx="2825496" cy="1261872"/>
+            <a:endParaRPr lang="en-US" sz="1300" dirty="0"/>
+          </a:p>
+        </p:txBody>
+      </p:sp>
+      <p:sp>
+        <p:nvSpPr>
+          <p:cNvPr id="14" name="Text 12"/>
+          <p:cNvSpPr/>
+          <p:nvPr/>
+        </p:nvSpPr>
+        <p:spPr>
+          <a:xfrm>
+            <a:off x="8074152" y="1920240"/>
+            <a:ext cx="2825496" cy="1188720"/>
           </a:xfrm>
           <a:prstGeom prst="rect">
             <a:avLst/>
@@ -7879,7 +8269,7 @@
               <a:buNone/>
             </a:pPr>
             <a:r>
-              <a:rPr lang="en-US" sz="1250" dirty="0">
+              <a:rPr lang="en-US" sz="1550" dirty="0">
                 <a:solidFill>
                   <a:srgbClr val="17364A"/>
                 </a:solidFill>
@@ -7889,13 +8279,13 @@
               </a:rPr>
               <a:t>AI evidence inventory</a:t>
             </a:r>
-            <a:endParaRPr lang="en-US" sz="1250" dirty="0"/>
-          </a:p>
-        </p:txBody>
-      </p:sp>
-      <p:sp>
-        <p:nvSpPr>
-          <p:cNvPr id="14" name="Shape 12"/>
+            <a:endParaRPr lang="en-US" sz="1550" dirty="0"/>
+          </a:p>
+        </p:txBody>
+      </p:sp>
+      <p:sp>
+        <p:nvSpPr>
+          <p:cNvPr id="15" name="Shape 13"/>
           <p:cNvSpPr/>
           <p:nvPr/>
         </p:nvSpPr>
@@ -7922,14 +8312,14 @@
       </p:sp>
       <p:sp>
         <p:nvSpPr>
-          <p:cNvPr id="15" name="Text 13"/>
+          <p:cNvPr id="16" name="Text 14"/>
           <p:cNvSpPr/>
           <p:nvPr/>
         </p:nvSpPr>
         <p:spPr>
           <a:xfrm>
             <a:off x="8074152" y="3666744"/>
-            <a:ext cx="2825496" cy="201168"/>
+            <a:ext cx="2825496" cy="256032"/>
           </a:xfrm>
           <a:prstGeom prst="rect">
             <a:avLst/>
@@ -7945,7 +8335,7 @@
               <a:buNone/>
             </a:pPr>
             <a:r>
-              <a:rPr lang="en-US" sz="950" b="1" dirty="0">
+              <a:rPr lang="en-US" sz="1300" b="1" dirty="0">
                 <a:solidFill>
                   <a:srgbClr val="0068B7"/>
                 </a:solidFill>
@@ -7955,20 +8345,20 @@
               </a:rPr>
               <a:t>Use this for</a:t>
             </a:r>
-            <a:endParaRPr lang="en-US" sz="950" dirty="0"/>
-          </a:p>
-        </p:txBody>
-      </p:sp>
-      <p:sp>
-        <p:nvSpPr>
-          <p:cNvPr id="16" name="Text 14"/>
-          <p:cNvSpPr/>
-          <p:nvPr/>
-        </p:nvSpPr>
-        <p:spPr>
-          <a:xfrm>
-            <a:off x="8074152" y="3959352"/>
-            <a:ext cx="2825496" cy="1170432"/>
+            <a:endParaRPr lang="en-US" sz="1300" dirty="0"/>
+          </a:p>
+        </p:txBody>
+      </p:sp>
+      <p:sp>
+        <p:nvSpPr>
+          <p:cNvPr id="17" name="Text 15"/>
+          <p:cNvSpPr/>
+          <p:nvPr/>
+        </p:nvSpPr>
+        <p:spPr>
+          <a:xfrm>
+            <a:off x="8074152" y="4023360"/>
+            <a:ext cx="2825496" cy="1097280"/>
           </a:xfrm>
           <a:prstGeom prst="rect">
             <a:avLst/>
@@ -7986,7 +8376,7 @@
               <a:buNone/>
             </a:pPr>
             <a:r>
-              <a:rPr lang="en-US" sz="1250" dirty="0">
+              <a:rPr lang="en-US" sz="1550" dirty="0">
                 <a:solidFill>
                   <a:srgbClr val="17364A"/>
                 </a:solidFill>
@@ -7996,7 +8386,7 @@
               </a:rPr>
               <a:t>Connect the concept to public health decisions, safeguards, documentation, or implementation work.</a:t>
             </a:r>
-            <a:endParaRPr lang="en-US" sz="1250" dirty="0"/>
+            <a:endParaRPr lang="en-US" sz="1550" dirty="0"/>
           </a:p>
         </p:txBody>
       </p:sp>
@@ -8193,7 +8583,7 @@
                 <a:ea typeface="Aptos" pitchFamily="34" charset="-122"/>
                 <a:cs typeface="Aptos" pitchFamily="34" charset="-120"/>
               </a:rPr>
-              <a:t>© Paula Soper</a:t>
+              <a:t>Â© Paula Soper</a:t>
             </a:r>
             <a:endParaRPr lang="en-US" sz="800" dirty="0"/>
           </a:p>
@@ -8207,8 +8597,47 @@
         </p:nvSpPr>
         <p:spPr>
           <a:xfrm>
+            <a:off x="11137392" y="6510528"/>
+            <a:ext cx="411480" cy="201168"/>
+          </a:xfrm>
+          <a:prstGeom prst="rect">
+            <a:avLst/>
+          </a:prstGeom>
+          <a:noFill/>
+          <a:ln/>
+        </p:spPr>
+        <p:txBody>
+          <a:bodyPr wrap="square" lIns="0" tIns="0" rIns="0" bIns="0" rtlCol="0" anchor="ctr"/>
+          <a:lstStyle/>
+          <a:p>
+            <a:pPr algn="r" indent="0" marL="0">
+              <a:buNone/>
+            </a:pPr>
+            <a:r>
+              <a:rPr lang="en-US" sz="900" dirty="0">
+                <a:solidFill>
+                  <a:srgbClr val="5F7181"/>
+                </a:solidFill>
+                <a:latin typeface="Aptos" pitchFamily="34" charset="0"/>
+                <a:ea typeface="Aptos" pitchFamily="34" charset="-122"/>
+                <a:cs typeface="Aptos" pitchFamily="34" charset="-120"/>
+              </a:rPr>
+              <a:t>19</a:t>
+            </a:r>
+            <a:endParaRPr lang="en-US" sz="900" dirty="0"/>
+          </a:p>
+        </p:txBody>
+      </p:sp>
+      <p:sp>
+        <p:nvSpPr>
+          <p:cNvPr id="8" name="Text 6"/>
+          <p:cNvSpPr/>
+          <p:nvPr/>
+        </p:nvSpPr>
+        <p:spPr>
+          <a:xfrm>
             <a:off x="640080" y="658368"/>
-            <a:ext cx="10881360" cy="566928"/>
+            <a:ext cx="10881360" cy="713232"/>
           </a:xfrm>
           <a:prstGeom prst="rect">
             <a:avLst/>
@@ -8226,7 +8655,7 @@
               <a:buNone/>
             </a:pPr>
             <a:r>
-              <a:rPr lang="en-US" sz="2700" b="1" dirty="0">
+              <a:rPr lang="en-US" sz="3400" b="1" dirty="0">
                 <a:solidFill>
                   <a:srgbClr val="003A63"/>
                 </a:solidFill>
@@ -8236,20 +8665,20 @@
               </a:rPr>
               <a:t>Expected Artifact or Evidence Continued</a:t>
             </a:r>
-            <a:endParaRPr lang="en-US" sz="2700" dirty="0"/>
-          </a:p>
-        </p:txBody>
-      </p:sp>
-      <p:sp>
-        <p:nvSpPr>
-          <p:cNvPr id="8" name="Text 6"/>
-          <p:cNvSpPr/>
-          <p:nvPr/>
-        </p:nvSpPr>
-        <p:spPr>
-          <a:xfrm>
-            <a:off x="868680" y="1417320"/>
-            <a:ext cx="6675120" cy="4434840"/>
+            <a:endParaRPr lang="en-US" sz="3400" dirty="0"/>
+          </a:p>
+        </p:txBody>
+      </p:sp>
+      <p:sp>
+        <p:nvSpPr>
+          <p:cNvPr id="9" name="Text 7"/>
+          <p:cNvSpPr/>
+          <p:nvPr/>
+        </p:nvSpPr>
+        <p:spPr>
+          <a:xfrm>
+            <a:off x="868680" y="1508760"/>
+            <a:ext cx="6537960" cy="4160520"/>
           </a:xfrm>
           <a:prstGeom prst="rect">
             <a:avLst/>
@@ -8264,7 +8693,7 @@
           <a:lstStyle/>
           <a:p>
             <a:r>
-              <a:rPr lang="en-US" sz="1700" dirty="0">
+              <a:rPr lang="en-US" sz="2100" dirty="0">
                 <a:solidFill>
                   <a:srgbClr val="17364A"/>
                 </a:solidFill>
@@ -8274,11 +8703,11 @@
               </a:rPr>
               <a:t>Gap list for missing evidence</a:t>
             </a:r>
-            <a:endParaRPr lang="en-US" sz="1700" dirty="0"/>
-          </a:p>
-          <a:p>
-            <a:r>
-              <a:rPr lang="en-US" sz="1700" dirty="0">
+            <a:endParaRPr lang="en-US" sz="2100" dirty="0"/>
+          </a:p>
+          <a:p>
+            <a:r>
+              <a:rPr lang="en-US" sz="2100" dirty="0">
                 <a:solidFill>
                   <a:srgbClr val="17364A"/>
                 </a:solidFill>
@@ -8288,13 +8717,13 @@
               </a:rPr>
               <a:t>Review schedule</a:t>
             </a:r>
-            <a:endParaRPr lang="en-US" sz="1700" dirty="0"/>
-          </a:p>
-        </p:txBody>
-      </p:sp>
-      <p:sp>
-        <p:nvSpPr>
-          <p:cNvPr id="9" name="Shape 7"/>
+            <a:endParaRPr lang="en-US" sz="2100" dirty="0"/>
+          </a:p>
+        </p:txBody>
+      </p:sp>
+      <p:sp>
+        <p:nvSpPr>
+          <p:cNvPr id="10" name="Shape 8"/>
           <p:cNvSpPr/>
           <p:nvPr/>
         </p:nvSpPr>
@@ -8321,14 +8750,14 @@
       </p:sp>
       <p:sp>
         <p:nvSpPr>
-          <p:cNvPr id="10" name="Text 8"/>
+          <p:cNvPr id="11" name="Text 9"/>
           <p:cNvSpPr/>
           <p:nvPr/>
         </p:nvSpPr>
         <p:spPr>
           <a:xfrm>
             <a:off x="8074152" y="1563624"/>
-            <a:ext cx="2825496" cy="201168"/>
+            <a:ext cx="2825496" cy="256032"/>
           </a:xfrm>
           <a:prstGeom prst="rect">
             <a:avLst/>
@@ -8344,7 +8773,7 @@
               <a:buNone/>
             </a:pPr>
             <a:r>
-              <a:rPr lang="en-US" sz="950" b="1" dirty="0">
+              <a:rPr lang="en-US" sz="1300" b="1" dirty="0">
                 <a:solidFill>
                   <a:srgbClr val="0068B7"/>
                 </a:solidFill>
@@ -8354,20 +8783,20 @@
               </a:rPr>
               <a:t>Key idea</a:t>
             </a:r>
-            <a:endParaRPr lang="en-US" sz="950" dirty="0"/>
-          </a:p>
-        </p:txBody>
-      </p:sp>
-      <p:sp>
-        <p:nvSpPr>
-          <p:cNvPr id="11" name="Text 9"/>
-          <p:cNvSpPr/>
-          <p:nvPr/>
-        </p:nvSpPr>
-        <p:spPr>
-          <a:xfrm>
-            <a:off x="8074152" y="1856232"/>
-            <a:ext cx="2825496" cy="1261872"/>
+            <a:endParaRPr lang="en-US" sz="1300" dirty="0"/>
+          </a:p>
+        </p:txBody>
+      </p:sp>
+      <p:sp>
+        <p:nvSpPr>
+          <p:cNvPr id="12" name="Text 10"/>
+          <p:cNvSpPr/>
+          <p:nvPr/>
+        </p:nvSpPr>
+        <p:spPr>
+          <a:xfrm>
+            <a:off x="8074152" y="1920240"/>
+            <a:ext cx="2825496" cy="1188720"/>
           </a:xfrm>
           <a:prstGeom prst="rect">
             <a:avLst/>
@@ -8385,7 +8814,7 @@
               <a:buNone/>
             </a:pPr>
             <a:r>
-              <a:rPr lang="en-US" sz="1250" dirty="0">
+              <a:rPr lang="en-US" sz="1550" dirty="0">
                 <a:solidFill>
                   <a:srgbClr val="17364A"/>
                 </a:solidFill>
@@ -8395,13 +8824,13 @@
               </a:rPr>
               <a:t>Gap list for missing evidence</a:t>
             </a:r>
-            <a:endParaRPr lang="en-US" sz="1250" dirty="0"/>
-          </a:p>
-        </p:txBody>
-      </p:sp>
-      <p:sp>
-        <p:nvSpPr>
-          <p:cNvPr id="12" name="Shape 10"/>
+            <a:endParaRPr lang="en-US" sz="1550" dirty="0"/>
+          </a:p>
+        </p:txBody>
+      </p:sp>
+      <p:sp>
+        <p:nvSpPr>
+          <p:cNvPr id="13" name="Shape 11"/>
           <p:cNvSpPr/>
           <p:nvPr/>
         </p:nvSpPr>
@@ -8428,14 +8857,14 @@
       </p:sp>
       <p:sp>
         <p:nvSpPr>
-          <p:cNvPr id="13" name="Text 11"/>
+          <p:cNvPr id="14" name="Text 12"/>
           <p:cNvSpPr/>
           <p:nvPr/>
         </p:nvSpPr>
         <p:spPr>
           <a:xfrm>
             <a:off x="8074152" y="3666744"/>
-            <a:ext cx="2825496" cy="201168"/>
+            <a:ext cx="2825496" cy="256032"/>
           </a:xfrm>
           <a:prstGeom prst="rect">
             <a:avLst/>
@@ -8451,7 +8880,7 @@
               <a:buNone/>
             </a:pPr>
             <a:r>
-              <a:rPr lang="en-US" sz="950" b="1" dirty="0">
+              <a:rPr lang="en-US" sz="1300" b="1" dirty="0">
                 <a:solidFill>
                   <a:srgbClr val="0068B7"/>
                 </a:solidFill>
@@ -8461,20 +8890,20 @@
               </a:rPr>
               <a:t>Use this for</a:t>
             </a:r>
-            <a:endParaRPr lang="en-US" sz="950" dirty="0"/>
-          </a:p>
-        </p:txBody>
-      </p:sp>
-      <p:sp>
-        <p:nvSpPr>
-          <p:cNvPr id="14" name="Text 12"/>
-          <p:cNvSpPr/>
-          <p:nvPr/>
-        </p:nvSpPr>
-        <p:spPr>
-          <a:xfrm>
-            <a:off x="8074152" y="3959352"/>
-            <a:ext cx="2825496" cy="1170432"/>
+            <a:endParaRPr lang="en-US" sz="1300" dirty="0"/>
+          </a:p>
+        </p:txBody>
+      </p:sp>
+      <p:sp>
+        <p:nvSpPr>
+          <p:cNvPr id="15" name="Text 13"/>
+          <p:cNvSpPr/>
+          <p:nvPr/>
+        </p:nvSpPr>
+        <p:spPr>
+          <a:xfrm>
+            <a:off x="8074152" y="4023360"/>
+            <a:ext cx="2825496" cy="1097280"/>
           </a:xfrm>
           <a:prstGeom prst="rect">
             <a:avLst/>
@@ -8492,7 +8921,7 @@
               <a:buNone/>
             </a:pPr>
             <a:r>
-              <a:rPr lang="en-US" sz="1250" dirty="0">
+              <a:rPr lang="en-US" sz="1550" dirty="0">
                 <a:solidFill>
                   <a:srgbClr val="17364A"/>
                 </a:solidFill>
@@ -8502,7 +8931,7 @@
               </a:rPr>
               <a:t>Connect the concept to public health decisions, safeguards, documentation, or implementation work.</a:t>
             </a:r>
-            <a:endParaRPr lang="en-US" sz="1250" dirty="0"/>
+            <a:endParaRPr lang="en-US" sz="1550" dirty="0"/>
           </a:p>
         </p:txBody>
       </p:sp>
@@ -8699,7 +9128,7 @@
                 <a:ea typeface="Aptos" pitchFamily="34" charset="-122"/>
                 <a:cs typeface="Aptos" pitchFamily="34" charset="-120"/>
               </a:rPr>
-              <a:t>© Paula Soper</a:t>
+              <a:t>Â© Paula Soper</a:t>
             </a:r>
             <a:endParaRPr lang="en-US" sz="800" dirty="0"/>
           </a:p>
@@ -8713,8 +9142,47 @@
         </p:nvSpPr>
         <p:spPr>
           <a:xfrm>
+            <a:off x="11137392" y="6510528"/>
+            <a:ext cx="411480" cy="201168"/>
+          </a:xfrm>
+          <a:prstGeom prst="rect">
+            <a:avLst/>
+          </a:prstGeom>
+          <a:noFill/>
+          <a:ln/>
+        </p:spPr>
+        <p:txBody>
+          <a:bodyPr wrap="square" lIns="0" tIns="0" rIns="0" bIns="0" rtlCol="0" anchor="ctr"/>
+          <a:lstStyle/>
+          <a:p>
+            <a:pPr algn="r" indent="0" marL="0">
+              <a:buNone/>
+            </a:pPr>
+            <a:r>
+              <a:rPr lang="en-US" sz="900" dirty="0">
+                <a:solidFill>
+                  <a:srgbClr val="5F7181"/>
+                </a:solidFill>
+                <a:latin typeface="Aptos" pitchFamily="34" charset="0"/>
+                <a:ea typeface="Aptos" pitchFamily="34" charset="-122"/>
+                <a:cs typeface="Aptos" pitchFamily="34" charset="-120"/>
+              </a:rPr>
+              <a:t>2</a:t>
+            </a:r>
+            <a:endParaRPr lang="en-US" sz="900" dirty="0"/>
+          </a:p>
+        </p:txBody>
+      </p:sp>
+      <p:sp>
+        <p:nvSpPr>
+          <p:cNvPr id="8" name="Text 6"/>
+          <p:cNvSpPr/>
+          <p:nvPr/>
+        </p:nvSpPr>
+        <p:spPr>
+          <a:xfrm>
             <a:off x="640080" y="658368"/>
-            <a:ext cx="10881360" cy="566928"/>
+            <a:ext cx="10881360" cy="713232"/>
           </a:xfrm>
           <a:prstGeom prst="rect">
             <a:avLst/>
@@ -8732,7 +9200,7 @@
               <a:buNone/>
             </a:pPr>
             <a:r>
-              <a:rPr lang="en-US" sz="2700" b="1" dirty="0">
+              <a:rPr lang="en-US" sz="3400" b="1" dirty="0">
                 <a:solidFill>
                   <a:srgbClr val="003A63"/>
                 </a:solidFill>
@@ -8742,20 +9210,20 @@
               </a:rPr>
               <a:t>What this module helps you do</a:t>
             </a:r>
-            <a:endParaRPr lang="en-US" sz="2700" dirty="0"/>
-          </a:p>
-        </p:txBody>
-      </p:sp>
-      <p:sp>
-        <p:nvSpPr>
-          <p:cNvPr id="8" name="Text 6"/>
-          <p:cNvSpPr/>
-          <p:nvPr/>
-        </p:nvSpPr>
-        <p:spPr>
-          <a:xfrm>
-            <a:off x="868680" y="1417320"/>
-            <a:ext cx="6675120" cy="3291840"/>
+            <a:endParaRPr lang="en-US" sz="3400" dirty="0"/>
+          </a:p>
+        </p:txBody>
+      </p:sp>
+      <p:sp>
+        <p:nvSpPr>
+          <p:cNvPr id="9" name="Text 7"/>
+          <p:cNvSpPr/>
+          <p:nvPr/>
+        </p:nvSpPr>
+        <p:spPr>
+          <a:xfrm>
+            <a:off x="868680" y="1508760"/>
+            <a:ext cx="6446520" cy="2926080"/>
           </a:xfrm>
           <a:prstGeom prst="rect">
             <a:avLst/>
@@ -8770,7 +9238,7 @@
           <a:lstStyle/>
           <a:p>
             <a:r>
-              <a:rPr lang="en-US" sz="1700" dirty="0">
+              <a:rPr lang="en-US" sz="2100" dirty="0">
                 <a:solidFill>
                   <a:srgbClr val="17364A"/>
                 </a:solidFill>
@@ -8778,13 +9246,13 @@
                 <a:ea typeface="Aptos" pitchFamily="34" charset="-122"/>
                 <a:cs typeface="Aptos" pitchFamily="34" charset="-120"/>
               </a:rPr>
-              <a:t>AI audit readiness is the agency’s ability to show what AI systems are used, why they were approved, what data they rely on, how they were.</a:t>
-            </a:r>
-            <a:endParaRPr lang="en-US" sz="1700" dirty="0"/>
-          </a:p>
-          <a:p>
-            <a:r>
-              <a:rPr lang="en-US" sz="1700" dirty="0">
+              <a:t>AI audit readiness is the agency’s ability to show what AI systems are used, why they were approved, what data.</a:t>
+            </a:r>
+            <a:endParaRPr lang="en-US" sz="2100" dirty="0"/>
+          </a:p>
+          <a:p>
+            <a:r>
+              <a:rPr lang="en-US" sz="2100" dirty="0">
                 <a:solidFill>
                   <a:srgbClr val="17364A"/>
                 </a:solidFill>
@@ -8792,13 +9260,13 @@
                 <a:ea typeface="Aptos" pitchFamily="34" charset="-122"/>
                 <a:cs typeface="Aptos" pitchFamily="34" charset="-120"/>
               </a:rPr>
-              <a:t>Public health agencies may need this evidence for internal oversight, public records requests, legal review, grant reporting, procurement.</a:t>
-            </a:r>
-            <a:endParaRPr lang="en-US" sz="1700" dirty="0"/>
-          </a:p>
-          <a:p>
-            <a:r>
-              <a:rPr lang="en-US" sz="1700" dirty="0">
+              <a:t>Public health agencies may need this evidence for internal oversight, public records requests, legal review,.</a:t>
+            </a:r>
+            <a:endParaRPr lang="en-US" sz="2100" dirty="0"/>
+          </a:p>
+          <a:p>
+            <a:r>
+              <a:rPr lang="en-US" sz="2100" dirty="0">
                 <a:solidFill>
                   <a:srgbClr val="17364A"/>
                 </a:solidFill>
@@ -8806,29 +9274,15 @@
                 <a:ea typeface="Aptos" pitchFamily="34" charset="-122"/>
                 <a:cs typeface="Aptos" pitchFamily="34" charset="-120"/>
               </a:rPr>
-              <a:t>This module teaches governance, compliance, program, and leadership staff how to manage evidence across the AI lifecycle.</a:t>
-            </a:r>
-            <a:endParaRPr lang="en-US" sz="1700" dirty="0"/>
-          </a:p>
-          <a:p>
-            <a:r>
-              <a:rPr lang="en-US" sz="1700" dirty="0">
-                <a:solidFill>
-                  <a:srgbClr val="17364A"/>
-                </a:solidFill>
-                <a:latin typeface="Aptos" pitchFamily="34" charset="0"/>
-                <a:ea typeface="Aptos" pitchFamily="34" charset="-122"/>
-                <a:cs typeface="Aptos" pitchFamily="34" charset="-120"/>
-              </a:rPr>
-              <a:t>The emphasis is practical: if a concern arises six months after deployment, the agency should be able to reconstruct the decision pathway,.</a:t>
-            </a:r>
-            <a:endParaRPr lang="en-US" sz="1700" dirty="0"/>
-          </a:p>
-        </p:txBody>
-      </p:sp>
-      <p:sp>
-        <p:nvSpPr>
-          <p:cNvPr id="9" name="Shape 7"/>
+              <a:t>This module teaches governance, compliance, program, and leadership staff how to manage evidence across the AI.</a:t>
+            </a:r>
+            <a:endParaRPr lang="en-US" sz="2100" dirty="0"/>
+          </a:p>
+        </p:txBody>
+      </p:sp>
+      <p:sp>
+        <p:nvSpPr>
+          <p:cNvPr id="10" name="Shape 8"/>
           <p:cNvSpPr/>
           <p:nvPr/>
         </p:nvSpPr>
@@ -8855,14 +9309,14 @@
       </p:sp>
       <p:sp>
         <p:nvSpPr>
-          <p:cNvPr id="10" name="Text 8"/>
+          <p:cNvPr id="11" name="Text 9"/>
           <p:cNvSpPr/>
           <p:nvPr/>
         </p:nvSpPr>
         <p:spPr>
           <a:xfrm>
             <a:off x="8074152" y="1563624"/>
-            <a:ext cx="2825496" cy="201168"/>
+            <a:ext cx="2825496" cy="256032"/>
           </a:xfrm>
           <a:prstGeom prst="rect">
             <a:avLst/>
@@ -8878,7 +9332,7 @@
               <a:buNone/>
             </a:pPr>
             <a:r>
-              <a:rPr lang="en-US" sz="950" b="1" dirty="0">
+              <a:rPr lang="en-US" sz="1300" b="1" dirty="0">
                 <a:solidFill>
                   <a:srgbClr val="0068B7"/>
                 </a:solidFill>
@@ -8888,20 +9342,20 @@
               </a:rPr>
               <a:t>Module details</a:t>
             </a:r>
-            <a:endParaRPr lang="en-US" sz="950" dirty="0"/>
-          </a:p>
-        </p:txBody>
-      </p:sp>
-      <p:sp>
-        <p:nvSpPr>
-          <p:cNvPr id="11" name="Text 9"/>
-          <p:cNvSpPr/>
-          <p:nvPr/>
-        </p:nvSpPr>
-        <p:spPr>
-          <a:xfrm>
-            <a:off x="8074152" y="1856232"/>
-            <a:ext cx="2825496" cy="1353312"/>
+            <a:endParaRPr lang="en-US" sz="1300" dirty="0"/>
+          </a:p>
+        </p:txBody>
+      </p:sp>
+      <p:sp>
+        <p:nvSpPr>
+          <p:cNvPr id="12" name="Text 10"/>
+          <p:cNvSpPr/>
+          <p:nvPr/>
+        </p:nvSpPr>
+        <p:spPr>
+          <a:xfrm>
+            <a:off x="8074152" y="1920240"/>
+            <a:ext cx="2825496" cy="1280160"/>
           </a:xfrm>
           <a:prstGeom prst="rect">
             <a:avLst/>
@@ -8919,7 +9373,7 @@
               <a:buNone/>
             </a:pPr>
             <a:r>
-              <a:rPr lang="en-US" sz="1250" dirty="0">
+              <a:rPr lang="en-US" sz="1550" dirty="0">
                 <a:solidFill>
                   <a:srgbClr val="17364A"/>
                 </a:solidFill>
@@ -8929,14 +9383,14 @@
               </a:rPr>
               <a:t>Level: intermediate/practitioner</a:t>
             </a:r>
-            <a:endParaRPr lang="en-US" sz="1250" dirty="0"/>
+            <a:endParaRPr lang="en-US" sz="1550" dirty="0"/>
           </a:p>
           <a:p>
             <a:pPr indent="0" marL="0">
               <a:buNone/>
             </a:pPr>
             <a:r>
-              <a:rPr lang="en-US" sz="1250" dirty="0">
+              <a:rPr lang="en-US" sz="1550" dirty="0">
                 <a:solidFill>
                   <a:srgbClr val="17364A"/>
                 </a:solidFill>
@@ -8946,14 +9400,14 @@
               </a:rPr>
               <a:t>Primary track: Governance and Security Track</a:t>
             </a:r>
-            <a:endParaRPr lang="en-US" sz="1250" dirty="0"/>
+            <a:endParaRPr lang="en-US" sz="1550" dirty="0"/>
           </a:p>
           <a:p>
             <a:pPr indent="0" marL="0">
               <a:buNone/>
             </a:pPr>
             <a:r>
-              <a:rPr lang="en-US" sz="1250" dirty="0">
+              <a:rPr lang="en-US" sz="1550" dirty="0">
                 <a:solidFill>
                   <a:srgbClr val="17364A"/>
                 </a:solidFill>
@@ -8963,32 +9417,32 @@
               </a:rPr>
               <a:t>Appears in tracks: governance-and-security, policy, program-management, public-health-executive-leadership</a:t>
             </a:r>
-            <a:endParaRPr lang="en-US" sz="1250" dirty="0"/>
-          </a:p>
-        </p:txBody>
-      </p:sp>
-      <p:sp>
-        <p:nvSpPr>
-          <p:cNvPr id="12" name="Shape 10"/>
-          <p:cNvSpPr/>
-          <p:nvPr/>
-        </p:nvSpPr>
-        <p:spPr>
-          <a:xfrm>
-            <a:off x="7909560" y="3611880"/>
-            <a:ext cx="3154680" cy="1783080"/>
+            <a:endParaRPr lang="en-US" sz="1550" dirty="0"/>
+          </a:p>
+        </p:txBody>
+      </p:sp>
+      <p:sp>
+        <p:nvSpPr>
+          <p:cNvPr id="13" name="Shape 11"/>
+          <p:cNvSpPr/>
+          <p:nvPr/>
+        </p:nvSpPr>
+        <p:spPr>
+          <a:xfrm>
+            <a:off x="7635240" y="3730752"/>
+            <a:ext cx="1033272" cy="749808"/>
           </a:xfrm>
           <a:prstGeom prst="roundRect">
             <a:avLst>
-              <a:gd name="adj" fmla="val 6154"/>
+              <a:gd name="adj" fmla="val 14634"/>
             </a:avLst>
           </a:prstGeom>
           <a:solidFill>
-            <a:srgbClr val="EEF8ED"/>
+            <a:srgbClr val="0068B7"/>
           </a:solidFill>
           <a:ln w="12700">
             <a:solidFill>
-              <a:srgbClr val="B9D7E6"/>
+              <a:srgbClr val="0068B7"/>
             </a:solidFill>
             <a:prstDash val="solid"/>
           </a:ln>
@@ -8996,81 +9450,256 @@
       </p:sp>
       <p:sp>
         <p:nvSpPr>
-          <p:cNvPr id="13" name="Text 11"/>
-          <p:cNvSpPr/>
-          <p:nvPr/>
-        </p:nvSpPr>
-        <p:spPr>
-          <a:xfrm>
-            <a:off x="8074152" y="3758184"/>
-            <a:ext cx="2825496" cy="201168"/>
-          </a:xfrm>
-          <a:prstGeom prst="rect">
-            <a:avLst/>
-          </a:prstGeom>
-          <a:noFill/>
-          <a:ln/>
-        </p:spPr>
-        <p:txBody>
-          <a:bodyPr wrap="square" lIns="0" tIns="0" rIns="0" bIns="0" rtlCol="0" anchor="ctr"/>
-          <a:lstStyle/>
-          <a:p>
-            <a:pPr indent="0" marL="0">
-              <a:buNone/>
-            </a:pPr>
-            <a:r>
-              <a:rPr lang="en-US" sz="950" b="1" dirty="0">
-                <a:solidFill>
-                  <a:srgbClr val="0068B7"/>
-                </a:solidFill>
-                <a:latin typeface="Aptos" pitchFamily="34" charset="0"/>
-                <a:ea typeface="Aptos" pitchFamily="34" charset="-122"/>
-                <a:cs typeface="Aptos" pitchFamily="34" charset="-120"/>
-              </a:rPr>
-              <a:t>Learning approach</a:t>
-            </a:r>
-            <a:endParaRPr lang="en-US" sz="950" dirty="0"/>
-          </a:p>
-        </p:txBody>
-      </p:sp>
-      <p:sp>
-        <p:nvSpPr>
           <p:cNvPr id="14" name="Text 12"/>
           <p:cNvSpPr/>
           <p:nvPr/>
         </p:nvSpPr>
         <p:spPr>
           <a:xfrm>
-            <a:off x="8074152" y="4050792"/>
-            <a:ext cx="2825496" cy="1216152"/>
-          </a:xfrm>
-          <a:prstGeom prst="rect">
-            <a:avLst/>
-          </a:prstGeom>
-          <a:noFill/>
-          <a:ln/>
-        </p:spPr>
-        <p:txBody>
-          <a:bodyPr wrap="square" lIns="0" tIns="0" rIns="0" bIns="0" rtlCol="0" anchor="t">
+            <a:off x="7708392" y="3922776"/>
+            <a:ext cx="886968" cy="310896"/>
+          </a:xfrm>
+          <a:prstGeom prst="rect">
+            <a:avLst/>
+          </a:prstGeom>
+          <a:noFill/>
+          <a:ln/>
+        </p:spPr>
+        <p:txBody>
+          <a:bodyPr wrap="square" lIns="0" tIns="0" rIns="0" bIns="0" rtlCol="0" anchor="ctr">
             <a:normAutofit/>
           </a:bodyPr>
           <a:lstStyle/>
           <a:p>
-            <a:pPr indent="0" marL="0">
-              <a:buNone/>
-            </a:pPr>
-            <a:r>
-              <a:rPr lang="en-US" sz="1250" dirty="0">
-                <a:solidFill>
-                  <a:srgbClr val="17364A"/>
-                </a:solidFill>
-                <a:latin typeface="Aptos" pitchFamily="34" charset="0"/>
-                <a:ea typeface="Aptos" pitchFamily="34" charset="-122"/>
-                <a:cs typeface="Aptos" pitchFamily="34" charset="-120"/>
-              </a:rPr>
-              <a:t>Review the core ideas, complete the practical exercise, check your understanding, and use the related plays and tools to apply the lesson.</a:t>
-            </a:r>
-            <a:endParaRPr lang="en-US" sz="1250" dirty="0"/>
+            <a:pPr algn="ctr" indent="0" marL="0">
+              <a:buNone/>
+            </a:pPr>
+            <a:r>
+              <a:rPr lang="en-US" sz="1500" b="1" dirty="0">
+                <a:solidFill>
+                  <a:srgbClr val="FFFFFF"/>
+                </a:solidFill>
+                <a:latin typeface="Aptos" pitchFamily="34" charset="0"/>
+                <a:ea typeface="Aptos" pitchFamily="34" charset="-122"/>
+                <a:cs typeface="Aptos" pitchFamily="34" charset="-120"/>
+              </a:rPr>
+              <a:t>Learn</a:t>
+            </a:r>
+            <a:endParaRPr lang="en-US" sz="1500" dirty="0"/>
+          </a:p>
+        </p:txBody>
+      </p:sp>
+      <p:sp>
+        <p:nvSpPr>
+          <p:cNvPr id="15" name="Text 13"/>
+          <p:cNvSpPr/>
+          <p:nvPr/>
+        </p:nvSpPr>
+        <p:spPr>
+          <a:xfrm>
+            <a:off x="8695944" y="3941064"/>
+            <a:ext cx="201168" cy="256032"/>
+          </a:xfrm>
+          <a:prstGeom prst="rect">
+            <a:avLst/>
+          </a:prstGeom>
+          <a:noFill/>
+          <a:ln/>
+        </p:spPr>
+        <p:txBody>
+          <a:bodyPr wrap="square" lIns="0" tIns="0" rIns="0" bIns="0" rtlCol="0" anchor="ctr"/>
+          <a:lstStyle/>
+          <a:p>
+            <a:pPr algn="ctr" indent="0" marL="0">
+              <a:buNone/>
+            </a:pPr>
+            <a:r>
+              <a:rPr lang="en-US" sz="1800" b="1" dirty="0">
+                <a:solidFill>
+                  <a:srgbClr val="0068B7"/>
+                </a:solidFill>
+                <a:latin typeface="Aptos" pitchFamily="34" charset="0"/>
+                <a:ea typeface="Aptos" pitchFamily="34" charset="-122"/>
+                <a:cs typeface="Aptos" pitchFamily="34" charset="-120"/>
+              </a:rPr>
+              <a:t>â†’</a:t>
+            </a:r>
+            <a:endParaRPr lang="en-US" sz="1800" dirty="0"/>
+          </a:p>
+        </p:txBody>
+      </p:sp>
+      <p:sp>
+        <p:nvSpPr>
+          <p:cNvPr id="16" name="Shape 14"/>
+          <p:cNvSpPr/>
+          <p:nvPr/>
+        </p:nvSpPr>
+        <p:spPr>
+          <a:xfrm>
+            <a:off x="8924544" y="3730752"/>
+            <a:ext cx="1033272" cy="749808"/>
+          </a:xfrm>
+          <a:prstGeom prst="roundRect">
+            <a:avLst>
+              <a:gd name="adj" fmla="val 14634"/>
+            </a:avLst>
+          </a:prstGeom>
+          <a:solidFill>
+            <a:srgbClr val="2F8A28"/>
+          </a:solidFill>
+          <a:ln w="12700">
+            <a:solidFill>
+              <a:srgbClr val="2F8A28"/>
+            </a:solidFill>
+            <a:prstDash val="solid"/>
+          </a:ln>
+        </p:spPr>
+      </p:sp>
+      <p:sp>
+        <p:nvSpPr>
+          <p:cNvPr id="17" name="Text 15"/>
+          <p:cNvSpPr/>
+          <p:nvPr/>
+        </p:nvSpPr>
+        <p:spPr>
+          <a:xfrm>
+            <a:off x="8997696" y="3922776"/>
+            <a:ext cx="886968" cy="310896"/>
+          </a:xfrm>
+          <a:prstGeom prst="rect">
+            <a:avLst/>
+          </a:prstGeom>
+          <a:noFill/>
+          <a:ln/>
+        </p:spPr>
+        <p:txBody>
+          <a:bodyPr wrap="square" lIns="0" tIns="0" rIns="0" bIns="0" rtlCol="0" anchor="ctr">
+            <a:normAutofit/>
+          </a:bodyPr>
+          <a:lstStyle/>
+          <a:p>
+            <a:pPr algn="ctr" indent="0" marL="0">
+              <a:buNone/>
+            </a:pPr>
+            <a:r>
+              <a:rPr lang="en-US" sz="1500" b="1" dirty="0">
+                <a:solidFill>
+                  <a:srgbClr val="FFFFFF"/>
+                </a:solidFill>
+                <a:latin typeface="Aptos" pitchFamily="34" charset="0"/>
+                <a:ea typeface="Aptos" pitchFamily="34" charset="-122"/>
+                <a:cs typeface="Aptos" pitchFamily="34" charset="-120"/>
+              </a:rPr>
+              <a:t>Apply</a:t>
+            </a:r>
+            <a:endParaRPr lang="en-US" sz="1500" dirty="0"/>
+          </a:p>
+        </p:txBody>
+      </p:sp>
+      <p:sp>
+        <p:nvSpPr>
+          <p:cNvPr id="18" name="Text 16"/>
+          <p:cNvSpPr/>
+          <p:nvPr/>
+        </p:nvSpPr>
+        <p:spPr>
+          <a:xfrm>
+            <a:off x="9985248" y="3941064"/>
+            <a:ext cx="201168" cy="256032"/>
+          </a:xfrm>
+          <a:prstGeom prst="rect">
+            <a:avLst/>
+          </a:prstGeom>
+          <a:noFill/>
+          <a:ln/>
+        </p:spPr>
+        <p:txBody>
+          <a:bodyPr wrap="square" lIns="0" tIns="0" rIns="0" bIns="0" rtlCol="0" anchor="ctr"/>
+          <a:lstStyle/>
+          <a:p>
+            <a:pPr algn="ctr" indent="0" marL="0">
+              <a:buNone/>
+            </a:pPr>
+            <a:r>
+              <a:rPr lang="en-US" sz="1800" b="1" dirty="0">
+                <a:solidFill>
+                  <a:srgbClr val="0068B7"/>
+                </a:solidFill>
+                <a:latin typeface="Aptos" pitchFamily="34" charset="0"/>
+                <a:ea typeface="Aptos" pitchFamily="34" charset="-122"/>
+                <a:cs typeface="Aptos" pitchFamily="34" charset="-120"/>
+              </a:rPr>
+              <a:t>â†’</a:t>
+            </a:r>
+            <a:endParaRPr lang="en-US" sz="1800" dirty="0"/>
+          </a:p>
+        </p:txBody>
+      </p:sp>
+      <p:sp>
+        <p:nvSpPr>
+          <p:cNvPr id="19" name="Shape 17"/>
+          <p:cNvSpPr/>
+          <p:nvPr/>
+        </p:nvSpPr>
+        <p:spPr>
+          <a:xfrm>
+            <a:off x="10213848" y="3730752"/>
+            <a:ext cx="1033272" cy="749808"/>
+          </a:xfrm>
+          <a:prstGeom prst="roundRect">
+            <a:avLst>
+              <a:gd name="adj" fmla="val 14634"/>
+            </a:avLst>
+          </a:prstGeom>
+          <a:solidFill>
+            <a:srgbClr val="6A4CA3"/>
+          </a:solidFill>
+          <a:ln w="12700">
+            <a:solidFill>
+              <a:srgbClr val="6A4CA3"/>
+            </a:solidFill>
+            <a:prstDash val="solid"/>
+          </a:ln>
+        </p:spPr>
+      </p:sp>
+      <p:sp>
+        <p:nvSpPr>
+          <p:cNvPr id="20" name="Text 18"/>
+          <p:cNvSpPr/>
+          <p:nvPr/>
+        </p:nvSpPr>
+        <p:spPr>
+          <a:xfrm>
+            <a:off x="10287000" y="3922776"/>
+            <a:ext cx="886968" cy="310896"/>
+          </a:xfrm>
+          <a:prstGeom prst="rect">
+            <a:avLst/>
+          </a:prstGeom>
+          <a:noFill/>
+          <a:ln/>
+        </p:spPr>
+        <p:txBody>
+          <a:bodyPr wrap="square" lIns="0" tIns="0" rIns="0" bIns="0" rtlCol="0" anchor="ctr">
+            <a:normAutofit/>
+          </a:bodyPr>
+          <a:lstStyle/>
+          <a:p>
+            <a:pPr algn="ctr" indent="0" marL="0">
+              <a:buNone/>
+            </a:pPr>
+            <a:r>
+              <a:rPr lang="en-US" sz="1500" b="1" dirty="0">
+                <a:solidFill>
+                  <a:srgbClr val="FFFFFF"/>
+                </a:solidFill>
+                <a:latin typeface="Aptos" pitchFamily="34" charset="0"/>
+                <a:ea typeface="Aptos" pitchFamily="34" charset="-122"/>
+                <a:cs typeface="Aptos" pitchFamily="34" charset="-120"/>
+              </a:rPr>
+              <a:t>Document</a:t>
+            </a:r>
+            <a:endParaRPr lang="en-US" sz="1500" dirty="0"/>
           </a:p>
         </p:txBody>
       </p:sp>
@@ -9267,7 +9896,7 @@
                 <a:ea typeface="Aptos" pitchFamily="34" charset="-122"/>
                 <a:cs typeface="Aptos" pitchFamily="34" charset="-120"/>
               </a:rPr>
-              <a:t>© Paula Soper</a:t>
+              <a:t>Â© Paula Soper</a:t>
             </a:r>
             <a:endParaRPr lang="en-US" sz="800" dirty="0"/>
           </a:p>
@@ -9275,7 +9904,46 @@
       </p:sp>
       <p:sp>
         <p:nvSpPr>
-          <p:cNvPr id="7" name="Shape 5"/>
+          <p:cNvPr id="7" name="Text 5"/>
+          <p:cNvSpPr/>
+          <p:nvPr/>
+        </p:nvSpPr>
+        <p:spPr>
+          <a:xfrm>
+            <a:off x="11137392" y="6510528"/>
+            <a:ext cx="411480" cy="201168"/>
+          </a:xfrm>
+          <a:prstGeom prst="rect">
+            <a:avLst/>
+          </a:prstGeom>
+          <a:noFill/>
+          <a:ln/>
+        </p:spPr>
+        <p:txBody>
+          <a:bodyPr wrap="square" lIns="0" tIns="0" rIns="0" bIns="0" rtlCol="0" anchor="ctr"/>
+          <a:lstStyle/>
+          <a:p>
+            <a:pPr algn="r" indent="0" marL="0">
+              <a:buNone/>
+            </a:pPr>
+            <a:r>
+              <a:rPr lang="en-US" sz="900" dirty="0">
+                <a:solidFill>
+                  <a:srgbClr val="5F7181"/>
+                </a:solidFill>
+                <a:latin typeface="Aptos" pitchFamily="34" charset="0"/>
+                <a:ea typeface="Aptos" pitchFamily="34" charset="-122"/>
+                <a:cs typeface="Aptos" pitchFamily="34" charset="-120"/>
+              </a:rPr>
+              <a:t>20</a:t>
+            </a:r>
+            <a:endParaRPr lang="en-US" sz="900" dirty="0"/>
+          </a:p>
+        </p:txBody>
+      </p:sp>
+      <p:sp>
+        <p:nvSpPr>
+          <p:cNvPr id="8" name="Shape 6"/>
           <p:cNvSpPr/>
           <p:nvPr/>
         </p:nvSpPr>
@@ -9300,7 +9968,7 @@
       </p:sp>
       <p:sp>
         <p:nvSpPr>
-          <p:cNvPr id="8" name="Text 6"/>
+          <p:cNvPr id="9" name="Text 7"/>
           <p:cNvSpPr/>
           <p:nvPr/>
         </p:nvSpPr>
@@ -9339,14 +10007,14 @@
       </p:sp>
       <p:sp>
         <p:nvSpPr>
-          <p:cNvPr id="9" name="Text 7"/>
+          <p:cNvPr id="10" name="Text 8"/>
           <p:cNvSpPr/>
           <p:nvPr/>
         </p:nvSpPr>
         <p:spPr>
           <a:xfrm>
             <a:off x="640080" y="621792"/>
-            <a:ext cx="10881360" cy="566928"/>
+            <a:ext cx="10881360" cy="713232"/>
           </a:xfrm>
           <a:prstGeom prst="rect">
             <a:avLst/>
@@ -9364,7 +10032,7 @@
               <a:buNone/>
             </a:pPr>
             <a:r>
-              <a:rPr lang="en-US" sz="2700" b="1" dirty="0">
+              <a:rPr lang="en-US" sz="3400" b="1" dirty="0">
                 <a:solidFill>
                   <a:srgbClr val="003A63"/>
                 </a:solidFill>
@@ -9374,20 +10042,20 @@
               </a:rPr>
               <a:t>Expected Assignment</a:t>
             </a:r>
-            <a:endParaRPr lang="en-US" sz="2700" dirty="0"/>
-          </a:p>
-        </p:txBody>
-      </p:sp>
-      <p:sp>
-        <p:nvSpPr>
-          <p:cNvPr id="10" name="Text 8"/>
-          <p:cNvSpPr/>
-          <p:nvPr/>
-        </p:nvSpPr>
-        <p:spPr>
-          <a:xfrm>
-            <a:off x="868680" y="1417320"/>
-            <a:ext cx="6675120" cy="4434840"/>
+            <a:endParaRPr lang="en-US" sz="3400" dirty="0"/>
+          </a:p>
+        </p:txBody>
+      </p:sp>
+      <p:sp>
+        <p:nvSpPr>
+          <p:cNvPr id="11" name="Text 9"/>
+          <p:cNvSpPr/>
+          <p:nvPr/>
+        </p:nvSpPr>
+        <p:spPr>
+          <a:xfrm>
+            <a:off x="868680" y="1508760"/>
+            <a:ext cx="6537960" cy="4160520"/>
           </a:xfrm>
           <a:prstGeom prst="rect">
             <a:avLst/>
@@ -9402,7 +10070,7 @@
           <a:lstStyle/>
           <a:p>
             <a:r>
-              <a:rPr lang="en-US" sz="1700" dirty="0">
+              <a:rPr lang="en-US" sz="2100" dirty="0">
                 <a:solidFill>
                   <a:srgbClr val="17364A"/>
                 </a:solidFill>
@@ -9412,11 +10080,11 @@
               </a:rPr>
               <a:t>AI evidence inventory</a:t>
             </a:r>
-            <a:endParaRPr lang="en-US" sz="1700" dirty="0"/>
-          </a:p>
-          <a:p>
-            <a:r>
-              <a:rPr lang="en-US" sz="1700" dirty="0">
+            <a:endParaRPr lang="en-US" sz="2100" dirty="0"/>
+          </a:p>
+          <a:p>
+            <a:r>
+              <a:rPr lang="en-US" sz="2100" dirty="0">
                 <a:solidFill>
                   <a:srgbClr val="17364A"/>
                 </a:solidFill>
@@ -9426,11 +10094,11 @@
               </a:rPr>
               <a:t>Decision log template</a:t>
             </a:r>
-            <a:endParaRPr lang="en-US" sz="1700" dirty="0"/>
-          </a:p>
-          <a:p>
-            <a:r>
-              <a:rPr lang="en-US" sz="1700" dirty="0">
+            <a:endParaRPr lang="en-US" sz="2100" dirty="0"/>
+          </a:p>
+          <a:p>
+            <a:r>
+              <a:rPr lang="en-US" sz="2100" dirty="0">
                 <a:solidFill>
                   <a:srgbClr val="17364A"/>
                 </a:solidFill>
@@ -9440,27 +10108,13 @@
               </a:rPr>
               <a:t>Artifact ownership and retention table</a:t>
             </a:r>
-            <a:endParaRPr lang="en-US" sz="1700" dirty="0"/>
-          </a:p>
-          <a:p>
-            <a:r>
-              <a:rPr lang="en-US" sz="1700" dirty="0">
-                <a:solidFill>
-                  <a:srgbClr val="17364A"/>
-                </a:solidFill>
-                <a:latin typeface="Aptos" pitchFamily="34" charset="0"/>
-                <a:ea typeface="Aptos" pitchFamily="34" charset="-122"/>
-                <a:cs typeface="Aptos" pitchFamily="34" charset="-120"/>
-              </a:rPr>
-              <a:t>Gap list for missing evidence</a:t>
-            </a:r>
-            <a:endParaRPr lang="en-US" sz="1700" dirty="0"/>
-          </a:p>
-        </p:txBody>
-      </p:sp>
-      <p:sp>
-        <p:nvSpPr>
-          <p:cNvPr id="11" name="Shape 9"/>
+            <a:endParaRPr lang="en-US" sz="2100" dirty="0"/>
+          </a:p>
+        </p:txBody>
+      </p:sp>
+      <p:sp>
+        <p:nvSpPr>
+          <p:cNvPr id="12" name="Shape 10"/>
           <p:cNvSpPr/>
           <p:nvPr/>
         </p:nvSpPr>
@@ -9487,14 +10141,14 @@
       </p:sp>
       <p:sp>
         <p:nvSpPr>
-          <p:cNvPr id="12" name="Text 10"/>
+          <p:cNvPr id="13" name="Text 11"/>
           <p:cNvSpPr/>
           <p:nvPr/>
         </p:nvSpPr>
         <p:spPr>
           <a:xfrm>
             <a:off x="8074152" y="1563624"/>
-            <a:ext cx="2825496" cy="201168"/>
+            <a:ext cx="2825496" cy="256032"/>
           </a:xfrm>
           <a:prstGeom prst="rect">
             <a:avLst/>
@@ -9510,7 +10164,7 @@
               <a:buNone/>
             </a:pPr>
             <a:r>
-              <a:rPr lang="en-US" sz="950" b="1" dirty="0">
+              <a:rPr lang="en-US" sz="1300" b="1" dirty="0">
                 <a:solidFill>
                   <a:srgbClr val="0068B7"/>
                 </a:solidFill>
@@ -9520,20 +10174,20 @@
               </a:rPr>
               <a:t>Key idea</a:t>
             </a:r>
-            <a:endParaRPr lang="en-US" sz="950" dirty="0"/>
-          </a:p>
-        </p:txBody>
-      </p:sp>
-      <p:sp>
-        <p:nvSpPr>
-          <p:cNvPr id="13" name="Text 11"/>
-          <p:cNvSpPr/>
-          <p:nvPr/>
-        </p:nvSpPr>
-        <p:spPr>
-          <a:xfrm>
-            <a:off x="8074152" y="1856232"/>
-            <a:ext cx="2825496" cy="1261872"/>
+            <a:endParaRPr lang="en-US" sz="1300" dirty="0"/>
+          </a:p>
+        </p:txBody>
+      </p:sp>
+      <p:sp>
+        <p:nvSpPr>
+          <p:cNvPr id="14" name="Text 12"/>
+          <p:cNvSpPr/>
+          <p:nvPr/>
+        </p:nvSpPr>
+        <p:spPr>
+          <a:xfrm>
+            <a:off x="8074152" y="1920240"/>
+            <a:ext cx="2825496" cy="1188720"/>
           </a:xfrm>
           <a:prstGeom prst="rect">
             <a:avLst/>
@@ -9551,7 +10205,7 @@
               <a:buNone/>
             </a:pPr>
             <a:r>
-              <a:rPr lang="en-US" sz="1250" dirty="0">
+              <a:rPr lang="en-US" sz="1550" dirty="0">
                 <a:solidFill>
                   <a:srgbClr val="17364A"/>
                 </a:solidFill>
@@ -9561,13 +10215,13 @@
               </a:rPr>
               <a:t>AI evidence inventory</a:t>
             </a:r>
-            <a:endParaRPr lang="en-US" sz="1250" dirty="0"/>
-          </a:p>
-        </p:txBody>
-      </p:sp>
-      <p:sp>
-        <p:nvSpPr>
-          <p:cNvPr id="14" name="Shape 12"/>
+            <a:endParaRPr lang="en-US" sz="1550" dirty="0"/>
+          </a:p>
+        </p:txBody>
+      </p:sp>
+      <p:sp>
+        <p:nvSpPr>
+          <p:cNvPr id="15" name="Shape 13"/>
           <p:cNvSpPr/>
           <p:nvPr/>
         </p:nvSpPr>
@@ -9594,14 +10248,14 @@
       </p:sp>
       <p:sp>
         <p:nvSpPr>
-          <p:cNvPr id="15" name="Text 13"/>
+          <p:cNvPr id="16" name="Text 14"/>
           <p:cNvSpPr/>
           <p:nvPr/>
         </p:nvSpPr>
         <p:spPr>
           <a:xfrm>
             <a:off x="8074152" y="3666744"/>
-            <a:ext cx="2825496" cy="201168"/>
+            <a:ext cx="2825496" cy="256032"/>
           </a:xfrm>
           <a:prstGeom prst="rect">
             <a:avLst/>
@@ -9617,7 +10271,7 @@
               <a:buNone/>
             </a:pPr>
             <a:r>
-              <a:rPr lang="en-US" sz="950" b="1" dirty="0">
+              <a:rPr lang="en-US" sz="1300" b="1" dirty="0">
                 <a:solidFill>
                   <a:srgbClr val="0068B7"/>
                 </a:solidFill>
@@ -9627,20 +10281,20 @@
               </a:rPr>
               <a:t>Use this for</a:t>
             </a:r>
-            <a:endParaRPr lang="en-US" sz="950" dirty="0"/>
-          </a:p>
-        </p:txBody>
-      </p:sp>
-      <p:sp>
-        <p:nvSpPr>
-          <p:cNvPr id="16" name="Text 14"/>
-          <p:cNvSpPr/>
-          <p:nvPr/>
-        </p:nvSpPr>
-        <p:spPr>
-          <a:xfrm>
-            <a:off x="8074152" y="3959352"/>
-            <a:ext cx="2825496" cy="1170432"/>
+            <a:endParaRPr lang="en-US" sz="1300" dirty="0"/>
+          </a:p>
+        </p:txBody>
+      </p:sp>
+      <p:sp>
+        <p:nvSpPr>
+          <p:cNvPr id="17" name="Text 15"/>
+          <p:cNvSpPr/>
+          <p:nvPr/>
+        </p:nvSpPr>
+        <p:spPr>
+          <a:xfrm>
+            <a:off x="8074152" y="4023360"/>
+            <a:ext cx="2825496" cy="1097280"/>
           </a:xfrm>
           <a:prstGeom prst="rect">
             <a:avLst/>
@@ -9658,7 +10312,7 @@
               <a:buNone/>
             </a:pPr>
             <a:r>
-              <a:rPr lang="en-US" sz="1250" dirty="0">
+              <a:rPr lang="en-US" sz="1550" dirty="0">
                 <a:solidFill>
                   <a:srgbClr val="17364A"/>
                 </a:solidFill>
@@ -9668,7 +10322,7 @@
               </a:rPr>
               <a:t>Connect the concept to public health decisions, safeguards, documentation, or implementation work.</a:t>
             </a:r>
-            <a:endParaRPr lang="en-US" sz="1250" dirty="0"/>
+            <a:endParaRPr lang="en-US" sz="1550" dirty="0"/>
           </a:p>
         </p:txBody>
       </p:sp>
@@ -9865,7 +10519,7 @@
                 <a:ea typeface="Aptos" pitchFamily="34" charset="-122"/>
                 <a:cs typeface="Aptos" pitchFamily="34" charset="-120"/>
               </a:rPr>
-              <a:t>© Paula Soper</a:t>
+              <a:t>Â© Paula Soper</a:t>
             </a:r>
             <a:endParaRPr lang="en-US" sz="800" dirty="0"/>
           </a:p>
@@ -9873,7 +10527,46 @@
       </p:sp>
       <p:sp>
         <p:nvSpPr>
-          <p:cNvPr id="7" name="Shape 5"/>
+          <p:cNvPr id="7" name="Text 5"/>
+          <p:cNvSpPr/>
+          <p:nvPr/>
+        </p:nvSpPr>
+        <p:spPr>
+          <a:xfrm>
+            <a:off x="11137392" y="6510528"/>
+            <a:ext cx="411480" cy="201168"/>
+          </a:xfrm>
+          <a:prstGeom prst="rect">
+            <a:avLst/>
+          </a:prstGeom>
+          <a:noFill/>
+          <a:ln/>
+        </p:spPr>
+        <p:txBody>
+          <a:bodyPr wrap="square" lIns="0" tIns="0" rIns="0" bIns="0" rtlCol="0" anchor="ctr"/>
+          <a:lstStyle/>
+          <a:p>
+            <a:pPr algn="r" indent="0" marL="0">
+              <a:buNone/>
+            </a:pPr>
+            <a:r>
+              <a:rPr lang="en-US" sz="900" dirty="0">
+                <a:solidFill>
+                  <a:srgbClr val="5F7181"/>
+                </a:solidFill>
+                <a:latin typeface="Aptos" pitchFamily="34" charset="0"/>
+                <a:ea typeface="Aptos" pitchFamily="34" charset="-122"/>
+                <a:cs typeface="Aptos" pitchFamily="34" charset="-120"/>
+              </a:rPr>
+              <a:t>21</a:t>
+            </a:r>
+            <a:endParaRPr lang="en-US" sz="900" dirty="0"/>
+          </a:p>
+        </p:txBody>
+      </p:sp>
+      <p:sp>
+        <p:nvSpPr>
+          <p:cNvPr id="8" name="Shape 6"/>
           <p:cNvSpPr/>
           <p:nvPr/>
         </p:nvSpPr>
@@ -9898,7 +10591,7 @@
       </p:sp>
       <p:sp>
         <p:nvSpPr>
-          <p:cNvPr id="8" name="Text 6"/>
+          <p:cNvPr id="9" name="Text 7"/>
           <p:cNvSpPr/>
           <p:nvPr/>
         </p:nvSpPr>
@@ -9937,14 +10630,14 @@
       </p:sp>
       <p:sp>
         <p:nvSpPr>
-          <p:cNvPr id="9" name="Text 7"/>
+          <p:cNvPr id="10" name="Text 8"/>
           <p:cNvSpPr/>
           <p:nvPr/>
         </p:nvSpPr>
         <p:spPr>
           <a:xfrm>
             <a:off x="640080" y="621792"/>
-            <a:ext cx="10881360" cy="566928"/>
+            <a:ext cx="10881360" cy="713232"/>
           </a:xfrm>
           <a:prstGeom prst="rect">
             <a:avLst/>
@@ -9962,7 +10655,7 @@
               <a:buNone/>
             </a:pPr>
             <a:r>
-              <a:rPr lang="en-US" sz="2700" b="1" dirty="0">
+              <a:rPr lang="en-US" sz="3400" b="1" dirty="0">
                 <a:solidFill>
                   <a:srgbClr val="003A63"/>
                 </a:solidFill>
@@ -9972,20 +10665,20 @@
               </a:rPr>
               <a:t>Knowledge Check</a:t>
             </a:r>
-            <a:endParaRPr lang="en-US" sz="2700" dirty="0"/>
-          </a:p>
-        </p:txBody>
-      </p:sp>
-      <p:sp>
-        <p:nvSpPr>
-          <p:cNvPr id="10" name="Text 8"/>
-          <p:cNvSpPr/>
-          <p:nvPr/>
-        </p:nvSpPr>
-        <p:spPr>
-          <a:xfrm>
-            <a:off x="868680" y="1417320"/>
-            <a:ext cx="6675120" cy="4434840"/>
+            <a:endParaRPr lang="en-US" sz="3400" dirty="0"/>
+          </a:p>
+        </p:txBody>
+      </p:sp>
+      <p:sp>
+        <p:nvSpPr>
+          <p:cNvPr id="11" name="Text 9"/>
+          <p:cNvSpPr/>
+          <p:nvPr/>
+        </p:nvSpPr>
+        <p:spPr>
+          <a:xfrm>
+            <a:off x="868680" y="1508760"/>
+            <a:ext cx="6537960" cy="4160520"/>
           </a:xfrm>
           <a:prstGeom prst="rect">
             <a:avLst/>
@@ -10000,7 +10693,7 @@
           <a:lstStyle/>
           <a:p>
             <a:r>
-              <a:rPr lang="en-US" sz="1700" dirty="0">
+              <a:rPr lang="en-US" sz="2100" dirty="0">
                 <a:solidFill>
                   <a:srgbClr val="17364A"/>
                 </a:solidFill>
@@ -10010,11 +10703,11 @@
               </a:rPr>
               <a:t>1. What is AI audit readiness?</a:t>
             </a:r>
-            <a:endParaRPr lang="en-US" sz="1700" dirty="0"/>
-          </a:p>
-          <a:p>
-            <a:r>
-              <a:rPr lang="en-US" sz="1700" dirty="0">
+            <a:endParaRPr lang="en-US" sz="2100" dirty="0"/>
+          </a:p>
+          <a:p>
+            <a:r>
+              <a:rPr lang="en-US" sz="2100" dirty="0">
                 <a:solidFill>
                   <a:srgbClr val="17364A"/>
                 </a:solidFill>
@@ -10024,11 +10717,11 @@
               </a:rPr>
               <a:t>2. Which record should be preserved from AI governance review?</a:t>
             </a:r>
-            <a:endParaRPr lang="en-US" sz="1700" dirty="0"/>
-          </a:p>
-          <a:p>
-            <a:r>
-              <a:rPr lang="en-US" sz="1700" dirty="0">
+            <a:endParaRPr lang="en-US" sz="2100" dirty="0"/>
+          </a:p>
+          <a:p>
+            <a:r>
+              <a:rPr lang="en-US" sz="2100" dirty="0">
                 <a:solidFill>
                   <a:srgbClr val="17364A"/>
                 </a:solidFill>
@@ -10038,27 +10731,13 @@
               </a:rPr>
               <a:t>3. What is validation evidence?</a:t>
             </a:r>
-            <a:endParaRPr lang="en-US" sz="1700" dirty="0"/>
-          </a:p>
-          <a:p>
-            <a:r>
-              <a:rPr lang="en-US" sz="1700" dirty="0">
-                <a:solidFill>
-                  <a:srgbClr val="17364A"/>
-                </a:solidFill>
-                <a:latin typeface="Aptos" pitchFamily="34" charset="0"/>
-                <a:ea typeface="Aptos" pitchFamily="34" charset="-122"/>
-                <a:cs typeface="Aptos" pitchFamily="34" charset="-120"/>
-              </a:rPr>
-              <a:t>4. Why is operational evidence important?</a:t>
-            </a:r>
-            <a:endParaRPr lang="en-US" sz="1700" dirty="0"/>
-          </a:p>
-        </p:txBody>
-      </p:sp>
-      <p:sp>
-        <p:nvSpPr>
-          <p:cNvPr id="11" name="Shape 9"/>
+            <a:endParaRPr lang="en-US" sz="2100" dirty="0"/>
+          </a:p>
+        </p:txBody>
+      </p:sp>
+      <p:sp>
+        <p:nvSpPr>
+          <p:cNvPr id="12" name="Shape 10"/>
           <p:cNvSpPr/>
           <p:nvPr/>
         </p:nvSpPr>
@@ -10085,14 +10764,14 @@
       </p:sp>
       <p:sp>
         <p:nvSpPr>
-          <p:cNvPr id="12" name="Text 10"/>
+          <p:cNvPr id="13" name="Text 11"/>
           <p:cNvSpPr/>
           <p:nvPr/>
         </p:nvSpPr>
         <p:spPr>
           <a:xfrm>
             <a:off x="8074152" y="1563624"/>
-            <a:ext cx="2825496" cy="201168"/>
+            <a:ext cx="2825496" cy="256032"/>
           </a:xfrm>
           <a:prstGeom prst="rect">
             <a:avLst/>
@@ -10108,7 +10787,7 @@
               <a:buNone/>
             </a:pPr>
             <a:r>
-              <a:rPr lang="en-US" sz="950" b="1" dirty="0">
+              <a:rPr lang="en-US" sz="1300" b="1" dirty="0">
                 <a:solidFill>
                   <a:srgbClr val="0068B7"/>
                 </a:solidFill>
@@ -10118,20 +10797,20 @@
               </a:rPr>
               <a:t>Key idea</a:t>
             </a:r>
-            <a:endParaRPr lang="en-US" sz="950" dirty="0"/>
-          </a:p>
-        </p:txBody>
-      </p:sp>
-      <p:sp>
-        <p:nvSpPr>
-          <p:cNvPr id="13" name="Text 11"/>
-          <p:cNvSpPr/>
-          <p:nvPr/>
-        </p:nvSpPr>
-        <p:spPr>
-          <a:xfrm>
-            <a:off x="8074152" y="1856232"/>
-            <a:ext cx="2825496" cy="1261872"/>
+            <a:endParaRPr lang="en-US" sz="1300" dirty="0"/>
+          </a:p>
+        </p:txBody>
+      </p:sp>
+      <p:sp>
+        <p:nvSpPr>
+          <p:cNvPr id="14" name="Text 12"/>
+          <p:cNvSpPr/>
+          <p:nvPr/>
+        </p:nvSpPr>
+        <p:spPr>
+          <a:xfrm>
+            <a:off x="8074152" y="1920240"/>
+            <a:ext cx="2825496" cy="1188720"/>
           </a:xfrm>
           <a:prstGeom prst="rect">
             <a:avLst/>
@@ -10149,7 +10828,7 @@
               <a:buNone/>
             </a:pPr>
             <a:r>
-              <a:rPr lang="en-US" sz="1250" dirty="0">
+              <a:rPr lang="en-US" sz="1550" dirty="0">
                 <a:solidFill>
                   <a:srgbClr val="17364A"/>
                 </a:solidFill>
@@ -10159,13 +10838,13 @@
               </a:rPr>
               <a:t>1. What is AI audit readiness?</a:t>
             </a:r>
-            <a:endParaRPr lang="en-US" sz="1250" dirty="0"/>
-          </a:p>
-        </p:txBody>
-      </p:sp>
-      <p:sp>
-        <p:nvSpPr>
-          <p:cNvPr id="14" name="Shape 12"/>
+            <a:endParaRPr lang="en-US" sz="1550" dirty="0"/>
+          </a:p>
+        </p:txBody>
+      </p:sp>
+      <p:sp>
+        <p:nvSpPr>
+          <p:cNvPr id="15" name="Shape 13"/>
           <p:cNvSpPr/>
           <p:nvPr/>
         </p:nvSpPr>
@@ -10192,14 +10871,14 @@
       </p:sp>
       <p:sp>
         <p:nvSpPr>
-          <p:cNvPr id="15" name="Text 13"/>
+          <p:cNvPr id="16" name="Text 14"/>
           <p:cNvSpPr/>
           <p:nvPr/>
         </p:nvSpPr>
         <p:spPr>
           <a:xfrm>
             <a:off x="8074152" y="3666744"/>
-            <a:ext cx="2825496" cy="201168"/>
+            <a:ext cx="2825496" cy="256032"/>
           </a:xfrm>
           <a:prstGeom prst="rect">
             <a:avLst/>
@@ -10215,7 +10894,7 @@
               <a:buNone/>
             </a:pPr>
             <a:r>
-              <a:rPr lang="en-US" sz="950" b="1" dirty="0">
+              <a:rPr lang="en-US" sz="1300" b="1" dirty="0">
                 <a:solidFill>
                   <a:srgbClr val="0068B7"/>
                 </a:solidFill>
@@ -10225,20 +10904,20 @@
               </a:rPr>
               <a:t>Use this for</a:t>
             </a:r>
-            <a:endParaRPr lang="en-US" sz="950" dirty="0"/>
-          </a:p>
-        </p:txBody>
-      </p:sp>
-      <p:sp>
-        <p:nvSpPr>
-          <p:cNvPr id="16" name="Text 14"/>
-          <p:cNvSpPr/>
-          <p:nvPr/>
-        </p:nvSpPr>
-        <p:spPr>
-          <a:xfrm>
-            <a:off x="8074152" y="3959352"/>
-            <a:ext cx="2825496" cy="1170432"/>
+            <a:endParaRPr lang="en-US" sz="1300" dirty="0"/>
+          </a:p>
+        </p:txBody>
+      </p:sp>
+      <p:sp>
+        <p:nvSpPr>
+          <p:cNvPr id="17" name="Text 15"/>
+          <p:cNvSpPr/>
+          <p:nvPr/>
+        </p:nvSpPr>
+        <p:spPr>
+          <a:xfrm>
+            <a:off x="8074152" y="4023360"/>
+            <a:ext cx="2825496" cy="1097280"/>
           </a:xfrm>
           <a:prstGeom prst="rect">
             <a:avLst/>
@@ -10256,7 +10935,7 @@
               <a:buNone/>
             </a:pPr>
             <a:r>
-              <a:rPr lang="en-US" sz="1250" dirty="0">
+              <a:rPr lang="en-US" sz="1550" dirty="0">
                 <a:solidFill>
                   <a:srgbClr val="17364A"/>
                 </a:solidFill>
@@ -10266,7 +10945,7 @@
               </a:rPr>
               <a:t>Connect the concept to public health decisions, safeguards, documentation, or implementation work.</a:t>
             </a:r>
-            <a:endParaRPr lang="en-US" sz="1250" dirty="0"/>
+            <a:endParaRPr lang="en-US" sz="1550" dirty="0"/>
           </a:p>
         </p:txBody>
       </p:sp>
@@ -10463,7 +11142,7 @@
                 <a:ea typeface="Aptos" pitchFamily="34" charset="-122"/>
                 <a:cs typeface="Aptos" pitchFamily="34" charset="-120"/>
               </a:rPr>
-              <a:t>© Paula Soper</a:t>
+              <a:t>Â© Paula Soper</a:t>
             </a:r>
             <a:endParaRPr lang="en-US" sz="800" dirty="0"/>
           </a:p>
@@ -10471,7 +11150,46 @@
       </p:sp>
       <p:sp>
         <p:nvSpPr>
-          <p:cNvPr id="7" name="Shape 5"/>
+          <p:cNvPr id="7" name="Text 5"/>
+          <p:cNvSpPr/>
+          <p:nvPr/>
+        </p:nvSpPr>
+        <p:spPr>
+          <a:xfrm>
+            <a:off x="11137392" y="6510528"/>
+            <a:ext cx="411480" cy="201168"/>
+          </a:xfrm>
+          <a:prstGeom prst="rect">
+            <a:avLst/>
+          </a:prstGeom>
+          <a:noFill/>
+          <a:ln/>
+        </p:spPr>
+        <p:txBody>
+          <a:bodyPr wrap="square" lIns="0" tIns="0" rIns="0" bIns="0" rtlCol="0" anchor="ctr"/>
+          <a:lstStyle/>
+          <a:p>
+            <a:pPr algn="r" indent="0" marL="0">
+              <a:buNone/>
+            </a:pPr>
+            <a:r>
+              <a:rPr lang="en-US" sz="900" dirty="0">
+                <a:solidFill>
+                  <a:srgbClr val="5F7181"/>
+                </a:solidFill>
+                <a:latin typeface="Aptos" pitchFamily="34" charset="0"/>
+                <a:ea typeface="Aptos" pitchFamily="34" charset="-122"/>
+                <a:cs typeface="Aptos" pitchFamily="34" charset="-120"/>
+              </a:rPr>
+              <a:t>22</a:t>
+            </a:r>
+            <a:endParaRPr lang="en-US" sz="900" dirty="0"/>
+          </a:p>
+        </p:txBody>
+      </p:sp>
+      <p:sp>
+        <p:nvSpPr>
+          <p:cNvPr id="8" name="Shape 6"/>
           <p:cNvSpPr/>
           <p:nvPr/>
         </p:nvSpPr>
@@ -10496,7 +11214,7 @@
       </p:sp>
       <p:sp>
         <p:nvSpPr>
-          <p:cNvPr id="8" name="Text 6"/>
+          <p:cNvPr id="9" name="Text 7"/>
           <p:cNvSpPr/>
           <p:nvPr/>
         </p:nvSpPr>
@@ -10535,14 +11253,14 @@
       </p:sp>
       <p:sp>
         <p:nvSpPr>
-          <p:cNvPr id="9" name="Text 7"/>
+          <p:cNvPr id="10" name="Text 8"/>
           <p:cNvSpPr/>
           <p:nvPr/>
         </p:nvSpPr>
         <p:spPr>
           <a:xfrm>
             <a:off x="640080" y="621792"/>
-            <a:ext cx="10881360" cy="566928"/>
+            <a:ext cx="10881360" cy="713232"/>
           </a:xfrm>
           <a:prstGeom prst="rect">
             <a:avLst/>
@@ -10560,7 +11278,7 @@
               <a:buNone/>
             </a:pPr>
             <a:r>
-              <a:rPr lang="en-US" sz="2700" b="1" dirty="0">
+              <a:rPr lang="en-US" sz="3400" b="1" dirty="0">
                 <a:solidFill>
                   <a:srgbClr val="003A63"/>
                 </a:solidFill>
@@ -10570,20 +11288,20 @@
               </a:rPr>
               <a:t>References and Resources</a:t>
             </a:r>
-            <a:endParaRPr lang="en-US" sz="2700" dirty="0"/>
-          </a:p>
-        </p:txBody>
-      </p:sp>
-      <p:sp>
-        <p:nvSpPr>
-          <p:cNvPr id="10" name="Text 8"/>
-          <p:cNvSpPr/>
-          <p:nvPr/>
-        </p:nvSpPr>
-        <p:spPr>
-          <a:xfrm>
-            <a:off x="868680" y="1417320"/>
-            <a:ext cx="6675120" cy="4434840"/>
+            <a:endParaRPr lang="en-US" sz="3400" dirty="0"/>
+          </a:p>
+        </p:txBody>
+      </p:sp>
+      <p:sp>
+        <p:nvSpPr>
+          <p:cNvPr id="11" name="Text 9"/>
+          <p:cNvSpPr/>
+          <p:nvPr/>
+        </p:nvSpPr>
+        <p:spPr>
+          <a:xfrm>
+            <a:off x="868680" y="1508760"/>
+            <a:ext cx="6537960" cy="4160520"/>
           </a:xfrm>
           <a:prstGeom prst="rect">
             <a:avLst/>
@@ -10598,7 +11316,7 @@
           <a:lstStyle/>
           <a:p>
             <a:r>
-              <a:rPr lang="en-US" sz="1700" dirty="0">
+              <a:rPr lang="en-US" sz="2100" dirty="0">
                 <a:solidFill>
                   <a:srgbClr val="17364A"/>
                 </a:solidFill>
@@ -10606,13 +11324,13 @@
                 <a:ea typeface="Aptos" pitchFamily="34" charset="-122"/>
                 <a:cs typeface="Aptos" pitchFamily="34" charset="-120"/>
               </a:rPr>
-              <a:t>NIST Artificial Intelligence Risk Management Framework: https://www.nist.gov/itl/ai-risk-management-framework</a:t>
-            </a:r>
-            <a:endParaRPr lang="en-US" sz="1700" dirty="0"/>
-          </a:p>
-          <a:p>
-            <a:r>
-              <a:rPr lang="en-US" sz="1700" dirty="0">
+              <a:t>NIST Artificial Intelligence Risk Management Framework:.</a:t>
+            </a:r>
+            <a:endParaRPr lang="en-US" sz="2100" dirty="0"/>
+          </a:p>
+          <a:p>
+            <a:r>
+              <a:rPr lang="en-US" sz="2100" dirty="0">
                 <a:solidFill>
                   <a:srgbClr val="17364A"/>
                 </a:solidFill>
@@ -10622,11 +11340,11 @@
               </a:rPr>
               <a:t>NIST Generative AI Profile:.</a:t>
             </a:r>
-            <a:endParaRPr lang="en-US" sz="1700" dirty="0"/>
-          </a:p>
-          <a:p>
-            <a:r>
-              <a:rPr lang="en-US" sz="1700" dirty="0">
+            <a:endParaRPr lang="en-US" sz="2100" dirty="0"/>
+          </a:p>
+          <a:p>
+            <a:r>
+              <a:rPr lang="en-US" sz="2100" dirty="0">
                 <a:solidFill>
                   <a:srgbClr val="17364A"/>
                 </a:solidFill>
@@ -10636,27 +11354,13 @@
               </a:rPr>
               <a:t>CDC Public Health Data Strategy and Data Modernization resources:.</a:t>
             </a:r>
-            <a:endParaRPr lang="en-US" sz="1700" dirty="0"/>
-          </a:p>
-          <a:p>
-            <a:r>
-              <a:rPr lang="en-US" sz="1700" dirty="0">
-                <a:solidFill>
-                  <a:srgbClr val="17364A"/>
-                </a:solidFill>
-                <a:latin typeface="Aptos" pitchFamily="34" charset="0"/>
-                <a:ea typeface="Aptos" pitchFamily="34" charset="-122"/>
-                <a:cs typeface="Aptos" pitchFamily="34" charset="-120"/>
-              </a:rPr>
-              <a:t>OWASP guidance for LLM application security</a:t>
-            </a:r>
-            <a:endParaRPr lang="en-US" sz="1700" dirty="0"/>
-          </a:p>
-        </p:txBody>
-      </p:sp>
-      <p:sp>
-        <p:nvSpPr>
-          <p:cNvPr id="11" name="Shape 9"/>
+            <a:endParaRPr lang="en-US" sz="2100" dirty="0"/>
+          </a:p>
+        </p:txBody>
+      </p:sp>
+      <p:sp>
+        <p:nvSpPr>
+          <p:cNvPr id="12" name="Shape 10"/>
           <p:cNvSpPr/>
           <p:nvPr/>
         </p:nvSpPr>
@@ -10683,14 +11387,14 @@
       </p:sp>
       <p:sp>
         <p:nvSpPr>
-          <p:cNvPr id="12" name="Text 10"/>
+          <p:cNvPr id="13" name="Text 11"/>
           <p:cNvSpPr/>
           <p:nvPr/>
         </p:nvSpPr>
         <p:spPr>
           <a:xfrm>
             <a:off x="8074152" y="1563624"/>
-            <a:ext cx="2825496" cy="201168"/>
+            <a:ext cx="2825496" cy="256032"/>
           </a:xfrm>
           <a:prstGeom prst="rect">
             <a:avLst/>
@@ -10706,7 +11410,7 @@
               <a:buNone/>
             </a:pPr>
             <a:r>
-              <a:rPr lang="en-US" sz="950" b="1" dirty="0">
+              <a:rPr lang="en-US" sz="1300" b="1" dirty="0">
                 <a:solidFill>
                   <a:srgbClr val="0068B7"/>
                 </a:solidFill>
@@ -10716,20 +11420,20 @@
               </a:rPr>
               <a:t>Key idea</a:t>
             </a:r>
-            <a:endParaRPr lang="en-US" sz="950" dirty="0"/>
-          </a:p>
-        </p:txBody>
-      </p:sp>
-      <p:sp>
-        <p:nvSpPr>
-          <p:cNvPr id="13" name="Text 11"/>
-          <p:cNvSpPr/>
-          <p:nvPr/>
-        </p:nvSpPr>
-        <p:spPr>
-          <a:xfrm>
-            <a:off x="8074152" y="1856232"/>
-            <a:ext cx="2825496" cy="1261872"/>
+            <a:endParaRPr lang="en-US" sz="1300" dirty="0"/>
+          </a:p>
+        </p:txBody>
+      </p:sp>
+      <p:sp>
+        <p:nvSpPr>
+          <p:cNvPr id="14" name="Text 12"/>
+          <p:cNvSpPr/>
+          <p:nvPr/>
+        </p:nvSpPr>
+        <p:spPr>
+          <a:xfrm>
+            <a:off x="8074152" y="1920240"/>
+            <a:ext cx="2825496" cy="1188720"/>
           </a:xfrm>
           <a:prstGeom prst="rect">
             <a:avLst/>
@@ -10747,7 +11451,7 @@
               <a:buNone/>
             </a:pPr>
             <a:r>
-              <a:rPr lang="en-US" sz="1250" dirty="0">
+              <a:rPr lang="en-US" sz="1550" dirty="0">
                 <a:solidFill>
                   <a:srgbClr val="17364A"/>
                 </a:solidFill>
@@ -10755,15 +11459,15 @@
                 <a:ea typeface="Aptos" pitchFamily="34" charset="-122"/>
                 <a:cs typeface="Aptos" pitchFamily="34" charset="-120"/>
               </a:rPr>
-              <a:t>NIST Artificial Intelligence Risk Management Framework: https://www.nist.gov/itl/ai-risk-management-framework</a:t>
-            </a:r>
-            <a:endParaRPr lang="en-US" sz="1250" dirty="0"/>
-          </a:p>
-        </p:txBody>
-      </p:sp>
-      <p:sp>
-        <p:nvSpPr>
-          <p:cNvPr id="14" name="Shape 12"/>
+              <a:t>NIST Artificial Intelligence Risk Management Framework:.</a:t>
+            </a:r>
+            <a:endParaRPr lang="en-US" sz="1550" dirty="0"/>
+          </a:p>
+        </p:txBody>
+      </p:sp>
+      <p:sp>
+        <p:nvSpPr>
+          <p:cNvPr id="15" name="Shape 13"/>
           <p:cNvSpPr/>
           <p:nvPr/>
         </p:nvSpPr>
@@ -10790,14 +11494,14 @@
       </p:sp>
       <p:sp>
         <p:nvSpPr>
-          <p:cNvPr id="15" name="Text 13"/>
+          <p:cNvPr id="16" name="Text 14"/>
           <p:cNvSpPr/>
           <p:nvPr/>
         </p:nvSpPr>
         <p:spPr>
           <a:xfrm>
             <a:off x="8074152" y="3666744"/>
-            <a:ext cx="2825496" cy="201168"/>
+            <a:ext cx="2825496" cy="256032"/>
           </a:xfrm>
           <a:prstGeom prst="rect">
             <a:avLst/>
@@ -10813,7 +11517,7 @@
               <a:buNone/>
             </a:pPr>
             <a:r>
-              <a:rPr lang="en-US" sz="950" b="1" dirty="0">
+              <a:rPr lang="en-US" sz="1300" b="1" dirty="0">
                 <a:solidFill>
                   <a:srgbClr val="0068B7"/>
                 </a:solidFill>
@@ -10823,20 +11527,20 @@
               </a:rPr>
               <a:t>Use this for</a:t>
             </a:r>
-            <a:endParaRPr lang="en-US" sz="950" dirty="0"/>
-          </a:p>
-        </p:txBody>
-      </p:sp>
-      <p:sp>
-        <p:nvSpPr>
-          <p:cNvPr id="16" name="Text 14"/>
-          <p:cNvSpPr/>
-          <p:nvPr/>
-        </p:nvSpPr>
-        <p:spPr>
-          <a:xfrm>
-            <a:off x="8074152" y="3959352"/>
-            <a:ext cx="2825496" cy="1170432"/>
+            <a:endParaRPr lang="en-US" sz="1300" dirty="0"/>
+          </a:p>
+        </p:txBody>
+      </p:sp>
+      <p:sp>
+        <p:nvSpPr>
+          <p:cNvPr id="17" name="Text 15"/>
+          <p:cNvSpPr/>
+          <p:nvPr/>
+        </p:nvSpPr>
+        <p:spPr>
+          <a:xfrm>
+            <a:off x="8074152" y="4023360"/>
+            <a:ext cx="2825496" cy="1097280"/>
           </a:xfrm>
           <a:prstGeom prst="rect">
             <a:avLst/>
@@ -10854,7 +11558,7 @@
               <a:buNone/>
             </a:pPr>
             <a:r>
-              <a:rPr lang="en-US" sz="1250" dirty="0">
+              <a:rPr lang="en-US" sz="1550" dirty="0">
                 <a:solidFill>
                   <a:srgbClr val="17364A"/>
                 </a:solidFill>
@@ -10864,7 +11568,7 @@
               </a:rPr>
               <a:t>Connect the concept to public health decisions, safeguards, documentation, or implementation work.</a:t>
             </a:r>
-            <a:endParaRPr lang="en-US" sz="1250" dirty="0"/>
+            <a:endParaRPr lang="en-US" sz="1550" dirty="0"/>
           </a:p>
         </p:txBody>
       </p:sp>
@@ -11061,7 +11765,7 @@
                 <a:ea typeface="Aptos" pitchFamily="34" charset="-122"/>
                 <a:cs typeface="Aptos" pitchFamily="34" charset="-120"/>
               </a:rPr>
-              <a:t>© Paula Soper</a:t>
+              <a:t>Â© Paula Soper</a:t>
             </a:r>
             <a:endParaRPr lang="en-US" sz="800" dirty="0"/>
           </a:p>
@@ -11075,8 +11779,47 @@
         </p:nvSpPr>
         <p:spPr>
           <a:xfrm>
+            <a:off x="11137392" y="6510528"/>
+            <a:ext cx="411480" cy="201168"/>
+          </a:xfrm>
+          <a:prstGeom prst="rect">
+            <a:avLst/>
+          </a:prstGeom>
+          <a:noFill/>
+          <a:ln/>
+        </p:spPr>
+        <p:txBody>
+          <a:bodyPr wrap="square" lIns="0" tIns="0" rIns="0" bIns="0" rtlCol="0" anchor="ctr"/>
+          <a:lstStyle/>
+          <a:p>
+            <a:pPr algn="r" indent="0" marL="0">
+              <a:buNone/>
+            </a:pPr>
+            <a:r>
+              <a:rPr lang="en-US" sz="900" dirty="0">
+                <a:solidFill>
+                  <a:srgbClr val="5F7181"/>
+                </a:solidFill>
+                <a:latin typeface="Aptos" pitchFamily="34" charset="0"/>
+                <a:ea typeface="Aptos" pitchFamily="34" charset="-122"/>
+                <a:cs typeface="Aptos" pitchFamily="34" charset="-120"/>
+              </a:rPr>
+              <a:t>23</a:t>
+            </a:r>
+            <a:endParaRPr lang="en-US" sz="900" dirty="0"/>
+          </a:p>
+        </p:txBody>
+      </p:sp>
+      <p:sp>
+        <p:nvSpPr>
+          <p:cNvPr id="8" name="Text 6"/>
+          <p:cNvSpPr/>
+          <p:nvPr/>
+        </p:nvSpPr>
+        <p:spPr>
+          <a:xfrm>
             <a:off x="640080" y="658368"/>
-            <a:ext cx="10881360" cy="566928"/>
+            <a:ext cx="10881360" cy="713232"/>
           </a:xfrm>
           <a:prstGeom prst="rect">
             <a:avLst/>
@@ -11094,7 +11837,7 @@
               <a:buNone/>
             </a:pPr>
             <a:r>
-              <a:rPr lang="en-US" sz="2700" b="1" dirty="0">
+              <a:rPr lang="en-US" sz="3400" b="1" dirty="0">
                 <a:solidFill>
                   <a:srgbClr val="003A63"/>
                 </a:solidFill>
@@ -11104,20 +11847,20 @@
               </a:rPr>
               <a:t>References and Resources Continued</a:t>
             </a:r>
-            <a:endParaRPr lang="en-US" sz="2700" dirty="0"/>
-          </a:p>
-        </p:txBody>
-      </p:sp>
-      <p:sp>
-        <p:nvSpPr>
-          <p:cNvPr id="8" name="Text 6"/>
-          <p:cNvSpPr/>
-          <p:nvPr/>
-        </p:nvSpPr>
-        <p:spPr>
-          <a:xfrm>
-            <a:off x="868680" y="1417320"/>
-            <a:ext cx="6675120" cy="4434840"/>
+            <a:endParaRPr lang="en-US" sz="3400" dirty="0"/>
+          </a:p>
+        </p:txBody>
+      </p:sp>
+      <p:sp>
+        <p:nvSpPr>
+          <p:cNvPr id="9" name="Text 7"/>
+          <p:cNvSpPr/>
+          <p:nvPr/>
+        </p:nvSpPr>
+        <p:spPr>
+          <a:xfrm>
+            <a:off x="868680" y="1508760"/>
+            <a:ext cx="6537960" cy="4160520"/>
           </a:xfrm>
           <a:prstGeom prst="rect">
             <a:avLst/>
@@ -11132,7 +11875,7 @@
           <a:lstStyle/>
           <a:p>
             <a:r>
-              <a:rPr lang="en-US" sz="1700" dirty="0">
+              <a:rPr lang="en-US" sz="2100" dirty="0">
                 <a:solidFill>
                   <a:srgbClr val="17364A"/>
                 </a:solidFill>
@@ -11142,13 +11885,13 @@
               </a:rPr>
               <a:t>Relevant public health program SOPs, data governance documentation, and implementation plans</a:t>
             </a:r>
-            <a:endParaRPr lang="en-US" sz="1700" dirty="0"/>
-          </a:p>
-        </p:txBody>
-      </p:sp>
-      <p:sp>
-        <p:nvSpPr>
-          <p:cNvPr id="9" name="Shape 7"/>
+            <a:endParaRPr lang="en-US" sz="2100" dirty="0"/>
+          </a:p>
+        </p:txBody>
+      </p:sp>
+      <p:sp>
+        <p:nvSpPr>
+          <p:cNvPr id="10" name="Shape 8"/>
           <p:cNvSpPr/>
           <p:nvPr/>
         </p:nvSpPr>
@@ -11175,14 +11918,14 @@
       </p:sp>
       <p:sp>
         <p:nvSpPr>
-          <p:cNvPr id="10" name="Text 8"/>
+          <p:cNvPr id="11" name="Text 9"/>
           <p:cNvSpPr/>
           <p:nvPr/>
         </p:nvSpPr>
         <p:spPr>
           <a:xfrm>
             <a:off x="8074152" y="1563624"/>
-            <a:ext cx="2825496" cy="201168"/>
+            <a:ext cx="2825496" cy="256032"/>
           </a:xfrm>
           <a:prstGeom prst="rect">
             <a:avLst/>
@@ -11198,7 +11941,7 @@
               <a:buNone/>
             </a:pPr>
             <a:r>
-              <a:rPr lang="en-US" sz="950" b="1" dirty="0">
+              <a:rPr lang="en-US" sz="1300" b="1" dirty="0">
                 <a:solidFill>
                   <a:srgbClr val="0068B7"/>
                 </a:solidFill>
@@ -11208,20 +11951,20 @@
               </a:rPr>
               <a:t>Key idea</a:t>
             </a:r>
-            <a:endParaRPr lang="en-US" sz="950" dirty="0"/>
-          </a:p>
-        </p:txBody>
-      </p:sp>
-      <p:sp>
-        <p:nvSpPr>
-          <p:cNvPr id="11" name="Text 9"/>
-          <p:cNvSpPr/>
-          <p:nvPr/>
-        </p:nvSpPr>
-        <p:spPr>
-          <a:xfrm>
-            <a:off x="8074152" y="1856232"/>
-            <a:ext cx="2825496" cy="1261872"/>
+            <a:endParaRPr lang="en-US" sz="1300" dirty="0"/>
+          </a:p>
+        </p:txBody>
+      </p:sp>
+      <p:sp>
+        <p:nvSpPr>
+          <p:cNvPr id="12" name="Text 10"/>
+          <p:cNvSpPr/>
+          <p:nvPr/>
+        </p:nvSpPr>
+        <p:spPr>
+          <a:xfrm>
+            <a:off x="8074152" y="1920240"/>
+            <a:ext cx="2825496" cy="1188720"/>
           </a:xfrm>
           <a:prstGeom prst="rect">
             <a:avLst/>
@@ -11239,7 +11982,7 @@
               <a:buNone/>
             </a:pPr>
             <a:r>
-              <a:rPr lang="en-US" sz="1250" dirty="0">
+              <a:rPr lang="en-US" sz="1550" dirty="0">
                 <a:solidFill>
                   <a:srgbClr val="17364A"/>
                 </a:solidFill>
@@ -11249,13 +11992,13 @@
               </a:rPr>
               <a:t>Relevant public health program SOPs, data governance documentation, and implementation plans</a:t>
             </a:r>
-            <a:endParaRPr lang="en-US" sz="1250" dirty="0"/>
-          </a:p>
-        </p:txBody>
-      </p:sp>
-      <p:sp>
-        <p:nvSpPr>
-          <p:cNvPr id="12" name="Shape 10"/>
+            <a:endParaRPr lang="en-US" sz="1550" dirty="0"/>
+          </a:p>
+        </p:txBody>
+      </p:sp>
+      <p:sp>
+        <p:nvSpPr>
+          <p:cNvPr id="13" name="Shape 11"/>
           <p:cNvSpPr/>
           <p:nvPr/>
         </p:nvSpPr>
@@ -11282,14 +12025,14 @@
       </p:sp>
       <p:sp>
         <p:nvSpPr>
-          <p:cNvPr id="13" name="Text 11"/>
+          <p:cNvPr id="14" name="Text 12"/>
           <p:cNvSpPr/>
           <p:nvPr/>
         </p:nvSpPr>
         <p:spPr>
           <a:xfrm>
             <a:off x="8074152" y="3666744"/>
-            <a:ext cx="2825496" cy="201168"/>
+            <a:ext cx="2825496" cy="256032"/>
           </a:xfrm>
           <a:prstGeom prst="rect">
             <a:avLst/>
@@ -11305,7 +12048,7 @@
               <a:buNone/>
             </a:pPr>
             <a:r>
-              <a:rPr lang="en-US" sz="950" b="1" dirty="0">
+              <a:rPr lang="en-US" sz="1300" b="1" dirty="0">
                 <a:solidFill>
                   <a:srgbClr val="0068B7"/>
                 </a:solidFill>
@@ -11315,20 +12058,20 @@
               </a:rPr>
               <a:t>Use this for</a:t>
             </a:r>
-            <a:endParaRPr lang="en-US" sz="950" dirty="0"/>
-          </a:p>
-        </p:txBody>
-      </p:sp>
-      <p:sp>
-        <p:nvSpPr>
-          <p:cNvPr id="14" name="Text 12"/>
-          <p:cNvSpPr/>
-          <p:nvPr/>
-        </p:nvSpPr>
-        <p:spPr>
-          <a:xfrm>
-            <a:off x="8074152" y="3959352"/>
-            <a:ext cx="2825496" cy="1170432"/>
+            <a:endParaRPr lang="en-US" sz="1300" dirty="0"/>
+          </a:p>
+        </p:txBody>
+      </p:sp>
+      <p:sp>
+        <p:nvSpPr>
+          <p:cNvPr id="15" name="Text 13"/>
+          <p:cNvSpPr/>
+          <p:nvPr/>
+        </p:nvSpPr>
+        <p:spPr>
+          <a:xfrm>
+            <a:off x="8074152" y="4023360"/>
+            <a:ext cx="2825496" cy="1097280"/>
           </a:xfrm>
           <a:prstGeom prst="rect">
             <a:avLst/>
@@ -11346,7 +12089,7 @@
               <a:buNone/>
             </a:pPr>
             <a:r>
-              <a:rPr lang="en-US" sz="1250" dirty="0">
+              <a:rPr lang="en-US" sz="1550" dirty="0">
                 <a:solidFill>
                   <a:srgbClr val="17364A"/>
                 </a:solidFill>
@@ -11356,7 +12099,7 @@
               </a:rPr>
               <a:t>Connect the concept to public health decisions, safeguards, documentation, or implementation work.</a:t>
             </a:r>
-            <a:endParaRPr lang="en-US" sz="1250" dirty="0"/>
+            <a:endParaRPr lang="en-US" sz="1550" dirty="0"/>
           </a:p>
         </p:txBody>
       </p:sp>
@@ -11553,7 +12296,7 @@
                 <a:ea typeface="Aptos" pitchFamily="34" charset="-122"/>
                 <a:cs typeface="Aptos" pitchFamily="34" charset="-120"/>
               </a:rPr>
-              <a:t>© Paula Soper</a:t>
+              <a:t>Â© Paula Soper</a:t>
             </a:r>
             <a:endParaRPr lang="en-US" sz="800" dirty="0"/>
           </a:p>
@@ -11567,8 +12310,47 @@
         </p:nvSpPr>
         <p:spPr>
           <a:xfrm>
+            <a:off x="11137392" y="6510528"/>
+            <a:ext cx="411480" cy="201168"/>
+          </a:xfrm>
+          <a:prstGeom prst="rect">
+            <a:avLst/>
+          </a:prstGeom>
+          <a:noFill/>
+          <a:ln/>
+        </p:spPr>
+        <p:txBody>
+          <a:bodyPr wrap="square" lIns="0" tIns="0" rIns="0" bIns="0" rtlCol="0" anchor="ctr"/>
+          <a:lstStyle/>
+          <a:p>
+            <a:pPr algn="r" indent="0" marL="0">
+              <a:buNone/>
+            </a:pPr>
+            <a:r>
+              <a:rPr lang="en-US" sz="900" dirty="0">
+                <a:solidFill>
+                  <a:srgbClr val="5F7181"/>
+                </a:solidFill>
+                <a:latin typeface="Aptos" pitchFamily="34" charset="0"/>
+                <a:ea typeface="Aptos" pitchFamily="34" charset="-122"/>
+                <a:cs typeface="Aptos" pitchFamily="34" charset="-120"/>
+              </a:rPr>
+              <a:t>3</a:t>
+            </a:r>
+            <a:endParaRPr lang="en-US" sz="900" dirty="0"/>
+          </a:p>
+        </p:txBody>
+      </p:sp>
+      <p:sp>
+        <p:nvSpPr>
+          <p:cNvPr id="8" name="Text 6"/>
+          <p:cNvSpPr/>
+          <p:nvPr/>
+        </p:nvSpPr>
+        <p:spPr>
+          <a:xfrm>
             <a:off x="640080" y="658368"/>
-            <a:ext cx="10881360" cy="566928"/>
+            <a:ext cx="10881360" cy="713232"/>
           </a:xfrm>
           <a:prstGeom prst="rect">
             <a:avLst/>
@@ -11586,7 +12368,7 @@
               <a:buNone/>
             </a:pPr>
             <a:r>
-              <a:rPr lang="en-US" sz="2700" b="1" dirty="0">
+              <a:rPr lang="en-US" sz="3400" b="1" dirty="0">
                 <a:solidFill>
                   <a:srgbClr val="003A63"/>
                 </a:solidFill>
@@ -11596,20 +12378,20 @@
               </a:rPr>
               <a:t>How this module connects to the playbook</a:t>
             </a:r>
-            <a:endParaRPr lang="en-US" sz="2700" dirty="0"/>
-          </a:p>
-        </p:txBody>
-      </p:sp>
-      <p:sp>
-        <p:nvSpPr>
-          <p:cNvPr id="8" name="Text 6"/>
-          <p:cNvSpPr/>
-          <p:nvPr/>
-        </p:nvSpPr>
-        <p:spPr>
-          <a:xfrm>
-            <a:off x="868680" y="1417320"/>
-            <a:ext cx="6903720" cy="4480560"/>
+            <a:endParaRPr lang="en-US" sz="3400" dirty="0"/>
+          </a:p>
+        </p:txBody>
+      </p:sp>
+      <p:sp>
+        <p:nvSpPr>
+          <p:cNvPr id="9" name="Text 7"/>
+          <p:cNvSpPr/>
+          <p:nvPr/>
+        </p:nvSpPr>
+        <p:spPr>
+          <a:xfrm>
+            <a:off x="868680" y="1508760"/>
+            <a:ext cx="6812280" cy="3977640"/>
           </a:xfrm>
           <a:prstGeom prst="rect">
             <a:avLst/>
@@ -11624,7 +12406,7 @@
           <a:lstStyle/>
           <a:p>
             <a:r>
-              <a:rPr lang="en-US" sz="1540" dirty="0">
+              <a:rPr lang="en-US" sz="1900" dirty="0">
                 <a:solidFill>
                   <a:srgbClr val="17364A"/>
                 </a:solidFill>
@@ -11632,13 +12414,13 @@
                 <a:ea typeface="Aptos" pitchFamily="34" charset="-122"/>
                 <a:cs typeface="Aptos" pitchFamily="34" charset="-120"/>
               </a:rPr>
-              <a:t>Play 12: Execute Governance and Oversight - This lesson informs Play 12 by helping learners connect the lesson topic to execute.</a:t>
-            </a:r>
-            <a:endParaRPr lang="en-US" sz="1540" dirty="0"/>
-          </a:p>
-          <a:p>
-            <a:r>
-              <a:rPr lang="en-US" sz="1540" dirty="0">
+              <a:t>Play 12: Execute Governance and Oversight - This lesson informs Play 12 by helping learners connect the.</a:t>
+            </a:r>
+            <a:endParaRPr lang="en-US" sz="1900" dirty="0"/>
+          </a:p>
+          <a:p>
+            <a:r>
+              <a:rPr lang="en-US" sz="1900" dirty="0">
                 <a:solidFill>
                   <a:srgbClr val="17364A"/>
                 </a:solidFill>
@@ -11646,13 +12428,13 @@
                 <a:ea typeface="Aptos" pitchFamily="34" charset="-122"/>
                 <a:cs typeface="Aptos" pitchFamily="34" charset="-120"/>
               </a:rPr>
-              <a:t>Play 3: Establish AI Governance - This lesson informs Play 3 by helping learners connect the lesson topic to establish ai governance.</a:t>
-            </a:r>
-            <a:endParaRPr lang="en-US" sz="1540" dirty="0"/>
-          </a:p>
-          <a:p>
-            <a:r>
-              <a:rPr lang="en-US" sz="1540" dirty="0">
+              <a:t>Play 3: Establish AI Governance - This lesson informs Play 3 by helping learners connect the lesson topic to.</a:t>
+            </a:r>
+            <a:endParaRPr lang="en-US" sz="1900" dirty="0"/>
+          </a:p>
+          <a:p>
+            <a:r>
+              <a:rPr lang="en-US" sz="1900" dirty="0">
                 <a:solidFill>
                   <a:srgbClr val="17364A"/>
                 </a:solidFill>
@@ -11660,13 +12442,13 @@
                 <a:ea typeface="Aptos" pitchFamily="34" charset="-122"/>
                 <a:cs typeface="Aptos" pitchFamily="34" charset="-120"/>
               </a:rPr>
-              <a:t>Play 11: Build and Deploy AI Solutions - This lesson informs Play 11 by helping learners connect the lesson topic to build and deploy.</a:t>
-            </a:r>
-            <a:endParaRPr lang="en-US" sz="1540" dirty="0"/>
-          </a:p>
-          <a:p>
-            <a:r>
-              <a:rPr lang="en-US" sz="1540" dirty="0">
+              <a:t>Play 11: Build and Deploy AI Solutions - This lesson informs Play 11 by helping learners connect the lesson.</a:t>
+            </a:r>
+            <a:endParaRPr lang="en-US" sz="1900" dirty="0"/>
+          </a:p>
+          <a:p>
+            <a:r>
+              <a:rPr lang="en-US" sz="1900" dirty="0">
                 <a:solidFill>
                   <a:srgbClr val="17364A"/>
                 </a:solidFill>
@@ -11674,15 +12456,15 @@
                 <a:ea typeface="Aptos" pitchFamily="34" charset="-122"/>
                 <a:cs typeface="Aptos" pitchFamily="34" charset="-120"/>
               </a:rPr>
-              <a:t>Play 13: Monitor and Evaluate AI Systems - This lesson informs Play 13 by helping learners connect the lesson topic to monitor and.</a:t>
-            </a:r>
-            <a:endParaRPr lang="en-US" sz="1540" dirty="0"/>
-          </a:p>
-        </p:txBody>
-      </p:sp>
-      <p:sp>
-        <p:nvSpPr>
-          <p:cNvPr id="9" name="Shape 7"/>
+              <a:t>Play 13: Monitor and Evaluate AI Systems - This lesson informs Play 13 by helping learners connect the.</a:t>
+            </a:r>
+            <a:endParaRPr lang="en-US" sz="1900" dirty="0"/>
+          </a:p>
+        </p:txBody>
+      </p:sp>
+      <p:sp>
+        <p:nvSpPr>
+          <p:cNvPr id="10" name="Shape 8"/>
           <p:cNvSpPr/>
           <p:nvPr/>
         </p:nvSpPr>
@@ -11709,14 +12491,14 @@
       </p:sp>
       <p:sp>
         <p:nvSpPr>
-          <p:cNvPr id="10" name="Text 8"/>
+          <p:cNvPr id="11" name="Text 9"/>
           <p:cNvSpPr/>
           <p:nvPr/>
         </p:nvSpPr>
         <p:spPr>
           <a:xfrm>
             <a:off x="8211312" y="1563624"/>
-            <a:ext cx="2734056" cy="201168"/>
+            <a:ext cx="2734056" cy="256032"/>
           </a:xfrm>
           <a:prstGeom prst="rect">
             <a:avLst/>
@@ -11732,7 +12514,7 @@
               <a:buNone/>
             </a:pPr>
             <a:r>
-              <a:rPr lang="en-US" sz="950" b="1" dirty="0">
+              <a:rPr lang="en-US" sz="1300" b="1" dirty="0">
                 <a:solidFill>
                   <a:srgbClr val="0068B7"/>
                 </a:solidFill>
@@ -11742,20 +12524,20 @@
               </a:rPr>
               <a:t>Apply the lesson</a:t>
             </a:r>
-            <a:endParaRPr lang="en-US" sz="950" dirty="0"/>
-          </a:p>
-        </p:txBody>
-      </p:sp>
-      <p:sp>
-        <p:nvSpPr>
-          <p:cNvPr id="11" name="Text 9"/>
-          <p:cNvSpPr/>
-          <p:nvPr/>
-        </p:nvSpPr>
-        <p:spPr>
-          <a:xfrm>
-            <a:off x="8211312" y="1856232"/>
-            <a:ext cx="2734056" cy="1536192"/>
+            <a:endParaRPr lang="en-US" sz="1300" dirty="0"/>
+          </a:p>
+        </p:txBody>
+      </p:sp>
+      <p:sp>
+        <p:nvSpPr>
+          <p:cNvPr id="12" name="Text 10"/>
+          <p:cNvSpPr/>
+          <p:nvPr/>
+        </p:nvSpPr>
+        <p:spPr>
+          <a:xfrm>
+            <a:off x="8211312" y="1920240"/>
+            <a:ext cx="2734056" cy="1463040"/>
           </a:xfrm>
           <a:prstGeom prst="rect">
             <a:avLst/>
@@ -11773,7 +12555,7 @@
               <a:buNone/>
             </a:pPr>
             <a:r>
-              <a:rPr lang="en-US" sz="1250" dirty="0">
+              <a:rPr lang="en-US" sz="1550" dirty="0">
                 <a:solidFill>
                   <a:srgbClr val="17364A"/>
                 </a:solidFill>
@@ -11783,32 +12565,32 @@
               </a:rPr>
               <a:t>Use the related plays to identify decisions, participants, timing, approvals, and documentation needed for responsible implementation.</a:t>
             </a:r>
-            <a:endParaRPr lang="en-US" sz="1250" dirty="0"/>
-          </a:p>
-        </p:txBody>
-      </p:sp>
-      <p:sp>
-        <p:nvSpPr>
-          <p:cNvPr id="12" name="Shape 10"/>
-          <p:cNvSpPr/>
-          <p:nvPr/>
-        </p:nvSpPr>
-        <p:spPr>
-          <a:xfrm>
-            <a:off x="8046720" y="3794760"/>
-            <a:ext cx="3063240" cy="1508760"/>
+            <a:endParaRPr lang="en-US" sz="1550" dirty="0"/>
+          </a:p>
+        </p:txBody>
+      </p:sp>
+      <p:sp>
+        <p:nvSpPr>
+          <p:cNvPr id="13" name="Shape 11"/>
+          <p:cNvSpPr/>
+          <p:nvPr/>
+        </p:nvSpPr>
+        <p:spPr>
+          <a:xfrm>
+            <a:off x="7818120" y="3977640"/>
+            <a:ext cx="972312" cy="749808"/>
           </a:xfrm>
           <a:prstGeom prst="roundRect">
             <a:avLst>
-              <a:gd name="adj" fmla="val 7273"/>
+              <a:gd name="adj" fmla="val 14634"/>
             </a:avLst>
           </a:prstGeom>
           <a:solidFill>
-            <a:srgbClr val="FFF4D9"/>
+            <a:srgbClr val="0068B7"/>
           </a:solidFill>
           <a:ln w="12700">
             <a:solidFill>
-              <a:srgbClr val="B9D7E6"/>
+              <a:srgbClr val="0068B7"/>
             </a:solidFill>
             <a:prstDash val="solid"/>
           </a:ln>
@@ -11816,81 +12598,256 @@
       </p:sp>
       <p:sp>
         <p:nvSpPr>
-          <p:cNvPr id="13" name="Text 11"/>
-          <p:cNvSpPr/>
-          <p:nvPr/>
-        </p:nvSpPr>
-        <p:spPr>
-          <a:xfrm>
-            <a:off x="8211312" y="3941064"/>
-            <a:ext cx="2734056" cy="201168"/>
-          </a:xfrm>
-          <a:prstGeom prst="rect">
-            <a:avLst/>
-          </a:prstGeom>
-          <a:noFill/>
-          <a:ln/>
-        </p:spPr>
-        <p:txBody>
-          <a:bodyPr wrap="square" lIns="0" tIns="0" rIns="0" bIns="0" rtlCol="0" anchor="ctr"/>
-          <a:lstStyle/>
-          <a:p>
-            <a:pPr indent="0" marL="0">
-              <a:buNone/>
-            </a:pPr>
-            <a:r>
-              <a:rPr lang="en-US" sz="950" b="1" dirty="0">
-                <a:solidFill>
-                  <a:srgbClr val="0068B7"/>
-                </a:solidFill>
-                <a:latin typeface="Aptos" pitchFamily="34" charset="0"/>
-                <a:ea typeface="Aptos" pitchFamily="34" charset="-122"/>
-                <a:cs typeface="Aptos" pitchFamily="34" charset="-120"/>
-              </a:rPr>
-              <a:t>Keep in mind</a:t>
-            </a:r>
-            <a:endParaRPr lang="en-US" sz="950" dirty="0"/>
-          </a:p>
-        </p:txBody>
-      </p:sp>
-      <p:sp>
-        <p:nvSpPr>
           <p:cNvPr id="14" name="Text 12"/>
           <p:cNvSpPr/>
           <p:nvPr/>
         </p:nvSpPr>
         <p:spPr>
           <a:xfrm>
-            <a:off x="8211312" y="4233672"/>
-            <a:ext cx="2734056" cy="941832"/>
-          </a:xfrm>
-          <a:prstGeom prst="rect">
-            <a:avLst/>
-          </a:prstGeom>
-          <a:noFill/>
-          <a:ln/>
-        </p:spPr>
-        <p:txBody>
-          <a:bodyPr wrap="square" lIns="0" tIns="0" rIns="0" bIns="0" rtlCol="0" anchor="t">
+            <a:off x="7891272" y="4169664"/>
+            <a:ext cx="826008" cy="310896"/>
+          </a:xfrm>
+          <a:prstGeom prst="rect">
+            <a:avLst/>
+          </a:prstGeom>
+          <a:noFill/>
+          <a:ln/>
+        </p:spPr>
+        <p:txBody>
+          <a:bodyPr wrap="square" lIns="0" tIns="0" rIns="0" bIns="0" rtlCol="0" anchor="ctr">
             <a:normAutofit/>
           </a:bodyPr>
           <a:lstStyle/>
           <a:p>
-            <a:pPr indent="0" marL="0">
-              <a:buNone/>
-            </a:pPr>
-            <a:r>
-              <a:rPr lang="en-US" sz="1250" dirty="0">
-                <a:solidFill>
-                  <a:srgbClr val="17364A"/>
-                </a:solidFill>
-                <a:latin typeface="Aptos" pitchFamily="34" charset="0"/>
-                <a:ea typeface="Aptos" pitchFamily="34" charset="-122"/>
-                <a:cs typeface="Aptos" pitchFamily="34" charset="-120"/>
-              </a:rPr>
-              <a:t>The playbook connection helps turn training into agency work, not just individual knowledge.</a:t>
-            </a:r>
-            <a:endParaRPr lang="en-US" sz="1250" dirty="0"/>
+            <a:pPr algn="ctr" indent="0" marL="0">
+              <a:buNone/>
+            </a:pPr>
+            <a:r>
+              <a:rPr lang="en-US" sz="1500" b="1" dirty="0">
+                <a:solidFill>
+                  <a:srgbClr val="FFFFFF"/>
+                </a:solidFill>
+                <a:latin typeface="Aptos" pitchFamily="34" charset="0"/>
+                <a:ea typeface="Aptos" pitchFamily="34" charset="-122"/>
+                <a:cs typeface="Aptos" pitchFamily="34" charset="-120"/>
+              </a:rPr>
+              <a:t>Lesson</a:t>
+            </a:r>
+            <a:endParaRPr lang="en-US" sz="1500" dirty="0"/>
+          </a:p>
+        </p:txBody>
+      </p:sp>
+      <p:sp>
+        <p:nvSpPr>
+          <p:cNvPr id="15" name="Text 13"/>
+          <p:cNvSpPr/>
+          <p:nvPr/>
+        </p:nvSpPr>
+        <p:spPr>
+          <a:xfrm>
+            <a:off x="8817864" y="4187952"/>
+            <a:ext cx="201168" cy="256032"/>
+          </a:xfrm>
+          <a:prstGeom prst="rect">
+            <a:avLst/>
+          </a:prstGeom>
+          <a:noFill/>
+          <a:ln/>
+        </p:spPr>
+        <p:txBody>
+          <a:bodyPr wrap="square" lIns="0" tIns="0" rIns="0" bIns="0" rtlCol="0" anchor="ctr"/>
+          <a:lstStyle/>
+          <a:p>
+            <a:pPr algn="ctr" indent="0" marL="0">
+              <a:buNone/>
+            </a:pPr>
+            <a:r>
+              <a:rPr lang="en-US" sz="1800" b="1" dirty="0">
+                <a:solidFill>
+                  <a:srgbClr val="0068B7"/>
+                </a:solidFill>
+                <a:latin typeface="Aptos" pitchFamily="34" charset="0"/>
+                <a:ea typeface="Aptos" pitchFamily="34" charset="-122"/>
+                <a:cs typeface="Aptos" pitchFamily="34" charset="-120"/>
+              </a:rPr>
+              <a:t>â†’</a:t>
+            </a:r>
+            <a:endParaRPr lang="en-US" sz="1800" dirty="0"/>
+          </a:p>
+        </p:txBody>
+      </p:sp>
+      <p:sp>
+        <p:nvSpPr>
+          <p:cNvPr id="16" name="Shape 14"/>
+          <p:cNvSpPr/>
+          <p:nvPr/>
+        </p:nvSpPr>
+        <p:spPr>
+          <a:xfrm>
+            <a:off x="9046464" y="3977640"/>
+            <a:ext cx="972312" cy="749808"/>
+          </a:xfrm>
+          <a:prstGeom prst="roundRect">
+            <a:avLst>
+              <a:gd name="adj" fmla="val 14634"/>
+            </a:avLst>
+          </a:prstGeom>
+          <a:solidFill>
+            <a:srgbClr val="2F8A28"/>
+          </a:solidFill>
+          <a:ln w="12700">
+            <a:solidFill>
+              <a:srgbClr val="2F8A28"/>
+            </a:solidFill>
+            <a:prstDash val="solid"/>
+          </a:ln>
+        </p:spPr>
+      </p:sp>
+      <p:sp>
+        <p:nvSpPr>
+          <p:cNvPr id="17" name="Text 15"/>
+          <p:cNvSpPr/>
+          <p:nvPr/>
+        </p:nvSpPr>
+        <p:spPr>
+          <a:xfrm>
+            <a:off x="9119616" y="4169664"/>
+            <a:ext cx="826008" cy="310896"/>
+          </a:xfrm>
+          <a:prstGeom prst="rect">
+            <a:avLst/>
+          </a:prstGeom>
+          <a:noFill/>
+          <a:ln/>
+        </p:spPr>
+        <p:txBody>
+          <a:bodyPr wrap="square" lIns="0" tIns="0" rIns="0" bIns="0" rtlCol="0" anchor="ctr">
+            <a:normAutofit/>
+          </a:bodyPr>
+          <a:lstStyle/>
+          <a:p>
+            <a:pPr algn="ctr" indent="0" marL="0">
+              <a:buNone/>
+            </a:pPr>
+            <a:r>
+              <a:rPr lang="en-US" sz="1500" b="1" dirty="0">
+                <a:solidFill>
+                  <a:srgbClr val="FFFFFF"/>
+                </a:solidFill>
+                <a:latin typeface="Aptos" pitchFamily="34" charset="0"/>
+                <a:ea typeface="Aptos" pitchFamily="34" charset="-122"/>
+                <a:cs typeface="Aptos" pitchFamily="34" charset="-120"/>
+              </a:rPr>
+              <a:t>Plays</a:t>
+            </a:r>
+            <a:endParaRPr lang="en-US" sz="1500" dirty="0"/>
+          </a:p>
+        </p:txBody>
+      </p:sp>
+      <p:sp>
+        <p:nvSpPr>
+          <p:cNvPr id="18" name="Text 16"/>
+          <p:cNvSpPr/>
+          <p:nvPr/>
+        </p:nvSpPr>
+        <p:spPr>
+          <a:xfrm>
+            <a:off x="10046208" y="4187952"/>
+            <a:ext cx="201168" cy="256032"/>
+          </a:xfrm>
+          <a:prstGeom prst="rect">
+            <a:avLst/>
+          </a:prstGeom>
+          <a:noFill/>
+          <a:ln/>
+        </p:spPr>
+        <p:txBody>
+          <a:bodyPr wrap="square" lIns="0" tIns="0" rIns="0" bIns="0" rtlCol="0" anchor="ctr"/>
+          <a:lstStyle/>
+          <a:p>
+            <a:pPr algn="ctr" indent="0" marL="0">
+              <a:buNone/>
+            </a:pPr>
+            <a:r>
+              <a:rPr lang="en-US" sz="1800" b="1" dirty="0">
+                <a:solidFill>
+                  <a:srgbClr val="0068B7"/>
+                </a:solidFill>
+                <a:latin typeface="Aptos" pitchFamily="34" charset="0"/>
+                <a:ea typeface="Aptos" pitchFamily="34" charset="-122"/>
+                <a:cs typeface="Aptos" pitchFamily="34" charset="-120"/>
+              </a:rPr>
+              <a:t>â†’</a:t>
+            </a:r>
+            <a:endParaRPr lang="en-US" sz="1800" dirty="0"/>
+          </a:p>
+        </p:txBody>
+      </p:sp>
+      <p:sp>
+        <p:nvSpPr>
+          <p:cNvPr id="19" name="Shape 17"/>
+          <p:cNvSpPr/>
+          <p:nvPr/>
+        </p:nvSpPr>
+        <p:spPr>
+          <a:xfrm>
+            <a:off x="10274808" y="3977640"/>
+            <a:ext cx="972312" cy="749808"/>
+          </a:xfrm>
+          <a:prstGeom prst="roundRect">
+            <a:avLst>
+              <a:gd name="adj" fmla="val 14634"/>
+            </a:avLst>
+          </a:prstGeom>
+          <a:solidFill>
+            <a:srgbClr val="6A4CA3"/>
+          </a:solidFill>
+          <a:ln w="12700">
+            <a:solidFill>
+              <a:srgbClr val="6A4CA3"/>
+            </a:solidFill>
+            <a:prstDash val="solid"/>
+          </a:ln>
+        </p:spPr>
+      </p:sp>
+      <p:sp>
+        <p:nvSpPr>
+          <p:cNvPr id="20" name="Text 18"/>
+          <p:cNvSpPr/>
+          <p:nvPr/>
+        </p:nvSpPr>
+        <p:spPr>
+          <a:xfrm>
+            <a:off x="10347960" y="4169664"/>
+            <a:ext cx="826008" cy="310896"/>
+          </a:xfrm>
+          <a:prstGeom prst="rect">
+            <a:avLst/>
+          </a:prstGeom>
+          <a:noFill/>
+          <a:ln/>
+        </p:spPr>
+        <p:txBody>
+          <a:bodyPr wrap="square" lIns="0" tIns="0" rIns="0" bIns="0" rtlCol="0" anchor="ctr">
+            <a:normAutofit/>
+          </a:bodyPr>
+          <a:lstStyle/>
+          <a:p>
+            <a:pPr algn="ctr" indent="0" marL="0">
+              <a:buNone/>
+            </a:pPr>
+            <a:r>
+              <a:rPr lang="en-US" sz="1500" b="1" dirty="0">
+                <a:solidFill>
+                  <a:srgbClr val="FFFFFF"/>
+                </a:solidFill>
+                <a:latin typeface="Aptos" pitchFamily="34" charset="0"/>
+                <a:ea typeface="Aptos" pitchFamily="34" charset="-122"/>
+                <a:cs typeface="Aptos" pitchFamily="34" charset="-120"/>
+              </a:rPr>
+              <a:t>Action</a:t>
+            </a:r>
+            <a:endParaRPr lang="en-US" sz="1500" dirty="0"/>
           </a:p>
         </p:txBody>
       </p:sp>
@@ -12087,7 +13044,7 @@
                 <a:ea typeface="Aptos" pitchFamily="34" charset="-122"/>
                 <a:cs typeface="Aptos" pitchFamily="34" charset="-120"/>
               </a:rPr>
-              <a:t>© Paula Soper</a:t>
+              <a:t>Â© Paula Soper</a:t>
             </a:r>
             <a:endParaRPr lang="en-US" sz="800" dirty="0"/>
           </a:p>
@@ -12101,8 +13058,47 @@
         </p:nvSpPr>
         <p:spPr>
           <a:xfrm>
+            <a:off x="11137392" y="6510528"/>
+            <a:ext cx="411480" cy="201168"/>
+          </a:xfrm>
+          <a:prstGeom prst="rect">
+            <a:avLst/>
+          </a:prstGeom>
+          <a:noFill/>
+          <a:ln/>
+        </p:spPr>
+        <p:txBody>
+          <a:bodyPr wrap="square" lIns="0" tIns="0" rIns="0" bIns="0" rtlCol="0" anchor="ctr"/>
+          <a:lstStyle/>
+          <a:p>
+            <a:pPr algn="r" indent="0" marL="0">
+              <a:buNone/>
+            </a:pPr>
+            <a:r>
+              <a:rPr lang="en-US" sz="900" dirty="0">
+                <a:solidFill>
+                  <a:srgbClr val="5F7181"/>
+                </a:solidFill>
+                <a:latin typeface="Aptos" pitchFamily="34" charset="0"/>
+                <a:ea typeface="Aptos" pitchFamily="34" charset="-122"/>
+                <a:cs typeface="Aptos" pitchFamily="34" charset="-120"/>
+              </a:rPr>
+              <a:t>4</a:t>
+            </a:r>
+            <a:endParaRPr lang="en-US" sz="900" dirty="0"/>
+          </a:p>
+        </p:txBody>
+      </p:sp>
+      <p:sp>
+        <p:nvSpPr>
+          <p:cNvPr id="8" name="Text 6"/>
+          <p:cNvSpPr/>
+          <p:nvPr/>
+        </p:nvSpPr>
+        <p:spPr>
+          <a:xfrm>
             <a:off x="640080" y="658368"/>
-            <a:ext cx="10881360" cy="566928"/>
+            <a:ext cx="10881360" cy="713232"/>
           </a:xfrm>
           <a:prstGeom prst="rect">
             <a:avLst/>
@@ -12120,7 +13116,7 @@
               <a:buNone/>
             </a:pPr>
             <a:r>
-              <a:rPr lang="en-US" sz="2700" b="1" dirty="0">
+              <a:rPr lang="en-US" sz="3400" b="1" dirty="0">
                 <a:solidFill>
                   <a:srgbClr val="003A63"/>
                 </a:solidFill>
@@ -12130,20 +13126,20 @@
               </a:rPr>
               <a:t>Related toolkit resources</a:t>
             </a:r>
-            <a:endParaRPr lang="en-US" sz="2700" dirty="0"/>
-          </a:p>
-        </p:txBody>
-      </p:sp>
-      <p:sp>
-        <p:nvSpPr>
-          <p:cNvPr id="8" name="Text 6"/>
-          <p:cNvSpPr/>
-          <p:nvPr/>
-        </p:nvSpPr>
-        <p:spPr>
-          <a:xfrm>
-            <a:off x="868680" y="1417320"/>
-            <a:ext cx="6903720" cy="4480560"/>
+            <a:endParaRPr lang="en-US" sz="3400" dirty="0"/>
+          </a:p>
+        </p:txBody>
+      </p:sp>
+      <p:sp>
+        <p:nvSpPr>
+          <p:cNvPr id="9" name="Text 7"/>
+          <p:cNvSpPr/>
+          <p:nvPr/>
+        </p:nvSpPr>
+        <p:spPr>
+          <a:xfrm>
+            <a:off x="868680" y="1508760"/>
+            <a:ext cx="6812280" cy="3977640"/>
           </a:xfrm>
           <a:prstGeom prst="rect">
             <a:avLst/>
@@ -12158,7 +13154,7 @@
           <a:lstStyle/>
           <a:p>
             <a:r>
-              <a:rPr lang="en-US" sz="1460" dirty="0">
+              <a:rPr lang="en-US" sz="1850" dirty="0">
                 <a:solidFill>
                   <a:srgbClr val="17364A"/>
                 </a:solidFill>
@@ -12166,13 +13162,13 @@
                 <a:ea typeface="Aptos" pitchFamily="34" charset="-122"/>
                 <a:cs typeface="Aptos" pitchFamily="34" charset="-120"/>
               </a:rPr>
-              <a:t>Tool 16: Incident Response Checklist (Checklist) - Use this tool to complete or strengthen the practical exercise for the module.</a:t>
-            </a:r>
-            <a:endParaRPr lang="en-US" sz="1460" dirty="0"/>
-          </a:p>
-          <a:p>
-            <a:r>
-              <a:rPr lang="en-US" sz="1460" dirty="0">
+              <a:t>Tool 16: Incident Response Checklist (Checklist) - Use this tool to complete or strengthen the practical.</a:t>
+            </a:r>
+            <a:endParaRPr lang="en-US" sz="1850" dirty="0"/>
+          </a:p>
+          <a:p>
+            <a:r>
+              <a:rPr lang="en-US" sz="1850" dirty="0">
                 <a:solidFill>
                   <a:srgbClr val="17364A"/>
                 </a:solidFill>
@@ -12180,13 +13176,13 @@
                 <a:ea typeface="Aptos" pitchFamily="34" charset="-122"/>
                 <a:cs typeface="Aptos" pitchFamily="34" charset="-120"/>
               </a:rPr>
-              <a:t>Tool 17: Compliance Audit Checklist (Checklist) - Use this tool to complete or strengthen the practical exercise for the module using.</a:t>
-            </a:r>
-            <a:endParaRPr lang="en-US" sz="1460" dirty="0"/>
-          </a:p>
-          <a:p>
-            <a:r>
-              <a:rPr lang="en-US" sz="1460" dirty="0">
+              <a:t>Tool 17: Compliance Audit Checklist (Checklist) - Use this tool to complete or strengthen the practical.</a:t>
+            </a:r>
+            <a:endParaRPr lang="en-US" sz="1850" dirty="0"/>
+          </a:p>
+          <a:p>
+            <a:r>
+              <a:rPr lang="en-US" sz="1850" dirty="0">
                 <a:solidFill>
                   <a:srgbClr val="17364A"/>
                 </a:solidFill>
@@ -12194,13 +13190,13 @@
                 <a:ea typeface="Aptos" pitchFamily="34" charset="-122"/>
                 <a:cs typeface="Aptos" pitchFamily="34" charset="-120"/>
               </a:rPr>
-              <a:t>Tool 18: Policy Update &amp; Version Control Log (Log) - Use this tool to complete or strengthen the practical exercise for the module.</a:t>
-            </a:r>
-            <a:endParaRPr lang="en-US" sz="1460" dirty="0"/>
-          </a:p>
-          <a:p>
-            <a:r>
-              <a:rPr lang="en-US" sz="1460" dirty="0">
+              <a:t>Tool 18: Policy Update &amp; Version Control Log (Log) - Use this tool to complete or strengthen the practical.</a:t>
+            </a:r>
+            <a:endParaRPr lang="en-US" sz="1850" dirty="0"/>
+          </a:p>
+          <a:p>
+            <a:r>
+              <a:rPr lang="en-US" sz="1850" dirty="0">
                 <a:solidFill>
                   <a:srgbClr val="17364A"/>
                 </a:solidFill>
@@ -12208,29 +13204,15 @@
                 <a:ea typeface="Aptos" pitchFamily="34" charset="-122"/>
                 <a:cs typeface="Aptos" pitchFamily="34" charset="-120"/>
               </a:rPr>
-              <a:t>Tool 19: Plain-Language AI Public Notice Template (Template) - Use Plain-Language AI Public Notice Template to translate this lesson.</a:t>
-            </a:r>
-            <a:endParaRPr lang="en-US" sz="1460" dirty="0"/>
-          </a:p>
-          <a:p>
-            <a:r>
-              <a:rPr lang="en-US" sz="1460" dirty="0">
-                <a:solidFill>
-                  <a:srgbClr val="17364A"/>
-                </a:solidFill>
-                <a:latin typeface="Aptos" pitchFamily="34" charset="0"/>
-                <a:ea typeface="Aptos" pitchFamily="34" charset="-122"/>
-                <a:cs typeface="Aptos" pitchFamily="34" charset="-120"/>
-              </a:rPr>
-              <a:t>Tool 44: Performance Monitoring Dashboard (Dashboard) - Use this tool to complete or strengthen the practical exercise for the module.</a:t>
-            </a:r>
-            <a:endParaRPr lang="en-US" sz="1460" dirty="0"/>
-          </a:p>
-        </p:txBody>
-      </p:sp>
-      <p:sp>
-        <p:nvSpPr>
-          <p:cNvPr id="9" name="Shape 7"/>
+              <a:t>Tool 19: Plain-Language AI Public Notice Template (Template) - Use Plain-Language AI Public Notice Template.</a:t>
+            </a:r>
+            <a:endParaRPr lang="en-US" sz="1850" dirty="0"/>
+          </a:p>
+        </p:txBody>
+      </p:sp>
+      <p:sp>
+        <p:nvSpPr>
+          <p:cNvPr id="10" name="Shape 8"/>
           <p:cNvSpPr/>
           <p:nvPr/>
         </p:nvSpPr>
@@ -12257,14 +13239,14 @@
       </p:sp>
       <p:sp>
         <p:nvSpPr>
-          <p:cNvPr id="10" name="Text 8"/>
+          <p:cNvPr id="11" name="Text 9"/>
           <p:cNvSpPr/>
           <p:nvPr/>
         </p:nvSpPr>
         <p:spPr>
           <a:xfrm>
             <a:off x="8211312" y="1563624"/>
-            <a:ext cx="2734056" cy="201168"/>
+            <a:ext cx="2734056" cy="256032"/>
           </a:xfrm>
           <a:prstGeom prst="rect">
             <a:avLst/>
@@ -12280,7 +13262,7 @@
               <a:buNone/>
             </a:pPr>
             <a:r>
-              <a:rPr lang="en-US" sz="950" b="1" dirty="0">
+              <a:rPr lang="en-US" sz="1300" b="1" dirty="0">
                 <a:solidFill>
                   <a:srgbClr val="0068B7"/>
                 </a:solidFill>
@@ -12290,20 +13272,20 @@
               </a:rPr>
               <a:t>Use the tools</a:t>
             </a:r>
-            <a:endParaRPr lang="en-US" sz="950" dirty="0"/>
-          </a:p>
-        </p:txBody>
-      </p:sp>
-      <p:sp>
-        <p:nvSpPr>
-          <p:cNvPr id="11" name="Text 9"/>
-          <p:cNvSpPr/>
-          <p:nvPr/>
-        </p:nvSpPr>
-        <p:spPr>
-          <a:xfrm>
-            <a:off x="8211312" y="1856232"/>
-            <a:ext cx="2734056" cy="1536192"/>
+            <a:endParaRPr lang="en-US" sz="1300" dirty="0"/>
+          </a:p>
+        </p:txBody>
+      </p:sp>
+      <p:sp>
+        <p:nvSpPr>
+          <p:cNvPr id="12" name="Text 10"/>
+          <p:cNvSpPr/>
+          <p:nvPr/>
+        </p:nvSpPr>
+        <p:spPr>
+          <a:xfrm>
+            <a:off x="8211312" y="1920240"/>
+            <a:ext cx="2734056" cy="1463040"/>
           </a:xfrm>
           <a:prstGeom prst="rect">
             <a:avLst/>
@@ -12321,7 +13303,7 @@
               <a:buNone/>
             </a:pPr>
             <a:r>
-              <a:rPr lang="en-US" sz="1250" dirty="0">
+              <a:rPr lang="en-US" sz="1550" dirty="0">
                 <a:solidFill>
                   <a:srgbClr val="17364A"/>
                 </a:solidFill>
@@ -12331,32 +13313,32 @@
               </a:rPr>
               <a:t>Use linked tools when your department needs a structured worksheet, template, checklist, review process, or documentation artifact.</a:t>
             </a:r>
-            <a:endParaRPr lang="en-US" sz="1250" dirty="0"/>
-          </a:p>
-        </p:txBody>
-      </p:sp>
-      <p:sp>
-        <p:nvSpPr>
-          <p:cNvPr id="12" name="Shape 10"/>
-          <p:cNvSpPr/>
-          <p:nvPr/>
-        </p:nvSpPr>
-        <p:spPr>
-          <a:xfrm>
-            <a:off x="8046720" y="3794760"/>
-            <a:ext cx="3063240" cy="1508760"/>
+            <a:endParaRPr lang="en-US" sz="1550" dirty="0"/>
+          </a:p>
+        </p:txBody>
+      </p:sp>
+      <p:sp>
+        <p:nvSpPr>
+          <p:cNvPr id="13" name="Shape 11"/>
+          <p:cNvSpPr/>
+          <p:nvPr/>
+        </p:nvSpPr>
+        <p:spPr>
+          <a:xfrm>
+            <a:off x="7818120" y="3977640"/>
+            <a:ext cx="972312" cy="749808"/>
           </a:xfrm>
           <a:prstGeom prst="roundRect">
             <a:avLst>
-              <a:gd name="adj" fmla="val 7273"/>
+              <a:gd name="adj" fmla="val 14634"/>
             </a:avLst>
           </a:prstGeom>
           <a:solidFill>
-            <a:srgbClr val="EEF8ED"/>
+            <a:srgbClr val="0068B7"/>
           </a:solidFill>
           <a:ln w="12700">
             <a:solidFill>
-              <a:srgbClr val="B9D7E6"/>
+              <a:srgbClr val="0068B7"/>
             </a:solidFill>
             <a:prstDash val="solid"/>
           </a:ln>
@@ -12364,81 +13346,256 @@
       </p:sp>
       <p:sp>
         <p:nvSpPr>
-          <p:cNvPr id="13" name="Text 11"/>
-          <p:cNvSpPr/>
-          <p:nvPr/>
-        </p:nvSpPr>
-        <p:spPr>
-          <a:xfrm>
-            <a:off x="8211312" y="3941064"/>
-            <a:ext cx="2734056" cy="201168"/>
-          </a:xfrm>
-          <a:prstGeom prst="rect">
-            <a:avLst/>
-          </a:prstGeom>
-          <a:noFill/>
-          <a:ln/>
-        </p:spPr>
-        <p:txBody>
-          <a:bodyPr wrap="square" lIns="0" tIns="0" rIns="0" bIns="0" rtlCol="0" anchor="ctr"/>
-          <a:lstStyle/>
-          <a:p>
-            <a:pPr indent="0" marL="0">
-              <a:buNone/>
-            </a:pPr>
-            <a:r>
-              <a:rPr lang="en-US" sz="950" b="1" dirty="0">
-                <a:solidFill>
-                  <a:srgbClr val="0068B7"/>
-                </a:solidFill>
-                <a:latin typeface="Aptos" pitchFamily="34" charset="0"/>
-                <a:ea typeface="Aptos" pitchFamily="34" charset="-122"/>
-                <a:cs typeface="Aptos" pitchFamily="34" charset="-120"/>
-              </a:rPr>
-              <a:t>Avoid duplication</a:t>
-            </a:r>
-            <a:endParaRPr lang="en-US" sz="950" dirty="0"/>
-          </a:p>
-        </p:txBody>
-      </p:sp>
-      <p:sp>
-        <p:nvSpPr>
           <p:cNvPr id="14" name="Text 12"/>
           <p:cNvSpPr/>
           <p:nvPr/>
         </p:nvSpPr>
         <p:spPr>
           <a:xfrm>
-            <a:off x="8211312" y="4233672"/>
-            <a:ext cx="2734056" cy="941832"/>
-          </a:xfrm>
-          <a:prstGeom prst="rect">
-            <a:avLst/>
-          </a:prstGeom>
-          <a:noFill/>
-          <a:ln/>
-        </p:spPr>
-        <p:txBody>
-          <a:bodyPr wrap="square" lIns="0" tIns="0" rIns="0" bIns="0" rtlCol="0" anchor="t">
+            <a:off x="7891272" y="4169664"/>
+            <a:ext cx="826008" cy="310896"/>
+          </a:xfrm>
+          <a:prstGeom prst="rect">
+            <a:avLst/>
+          </a:prstGeom>
+          <a:noFill/>
+          <a:ln/>
+        </p:spPr>
+        <p:txBody>
+          <a:bodyPr wrap="square" lIns="0" tIns="0" rIns="0" bIns="0" rtlCol="0" anchor="ctr">
             <a:normAutofit/>
           </a:bodyPr>
           <a:lstStyle/>
           <a:p>
-            <a:pPr indent="0" marL="0">
-              <a:buNone/>
-            </a:pPr>
-            <a:r>
-              <a:rPr lang="en-US" sz="1250" dirty="0">
-                <a:solidFill>
-                  <a:srgbClr val="17364A"/>
-                </a:solidFill>
-                <a:latin typeface="Aptos" pitchFamily="34" charset="0"/>
-                <a:ea typeface="Aptos" pitchFamily="34" charset="-122"/>
-                <a:cs typeface="Aptos" pitchFamily="34" charset="-120"/>
-              </a:rPr>
-              <a:t>If your department already has a strong equivalent tool, adapt or use the existing process instead of recreating it.</a:t>
-            </a:r>
-            <a:endParaRPr lang="en-US" sz="1250" dirty="0"/>
+            <a:pPr algn="ctr" indent="0" marL="0">
+              <a:buNone/>
+            </a:pPr>
+            <a:r>
+              <a:rPr lang="en-US" sz="1500" b="1" dirty="0">
+                <a:solidFill>
+                  <a:srgbClr val="FFFFFF"/>
+                </a:solidFill>
+                <a:latin typeface="Aptos" pitchFamily="34" charset="0"/>
+                <a:ea typeface="Aptos" pitchFamily="34" charset="-122"/>
+                <a:cs typeface="Aptos" pitchFamily="34" charset="-120"/>
+              </a:rPr>
+              <a:t>Concept</a:t>
+            </a:r>
+            <a:endParaRPr lang="en-US" sz="1500" dirty="0"/>
+          </a:p>
+        </p:txBody>
+      </p:sp>
+      <p:sp>
+        <p:nvSpPr>
+          <p:cNvPr id="15" name="Text 13"/>
+          <p:cNvSpPr/>
+          <p:nvPr/>
+        </p:nvSpPr>
+        <p:spPr>
+          <a:xfrm>
+            <a:off x="8817864" y="4187952"/>
+            <a:ext cx="201168" cy="256032"/>
+          </a:xfrm>
+          <a:prstGeom prst="rect">
+            <a:avLst/>
+          </a:prstGeom>
+          <a:noFill/>
+          <a:ln/>
+        </p:spPr>
+        <p:txBody>
+          <a:bodyPr wrap="square" lIns="0" tIns="0" rIns="0" bIns="0" rtlCol="0" anchor="ctr"/>
+          <a:lstStyle/>
+          <a:p>
+            <a:pPr algn="ctr" indent="0" marL="0">
+              <a:buNone/>
+            </a:pPr>
+            <a:r>
+              <a:rPr lang="en-US" sz="1800" b="1" dirty="0">
+                <a:solidFill>
+                  <a:srgbClr val="0068B7"/>
+                </a:solidFill>
+                <a:latin typeface="Aptos" pitchFamily="34" charset="0"/>
+                <a:ea typeface="Aptos" pitchFamily="34" charset="-122"/>
+                <a:cs typeface="Aptos" pitchFamily="34" charset="-120"/>
+              </a:rPr>
+              <a:t>â†’</a:t>
+            </a:r>
+            <a:endParaRPr lang="en-US" sz="1800" dirty="0"/>
+          </a:p>
+        </p:txBody>
+      </p:sp>
+      <p:sp>
+        <p:nvSpPr>
+          <p:cNvPr id="16" name="Shape 14"/>
+          <p:cNvSpPr/>
+          <p:nvPr/>
+        </p:nvSpPr>
+        <p:spPr>
+          <a:xfrm>
+            <a:off x="9046464" y="3977640"/>
+            <a:ext cx="972312" cy="749808"/>
+          </a:xfrm>
+          <a:prstGeom prst="roundRect">
+            <a:avLst>
+              <a:gd name="adj" fmla="val 14634"/>
+            </a:avLst>
+          </a:prstGeom>
+          <a:solidFill>
+            <a:srgbClr val="2F8A28"/>
+          </a:solidFill>
+          <a:ln w="12700">
+            <a:solidFill>
+              <a:srgbClr val="2F8A28"/>
+            </a:solidFill>
+            <a:prstDash val="solid"/>
+          </a:ln>
+        </p:spPr>
+      </p:sp>
+      <p:sp>
+        <p:nvSpPr>
+          <p:cNvPr id="17" name="Text 15"/>
+          <p:cNvSpPr/>
+          <p:nvPr/>
+        </p:nvSpPr>
+        <p:spPr>
+          <a:xfrm>
+            <a:off x="9119616" y="4169664"/>
+            <a:ext cx="826008" cy="310896"/>
+          </a:xfrm>
+          <a:prstGeom prst="rect">
+            <a:avLst/>
+          </a:prstGeom>
+          <a:noFill/>
+          <a:ln/>
+        </p:spPr>
+        <p:txBody>
+          <a:bodyPr wrap="square" lIns="0" tIns="0" rIns="0" bIns="0" rtlCol="0" anchor="ctr">
+            <a:normAutofit/>
+          </a:bodyPr>
+          <a:lstStyle/>
+          <a:p>
+            <a:pPr algn="ctr" indent="0" marL="0">
+              <a:buNone/>
+            </a:pPr>
+            <a:r>
+              <a:rPr lang="en-US" sz="1500" b="1" dirty="0">
+                <a:solidFill>
+                  <a:srgbClr val="FFFFFF"/>
+                </a:solidFill>
+                <a:latin typeface="Aptos" pitchFamily="34" charset="0"/>
+                <a:ea typeface="Aptos" pitchFamily="34" charset="-122"/>
+                <a:cs typeface="Aptos" pitchFamily="34" charset="-120"/>
+              </a:rPr>
+              <a:t>Tool</a:t>
+            </a:r>
+            <a:endParaRPr lang="en-US" sz="1500" dirty="0"/>
+          </a:p>
+        </p:txBody>
+      </p:sp>
+      <p:sp>
+        <p:nvSpPr>
+          <p:cNvPr id="18" name="Text 16"/>
+          <p:cNvSpPr/>
+          <p:nvPr/>
+        </p:nvSpPr>
+        <p:spPr>
+          <a:xfrm>
+            <a:off x="10046208" y="4187952"/>
+            <a:ext cx="201168" cy="256032"/>
+          </a:xfrm>
+          <a:prstGeom prst="rect">
+            <a:avLst/>
+          </a:prstGeom>
+          <a:noFill/>
+          <a:ln/>
+        </p:spPr>
+        <p:txBody>
+          <a:bodyPr wrap="square" lIns="0" tIns="0" rIns="0" bIns="0" rtlCol="0" anchor="ctr"/>
+          <a:lstStyle/>
+          <a:p>
+            <a:pPr algn="ctr" indent="0" marL="0">
+              <a:buNone/>
+            </a:pPr>
+            <a:r>
+              <a:rPr lang="en-US" sz="1800" b="1" dirty="0">
+                <a:solidFill>
+                  <a:srgbClr val="0068B7"/>
+                </a:solidFill>
+                <a:latin typeface="Aptos" pitchFamily="34" charset="0"/>
+                <a:ea typeface="Aptos" pitchFamily="34" charset="-122"/>
+                <a:cs typeface="Aptos" pitchFamily="34" charset="-120"/>
+              </a:rPr>
+              <a:t>â†’</a:t>
+            </a:r>
+            <a:endParaRPr lang="en-US" sz="1800" dirty="0"/>
+          </a:p>
+        </p:txBody>
+      </p:sp>
+      <p:sp>
+        <p:nvSpPr>
+          <p:cNvPr id="19" name="Shape 17"/>
+          <p:cNvSpPr/>
+          <p:nvPr/>
+        </p:nvSpPr>
+        <p:spPr>
+          <a:xfrm>
+            <a:off x="10274808" y="3977640"/>
+            <a:ext cx="972312" cy="749808"/>
+          </a:xfrm>
+          <a:prstGeom prst="roundRect">
+            <a:avLst>
+              <a:gd name="adj" fmla="val 14634"/>
+            </a:avLst>
+          </a:prstGeom>
+          <a:solidFill>
+            <a:srgbClr val="D69A2D"/>
+          </a:solidFill>
+          <a:ln w="12700">
+            <a:solidFill>
+              <a:srgbClr val="D69A2D"/>
+            </a:solidFill>
+            <a:prstDash val="solid"/>
+          </a:ln>
+        </p:spPr>
+      </p:sp>
+      <p:sp>
+        <p:nvSpPr>
+          <p:cNvPr id="20" name="Text 18"/>
+          <p:cNvSpPr/>
+          <p:nvPr/>
+        </p:nvSpPr>
+        <p:spPr>
+          <a:xfrm>
+            <a:off x="10347960" y="4169664"/>
+            <a:ext cx="826008" cy="310896"/>
+          </a:xfrm>
+          <a:prstGeom prst="rect">
+            <a:avLst/>
+          </a:prstGeom>
+          <a:noFill/>
+          <a:ln/>
+        </p:spPr>
+        <p:txBody>
+          <a:bodyPr wrap="square" lIns="0" tIns="0" rIns="0" bIns="0" rtlCol="0" anchor="ctr">
+            <a:normAutofit/>
+          </a:bodyPr>
+          <a:lstStyle/>
+          <a:p>
+            <a:pPr algn="ctr" indent="0" marL="0">
+              <a:buNone/>
+            </a:pPr>
+            <a:r>
+              <a:rPr lang="en-US" sz="1500" b="1" dirty="0">
+                <a:solidFill>
+                  <a:srgbClr val="FFFFFF"/>
+                </a:solidFill>
+                <a:latin typeface="Aptos" pitchFamily="34" charset="0"/>
+                <a:ea typeface="Aptos" pitchFamily="34" charset="-122"/>
+                <a:cs typeface="Aptos" pitchFamily="34" charset="-120"/>
+              </a:rPr>
+              <a:t>Artifact</a:t>
+            </a:r>
+            <a:endParaRPr lang="en-US" sz="1500" dirty="0"/>
           </a:p>
         </p:txBody>
       </p:sp>
@@ -12635,7 +13792,7 @@
                 <a:ea typeface="Aptos" pitchFamily="34" charset="-122"/>
                 <a:cs typeface="Aptos" pitchFamily="34" charset="-120"/>
               </a:rPr>
-              <a:t>© Paula Soper</a:t>
+              <a:t>Â© Paula Soper</a:t>
             </a:r>
             <a:endParaRPr lang="en-US" sz="800" dirty="0"/>
           </a:p>
@@ -12643,7 +13800,46 @@
       </p:sp>
       <p:sp>
         <p:nvSpPr>
-          <p:cNvPr id="7" name="Shape 5"/>
+          <p:cNvPr id="7" name="Text 5"/>
+          <p:cNvSpPr/>
+          <p:nvPr/>
+        </p:nvSpPr>
+        <p:spPr>
+          <a:xfrm>
+            <a:off x="11137392" y="6510528"/>
+            <a:ext cx="411480" cy="201168"/>
+          </a:xfrm>
+          <a:prstGeom prst="rect">
+            <a:avLst/>
+          </a:prstGeom>
+          <a:noFill/>
+          <a:ln/>
+        </p:spPr>
+        <p:txBody>
+          <a:bodyPr wrap="square" lIns="0" tIns="0" rIns="0" bIns="0" rtlCol="0" anchor="ctr"/>
+          <a:lstStyle/>
+          <a:p>
+            <a:pPr algn="r" indent="0" marL="0">
+              <a:buNone/>
+            </a:pPr>
+            <a:r>
+              <a:rPr lang="en-US" sz="900" dirty="0">
+                <a:solidFill>
+                  <a:srgbClr val="5F7181"/>
+                </a:solidFill>
+                <a:latin typeface="Aptos" pitchFamily="34" charset="0"/>
+                <a:ea typeface="Aptos" pitchFamily="34" charset="-122"/>
+                <a:cs typeface="Aptos" pitchFamily="34" charset="-120"/>
+              </a:rPr>
+              <a:t>5</a:t>
+            </a:r>
+            <a:endParaRPr lang="en-US" sz="900" dirty="0"/>
+          </a:p>
+        </p:txBody>
+      </p:sp>
+      <p:sp>
+        <p:nvSpPr>
+          <p:cNvPr id="8" name="Shape 6"/>
           <p:cNvSpPr/>
           <p:nvPr/>
         </p:nvSpPr>
@@ -12668,7 +13864,7 @@
       </p:sp>
       <p:sp>
         <p:nvSpPr>
-          <p:cNvPr id="8" name="Text 6"/>
+          <p:cNvPr id="9" name="Text 7"/>
           <p:cNvSpPr/>
           <p:nvPr/>
         </p:nvSpPr>
@@ -12707,14 +13903,14 @@
       </p:sp>
       <p:sp>
         <p:nvSpPr>
-          <p:cNvPr id="9" name="Text 7"/>
+          <p:cNvPr id="10" name="Text 8"/>
           <p:cNvSpPr/>
           <p:nvPr/>
         </p:nvSpPr>
         <p:spPr>
           <a:xfrm>
             <a:off x="640080" y="621792"/>
-            <a:ext cx="10881360" cy="566928"/>
+            <a:ext cx="10881360" cy="713232"/>
           </a:xfrm>
           <a:prstGeom prst="rect">
             <a:avLst/>
@@ -12732,7 +13928,7 @@
               <a:buNone/>
             </a:pPr>
             <a:r>
-              <a:rPr lang="en-US" sz="2700" b="1" dirty="0">
+              <a:rPr lang="en-US" sz="3400" b="1" dirty="0">
                 <a:solidFill>
                   <a:srgbClr val="003A63"/>
                 </a:solidFill>
@@ -12742,20 +13938,20 @@
               </a:rPr>
               <a:t>Learning Objectives</a:t>
             </a:r>
-            <a:endParaRPr lang="en-US" sz="2700" dirty="0"/>
-          </a:p>
-        </p:txBody>
-      </p:sp>
-      <p:sp>
-        <p:nvSpPr>
-          <p:cNvPr id="10" name="Text 8"/>
-          <p:cNvSpPr/>
-          <p:nvPr/>
-        </p:nvSpPr>
-        <p:spPr>
-          <a:xfrm>
-            <a:off x="868680" y="1417320"/>
-            <a:ext cx="6675120" cy="4434840"/>
+            <a:endParaRPr lang="en-US" sz="3400" dirty="0"/>
+          </a:p>
+        </p:txBody>
+      </p:sp>
+      <p:sp>
+        <p:nvSpPr>
+          <p:cNvPr id="11" name="Text 9"/>
+          <p:cNvSpPr/>
+          <p:nvPr/>
+        </p:nvSpPr>
+        <p:spPr>
+          <a:xfrm>
+            <a:off x="868680" y="1508760"/>
+            <a:ext cx="6537960" cy="4160520"/>
           </a:xfrm>
           <a:prstGeom prst="rect">
             <a:avLst/>
@@ -12770,7 +13966,7 @@
           <a:lstStyle/>
           <a:p>
             <a:r>
-              <a:rPr lang="en-US" sz="1700" dirty="0">
+              <a:rPr lang="en-US" sz="2100" dirty="0">
                 <a:solidFill>
                   <a:srgbClr val="17364A"/>
                 </a:solidFill>
@@ -12780,11 +13976,11 @@
               </a:rPr>
               <a:t>Explain why AI systems require lifecycle evidence management.</a:t>
             </a:r>
-            <a:endParaRPr lang="en-US" sz="1700" dirty="0"/>
-          </a:p>
-          <a:p>
-            <a:r>
-              <a:rPr lang="en-US" sz="1700" dirty="0">
+            <a:endParaRPr lang="en-US" sz="2100" dirty="0"/>
+          </a:p>
+          <a:p>
+            <a:r>
+              <a:rPr lang="en-US" sz="2100" dirty="0">
                 <a:solidFill>
                   <a:srgbClr val="17364A"/>
                 </a:solidFill>
@@ -12794,11 +13990,11 @@
               </a:rPr>
               <a:t>Identify the core records that support AI audit readiness.</a:t>
             </a:r>
-            <a:endParaRPr lang="en-US" sz="1700" dirty="0"/>
-          </a:p>
-          <a:p>
-            <a:r>
-              <a:rPr lang="en-US" sz="1700" dirty="0">
+            <a:endParaRPr lang="en-US" sz="2100" dirty="0"/>
+          </a:p>
+          <a:p>
+            <a:r>
+              <a:rPr lang="en-US" sz="2100" dirty="0">
                 <a:solidFill>
                   <a:srgbClr val="17364A"/>
                 </a:solidFill>
@@ -12808,27 +14004,13 @@
               </a:rPr>
               <a:t>Distinguish between approval evidence, validation evidence, operational evidence, and incident evidence.</a:t>
             </a:r>
-            <a:endParaRPr lang="en-US" sz="1700" dirty="0"/>
-          </a:p>
-          <a:p>
-            <a:r>
-              <a:rPr lang="en-US" sz="1700" dirty="0">
-                <a:solidFill>
-                  <a:srgbClr val="17364A"/>
-                </a:solidFill>
-                <a:latin typeface="Aptos" pitchFamily="34" charset="0"/>
-                <a:ea typeface="Aptos" pitchFamily="34" charset="-122"/>
-                <a:cs typeface="Aptos" pitchFamily="34" charset="-120"/>
-              </a:rPr>
-              <a:t>Create an AI evidence inventory for an approved or proposed use case.</a:t>
-            </a:r>
-            <a:endParaRPr lang="en-US" sz="1700" dirty="0"/>
-          </a:p>
-        </p:txBody>
-      </p:sp>
-      <p:sp>
-        <p:nvSpPr>
-          <p:cNvPr id="11" name="Shape 9"/>
+            <a:endParaRPr lang="en-US" sz="2100" dirty="0"/>
+          </a:p>
+        </p:txBody>
+      </p:sp>
+      <p:sp>
+        <p:nvSpPr>
+          <p:cNvPr id="12" name="Shape 10"/>
           <p:cNvSpPr/>
           <p:nvPr/>
         </p:nvSpPr>
@@ -12855,14 +14037,14 @@
       </p:sp>
       <p:sp>
         <p:nvSpPr>
-          <p:cNvPr id="12" name="Text 10"/>
+          <p:cNvPr id="13" name="Text 11"/>
           <p:cNvSpPr/>
           <p:nvPr/>
         </p:nvSpPr>
         <p:spPr>
           <a:xfrm>
             <a:off x="8074152" y="1563624"/>
-            <a:ext cx="2825496" cy="201168"/>
+            <a:ext cx="2825496" cy="256032"/>
           </a:xfrm>
           <a:prstGeom prst="rect">
             <a:avLst/>
@@ -12878,7 +14060,7 @@
               <a:buNone/>
             </a:pPr>
             <a:r>
-              <a:rPr lang="en-US" sz="950" b="1" dirty="0">
+              <a:rPr lang="en-US" sz="1300" b="1" dirty="0">
                 <a:solidFill>
                   <a:srgbClr val="0068B7"/>
                 </a:solidFill>
@@ -12888,20 +14070,20 @@
               </a:rPr>
               <a:t>Key idea</a:t>
             </a:r>
-            <a:endParaRPr lang="en-US" sz="950" dirty="0"/>
-          </a:p>
-        </p:txBody>
-      </p:sp>
-      <p:sp>
-        <p:nvSpPr>
-          <p:cNvPr id="13" name="Text 11"/>
-          <p:cNvSpPr/>
-          <p:nvPr/>
-        </p:nvSpPr>
-        <p:spPr>
-          <a:xfrm>
-            <a:off x="8074152" y="1856232"/>
-            <a:ext cx="2825496" cy="1261872"/>
+            <a:endParaRPr lang="en-US" sz="1300" dirty="0"/>
+          </a:p>
+        </p:txBody>
+      </p:sp>
+      <p:sp>
+        <p:nvSpPr>
+          <p:cNvPr id="14" name="Text 12"/>
+          <p:cNvSpPr/>
+          <p:nvPr/>
+        </p:nvSpPr>
+        <p:spPr>
+          <a:xfrm>
+            <a:off x="8074152" y="1920240"/>
+            <a:ext cx="2825496" cy="1188720"/>
           </a:xfrm>
           <a:prstGeom prst="rect">
             <a:avLst/>
@@ -12919,7 +14101,7 @@
               <a:buNone/>
             </a:pPr>
             <a:r>
-              <a:rPr lang="en-US" sz="1250" dirty="0">
+              <a:rPr lang="en-US" sz="1550" dirty="0">
                 <a:solidFill>
                   <a:srgbClr val="17364A"/>
                 </a:solidFill>
@@ -12929,13 +14111,13 @@
               </a:rPr>
               <a:t>Explain why AI systems require lifecycle evidence management.</a:t>
             </a:r>
-            <a:endParaRPr lang="en-US" sz="1250" dirty="0"/>
-          </a:p>
-        </p:txBody>
-      </p:sp>
-      <p:sp>
-        <p:nvSpPr>
-          <p:cNvPr id="14" name="Shape 12"/>
+            <a:endParaRPr lang="en-US" sz="1550" dirty="0"/>
+          </a:p>
+        </p:txBody>
+      </p:sp>
+      <p:sp>
+        <p:nvSpPr>
+          <p:cNvPr id="15" name="Shape 13"/>
           <p:cNvSpPr/>
           <p:nvPr/>
         </p:nvSpPr>
@@ -12962,14 +14144,14 @@
       </p:sp>
       <p:sp>
         <p:nvSpPr>
-          <p:cNvPr id="15" name="Text 13"/>
+          <p:cNvPr id="16" name="Text 14"/>
           <p:cNvSpPr/>
           <p:nvPr/>
         </p:nvSpPr>
         <p:spPr>
           <a:xfrm>
             <a:off x="8074152" y="3666744"/>
-            <a:ext cx="2825496" cy="201168"/>
+            <a:ext cx="2825496" cy="256032"/>
           </a:xfrm>
           <a:prstGeom prst="rect">
             <a:avLst/>
@@ -12985,7 +14167,7 @@
               <a:buNone/>
             </a:pPr>
             <a:r>
-              <a:rPr lang="en-US" sz="950" b="1" dirty="0">
+              <a:rPr lang="en-US" sz="1300" b="1" dirty="0">
                 <a:solidFill>
                   <a:srgbClr val="0068B7"/>
                 </a:solidFill>
@@ -12995,20 +14177,20 @@
               </a:rPr>
               <a:t>Use this for</a:t>
             </a:r>
-            <a:endParaRPr lang="en-US" sz="950" dirty="0"/>
-          </a:p>
-        </p:txBody>
-      </p:sp>
-      <p:sp>
-        <p:nvSpPr>
-          <p:cNvPr id="16" name="Text 14"/>
-          <p:cNvSpPr/>
-          <p:nvPr/>
-        </p:nvSpPr>
-        <p:spPr>
-          <a:xfrm>
-            <a:off x="8074152" y="3959352"/>
-            <a:ext cx="2825496" cy="1170432"/>
+            <a:endParaRPr lang="en-US" sz="1300" dirty="0"/>
+          </a:p>
+        </p:txBody>
+      </p:sp>
+      <p:sp>
+        <p:nvSpPr>
+          <p:cNvPr id="17" name="Text 15"/>
+          <p:cNvSpPr/>
+          <p:nvPr/>
+        </p:nvSpPr>
+        <p:spPr>
+          <a:xfrm>
+            <a:off x="8074152" y="4023360"/>
+            <a:ext cx="2825496" cy="1097280"/>
           </a:xfrm>
           <a:prstGeom prst="rect">
             <a:avLst/>
@@ -13026,7 +14208,7 @@
               <a:buNone/>
             </a:pPr>
             <a:r>
-              <a:rPr lang="en-US" sz="1250" dirty="0">
+              <a:rPr lang="en-US" sz="1550" dirty="0">
                 <a:solidFill>
                   <a:srgbClr val="17364A"/>
                 </a:solidFill>
@@ -13036,7 +14218,7 @@
               </a:rPr>
               <a:t>Connect the concept to public health decisions, safeguards, documentation, or implementation work.</a:t>
             </a:r>
-            <a:endParaRPr lang="en-US" sz="1250" dirty="0"/>
+            <a:endParaRPr lang="en-US" sz="1550" dirty="0"/>
           </a:p>
         </p:txBody>
       </p:sp>
@@ -13233,7 +14415,7 @@
                 <a:ea typeface="Aptos" pitchFamily="34" charset="-122"/>
                 <a:cs typeface="Aptos" pitchFamily="34" charset="-120"/>
               </a:rPr>
-              <a:t>© Paula Soper</a:t>
+              <a:t>Â© Paula Soper</a:t>
             </a:r>
             <a:endParaRPr lang="en-US" sz="800" dirty="0"/>
           </a:p>
@@ -13241,7 +14423,46 @@
       </p:sp>
       <p:sp>
         <p:nvSpPr>
-          <p:cNvPr id="7" name="Shape 5"/>
+          <p:cNvPr id="7" name="Text 5"/>
+          <p:cNvSpPr/>
+          <p:nvPr/>
+        </p:nvSpPr>
+        <p:spPr>
+          <a:xfrm>
+            <a:off x="11137392" y="6510528"/>
+            <a:ext cx="411480" cy="201168"/>
+          </a:xfrm>
+          <a:prstGeom prst="rect">
+            <a:avLst/>
+          </a:prstGeom>
+          <a:noFill/>
+          <a:ln/>
+        </p:spPr>
+        <p:txBody>
+          <a:bodyPr wrap="square" lIns="0" tIns="0" rIns="0" bIns="0" rtlCol="0" anchor="ctr"/>
+          <a:lstStyle/>
+          <a:p>
+            <a:pPr algn="r" indent="0" marL="0">
+              <a:buNone/>
+            </a:pPr>
+            <a:r>
+              <a:rPr lang="en-US" sz="900" dirty="0">
+                <a:solidFill>
+                  <a:srgbClr val="5F7181"/>
+                </a:solidFill>
+                <a:latin typeface="Aptos" pitchFamily="34" charset="0"/>
+                <a:ea typeface="Aptos" pitchFamily="34" charset="-122"/>
+                <a:cs typeface="Aptos" pitchFamily="34" charset="-120"/>
+              </a:rPr>
+              <a:t>6</a:t>
+            </a:r>
+            <a:endParaRPr lang="en-US" sz="900" dirty="0"/>
+          </a:p>
+        </p:txBody>
+      </p:sp>
+      <p:sp>
+        <p:nvSpPr>
+          <p:cNvPr id="8" name="Shape 6"/>
           <p:cNvSpPr/>
           <p:nvPr/>
         </p:nvSpPr>
@@ -13266,7 +14487,7 @@
       </p:sp>
       <p:sp>
         <p:nvSpPr>
-          <p:cNvPr id="8" name="Text 6"/>
+          <p:cNvPr id="9" name="Text 7"/>
           <p:cNvSpPr/>
           <p:nvPr/>
         </p:nvSpPr>
@@ -13305,14 +14526,14 @@
       </p:sp>
       <p:sp>
         <p:nvSpPr>
-          <p:cNvPr id="9" name="Text 7"/>
+          <p:cNvPr id="10" name="Text 8"/>
           <p:cNvSpPr/>
           <p:nvPr/>
         </p:nvSpPr>
         <p:spPr>
           <a:xfrm>
             <a:off x="640080" y="621792"/>
-            <a:ext cx="10881360" cy="566928"/>
+            <a:ext cx="10881360" cy="713232"/>
           </a:xfrm>
           <a:prstGeom prst="rect">
             <a:avLst/>
@@ -13330,7 +14551,7 @@
               <a:buNone/>
             </a:pPr>
             <a:r>
-              <a:rPr lang="en-US" sz="2700" b="1" dirty="0">
+              <a:rPr lang="en-US" sz="3400" b="1" dirty="0">
                 <a:solidFill>
                   <a:srgbClr val="003A63"/>
                 </a:solidFill>
@@ -13340,20 +14561,20 @@
               </a:rPr>
               <a:t>Module Overview</a:t>
             </a:r>
-            <a:endParaRPr lang="en-US" sz="2700" dirty="0"/>
-          </a:p>
-        </p:txBody>
-      </p:sp>
-      <p:sp>
-        <p:nvSpPr>
-          <p:cNvPr id="10" name="Text 8"/>
-          <p:cNvSpPr/>
-          <p:nvPr/>
-        </p:nvSpPr>
-        <p:spPr>
-          <a:xfrm>
-            <a:off x="868680" y="1417320"/>
-            <a:ext cx="6675120" cy="4434840"/>
+            <a:endParaRPr lang="en-US" sz="3400" dirty="0"/>
+          </a:p>
+        </p:txBody>
+      </p:sp>
+      <p:sp>
+        <p:nvSpPr>
+          <p:cNvPr id="11" name="Text 9"/>
+          <p:cNvSpPr/>
+          <p:nvPr/>
+        </p:nvSpPr>
+        <p:spPr>
+          <a:xfrm>
+            <a:off x="868680" y="1508760"/>
+            <a:ext cx="6537960" cy="4160520"/>
           </a:xfrm>
           <a:prstGeom prst="rect">
             <a:avLst/>
@@ -13368,7 +14589,7 @@
           <a:lstStyle/>
           <a:p>
             <a:r>
-              <a:rPr lang="en-US" sz="1700" dirty="0">
+              <a:rPr lang="en-US" sz="2100" dirty="0">
                 <a:solidFill>
                   <a:srgbClr val="17364A"/>
                 </a:solidFill>
@@ -13376,13 +14597,13 @@
                 <a:ea typeface="Aptos" pitchFamily="34" charset="-122"/>
                 <a:cs typeface="Aptos" pitchFamily="34" charset="-120"/>
               </a:rPr>
-              <a:t>AI audit readiness is the agency’s ability to show what AI systems are used, why they were approved, what data they rely.</a:t>
-            </a:r>
-            <a:endParaRPr lang="en-US" sz="1700" dirty="0"/>
-          </a:p>
-          <a:p>
-            <a:r>
-              <a:rPr lang="en-US" sz="1700" dirty="0">
+              <a:t>AI audit readiness is the agency’s ability to show what AI systems are used, why they were approved,.</a:t>
+            </a:r>
+            <a:endParaRPr lang="en-US" sz="2100" dirty="0"/>
+          </a:p>
+          <a:p>
+            <a:r>
+              <a:rPr lang="en-US" sz="2100" dirty="0">
                 <a:solidFill>
                   <a:srgbClr val="17364A"/>
                 </a:solidFill>
@@ -13390,13 +14611,13 @@
                 <a:ea typeface="Aptos" pitchFamily="34" charset="-122"/>
                 <a:cs typeface="Aptos" pitchFamily="34" charset="-120"/>
               </a:rPr>
-              <a:t>Public health agencies may need this evidence for internal oversight, public records requests, legal review, grant.</a:t>
-            </a:r>
-            <a:endParaRPr lang="en-US" sz="1700" dirty="0"/>
-          </a:p>
-          <a:p>
-            <a:r>
-              <a:rPr lang="en-US" sz="1700" dirty="0">
+              <a:t>Public health agencies may need this evidence for internal oversight, public records requests, legal.</a:t>
+            </a:r>
+            <a:endParaRPr lang="en-US" sz="2100" dirty="0"/>
+          </a:p>
+          <a:p>
+            <a:r>
+              <a:rPr lang="en-US" sz="2100" dirty="0">
                 <a:solidFill>
                   <a:srgbClr val="17364A"/>
                 </a:solidFill>
@@ -13404,29 +14625,15 @@
                 <a:ea typeface="Aptos" pitchFamily="34" charset="-122"/>
                 <a:cs typeface="Aptos" pitchFamily="34" charset="-120"/>
               </a:rPr>
-              <a:t>This module teaches governance, compliance, program, and leadership staff how to manage evidence across the AI lifecycle.</a:t>
-            </a:r>
-            <a:endParaRPr lang="en-US" sz="1700" dirty="0"/>
-          </a:p>
-          <a:p>
-            <a:r>
-              <a:rPr lang="en-US" sz="1700" dirty="0">
-                <a:solidFill>
-                  <a:srgbClr val="17364A"/>
-                </a:solidFill>
-                <a:latin typeface="Aptos" pitchFamily="34" charset="0"/>
-                <a:ea typeface="Aptos" pitchFamily="34" charset="-122"/>
-                <a:cs typeface="Aptos" pitchFamily="34" charset="-120"/>
-              </a:rPr>
-              <a:t>The emphasis is practical: if a concern arises six months after deployment, the agency should be able to reconstruct the.</a:t>
-            </a:r>
-            <a:endParaRPr lang="en-US" sz="1700" dirty="0"/>
-          </a:p>
-        </p:txBody>
-      </p:sp>
-      <p:sp>
-        <p:nvSpPr>
-          <p:cNvPr id="11" name="Shape 9"/>
+              <a:t>This module teaches governance, compliance, program, and leadership staff how to manage evidence across.</a:t>
+            </a:r>
+            <a:endParaRPr lang="en-US" sz="2100" dirty="0"/>
+          </a:p>
+        </p:txBody>
+      </p:sp>
+      <p:sp>
+        <p:nvSpPr>
+          <p:cNvPr id="12" name="Shape 10"/>
           <p:cNvSpPr/>
           <p:nvPr/>
         </p:nvSpPr>
@@ -13453,14 +14660,14 @@
       </p:sp>
       <p:sp>
         <p:nvSpPr>
-          <p:cNvPr id="12" name="Text 10"/>
+          <p:cNvPr id="13" name="Text 11"/>
           <p:cNvSpPr/>
           <p:nvPr/>
         </p:nvSpPr>
         <p:spPr>
           <a:xfrm>
             <a:off x="8074152" y="1563624"/>
-            <a:ext cx="2825496" cy="201168"/>
+            <a:ext cx="2825496" cy="256032"/>
           </a:xfrm>
           <a:prstGeom prst="rect">
             <a:avLst/>
@@ -13476,7 +14683,7 @@
               <a:buNone/>
             </a:pPr>
             <a:r>
-              <a:rPr lang="en-US" sz="950" b="1" dirty="0">
+              <a:rPr lang="en-US" sz="1300" b="1" dirty="0">
                 <a:solidFill>
                   <a:srgbClr val="0068B7"/>
                 </a:solidFill>
@@ -13486,20 +14693,20 @@
               </a:rPr>
               <a:t>Key idea</a:t>
             </a:r>
-            <a:endParaRPr lang="en-US" sz="950" dirty="0"/>
-          </a:p>
-        </p:txBody>
-      </p:sp>
-      <p:sp>
-        <p:nvSpPr>
-          <p:cNvPr id="13" name="Text 11"/>
-          <p:cNvSpPr/>
-          <p:nvPr/>
-        </p:nvSpPr>
-        <p:spPr>
-          <a:xfrm>
-            <a:off x="8074152" y="1856232"/>
-            <a:ext cx="2825496" cy="1261872"/>
+            <a:endParaRPr lang="en-US" sz="1300" dirty="0"/>
+          </a:p>
+        </p:txBody>
+      </p:sp>
+      <p:sp>
+        <p:nvSpPr>
+          <p:cNvPr id="14" name="Text 12"/>
+          <p:cNvSpPr/>
+          <p:nvPr/>
+        </p:nvSpPr>
+        <p:spPr>
+          <a:xfrm>
+            <a:off x="8074152" y="1920240"/>
+            <a:ext cx="2825496" cy="1188720"/>
           </a:xfrm>
           <a:prstGeom prst="rect">
             <a:avLst/>
@@ -13517,7 +14724,7 @@
               <a:buNone/>
             </a:pPr>
             <a:r>
-              <a:rPr lang="en-US" sz="1250" dirty="0">
+              <a:rPr lang="en-US" sz="1550" dirty="0">
                 <a:solidFill>
                   <a:srgbClr val="17364A"/>
                 </a:solidFill>
@@ -13525,15 +14732,15 @@
                 <a:ea typeface="Aptos" pitchFamily="34" charset="-122"/>
                 <a:cs typeface="Aptos" pitchFamily="34" charset="-120"/>
               </a:rPr>
-              <a:t>AI audit readiness is the agency’s ability to show what AI systems are used, why they were approved, what data they rely.</a:t>
-            </a:r>
-            <a:endParaRPr lang="en-US" sz="1250" dirty="0"/>
-          </a:p>
-        </p:txBody>
-      </p:sp>
-      <p:sp>
-        <p:nvSpPr>
-          <p:cNvPr id="14" name="Shape 12"/>
+              <a:t>AI audit readiness is the agency’s ability to show what AI systems are used, why they were approved,.</a:t>
+            </a:r>
+            <a:endParaRPr lang="en-US" sz="1550" dirty="0"/>
+          </a:p>
+        </p:txBody>
+      </p:sp>
+      <p:sp>
+        <p:nvSpPr>
+          <p:cNvPr id="15" name="Shape 13"/>
           <p:cNvSpPr/>
           <p:nvPr/>
         </p:nvSpPr>
@@ -13560,14 +14767,14 @@
       </p:sp>
       <p:sp>
         <p:nvSpPr>
-          <p:cNvPr id="15" name="Text 13"/>
+          <p:cNvPr id="16" name="Text 14"/>
           <p:cNvSpPr/>
           <p:nvPr/>
         </p:nvSpPr>
         <p:spPr>
           <a:xfrm>
             <a:off x="8074152" y="3666744"/>
-            <a:ext cx="2825496" cy="201168"/>
+            <a:ext cx="2825496" cy="256032"/>
           </a:xfrm>
           <a:prstGeom prst="rect">
             <a:avLst/>
@@ -13583,7 +14790,7 @@
               <a:buNone/>
             </a:pPr>
             <a:r>
-              <a:rPr lang="en-US" sz="950" b="1" dirty="0">
+              <a:rPr lang="en-US" sz="1300" b="1" dirty="0">
                 <a:solidFill>
                   <a:srgbClr val="0068B7"/>
                 </a:solidFill>
@@ -13593,20 +14800,20 @@
               </a:rPr>
               <a:t>Use this for</a:t>
             </a:r>
-            <a:endParaRPr lang="en-US" sz="950" dirty="0"/>
-          </a:p>
-        </p:txBody>
-      </p:sp>
-      <p:sp>
-        <p:nvSpPr>
-          <p:cNvPr id="16" name="Text 14"/>
-          <p:cNvSpPr/>
-          <p:nvPr/>
-        </p:nvSpPr>
-        <p:spPr>
-          <a:xfrm>
-            <a:off x="8074152" y="3959352"/>
-            <a:ext cx="2825496" cy="1170432"/>
+            <a:endParaRPr lang="en-US" sz="1300" dirty="0"/>
+          </a:p>
+        </p:txBody>
+      </p:sp>
+      <p:sp>
+        <p:nvSpPr>
+          <p:cNvPr id="17" name="Text 15"/>
+          <p:cNvSpPr/>
+          <p:nvPr/>
+        </p:nvSpPr>
+        <p:spPr>
+          <a:xfrm>
+            <a:off x="8074152" y="4023360"/>
+            <a:ext cx="2825496" cy="1097280"/>
           </a:xfrm>
           <a:prstGeom prst="rect">
             <a:avLst/>
@@ -13624,7 +14831,7 @@
               <a:buNone/>
             </a:pPr>
             <a:r>
-              <a:rPr lang="en-US" sz="1250" dirty="0">
+              <a:rPr lang="en-US" sz="1550" dirty="0">
                 <a:solidFill>
                   <a:srgbClr val="17364A"/>
                 </a:solidFill>
@@ -13634,7 +14841,7 @@
               </a:rPr>
               <a:t>Connect the concept to public health decisions, safeguards, documentation, or implementation work.</a:t>
             </a:r>
-            <a:endParaRPr lang="en-US" sz="1250" dirty="0"/>
+            <a:endParaRPr lang="en-US" sz="1550" dirty="0"/>
           </a:p>
         </p:txBody>
       </p:sp>
@@ -13831,7 +15038,7 @@
                 <a:ea typeface="Aptos" pitchFamily="34" charset="-122"/>
                 <a:cs typeface="Aptos" pitchFamily="34" charset="-120"/>
               </a:rPr>
-              <a:t>© Paula Soper</a:t>
+              <a:t>Â© Paula Soper</a:t>
             </a:r>
             <a:endParaRPr lang="en-US" sz="800" dirty="0"/>
           </a:p>
@@ -13839,7 +15046,46 @@
       </p:sp>
       <p:sp>
         <p:nvSpPr>
-          <p:cNvPr id="7" name="Shape 5"/>
+          <p:cNvPr id="7" name="Text 5"/>
+          <p:cNvSpPr/>
+          <p:nvPr/>
+        </p:nvSpPr>
+        <p:spPr>
+          <a:xfrm>
+            <a:off x="11137392" y="6510528"/>
+            <a:ext cx="411480" cy="201168"/>
+          </a:xfrm>
+          <a:prstGeom prst="rect">
+            <a:avLst/>
+          </a:prstGeom>
+          <a:noFill/>
+          <a:ln/>
+        </p:spPr>
+        <p:txBody>
+          <a:bodyPr wrap="square" lIns="0" tIns="0" rIns="0" bIns="0" rtlCol="0" anchor="ctr"/>
+          <a:lstStyle/>
+          <a:p>
+            <a:pPr algn="r" indent="0" marL="0">
+              <a:buNone/>
+            </a:pPr>
+            <a:r>
+              <a:rPr lang="en-US" sz="900" dirty="0">
+                <a:solidFill>
+                  <a:srgbClr val="5F7181"/>
+                </a:solidFill>
+                <a:latin typeface="Aptos" pitchFamily="34" charset="0"/>
+                <a:ea typeface="Aptos" pitchFamily="34" charset="-122"/>
+                <a:cs typeface="Aptos" pitchFamily="34" charset="-120"/>
+              </a:rPr>
+              <a:t>7</a:t>
+            </a:r>
+            <a:endParaRPr lang="en-US" sz="900" dirty="0"/>
+          </a:p>
+        </p:txBody>
+      </p:sp>
+      <p:sp>
+        <p:nvSpPr>
+          <p:cNvPr id="8" name="Shape 6"/>
           <p:cNvSpPr/>
           <p:nvPr/>
         </p:nvSpPr>
@@ -13864,7 +15110,7 @@
       </p:sp>
       <p:sp>
         <p:nvSpPr>
-          <p:cNvPr id="8" name="Text 6"/>
+          <p:cNvPr id="9" name="Text 7"/>
           <p:cNvSpPr/>
           <p:nvPr/>
         </p:nvSpPr>
@@ -13903,14 +15149,14 @@
       </p:sp>
       <p:sp>
         <p:nvSpPr>
-          <p:cNvPr id="9" name="Text 7"/>
+          <p:cNvPr id="10" name="Text 8"/>
           <p:cNvSpPr/>
           <p:nvPr/>
         </p:nvSpPr>
         <p:spPr>
           <a:xfrm>
             <a:off x="640080" y="621792"/>
-            <a:ext cx="10881360" cy="566928"/>
+            <a:ext cx="10881360" cy="713232"/>
           </a:xfrm>
           <a:prstGeom prst="rect">
             <a:avLst/>
@@ -13928,7 +15174,7 @@
               <a:buNone/>
             </a:pPr>
             <a:r>
-              <a:rPr lang="en-US" sz="2700" b="1" dirty="0">
+              <a:rPr lang="en-US" sz="3400" b="1" dirty="0">
                 <a:solidFill>
                   <a:srgbClr val="003A63"/>
                 </a:solidFill>
@@ -13938,20 +15184,20 @@
               </a:rPr>
               <a:t>Jurisdiction and Agency Policy Note</a:t>
             </a:r>
-            <a:endParaRPr lang="en-US" sz="2700" dirty="0"/>
-          </a:p>
-        </p:txBody>
-      </p:sp>
-      <p:sp>
-        <p:nvSpPr>
-          <p:cNvPr id="10" name="Text 8"/>
-          <p:cNvSpPr/>
-          <p:nvPr/>
-        </p:nvSpPr>
-        <p:spPr>
-          <a:xfrm>
-            <a:off x="868680" y="1417320"/>
-            <a:ext cx="6675120" cy="4434840"/>
+            <a:endParaRPr lang="en-US" sz="3400" dirty="0"/>
+          </a:p>
+        </p:txBody>
+      </p:sp>
+      <p:sp>
+        <p:nvSpPr>
+          <p:cNvPr id="11" name="Text 9"/>
+          <p:cNvSpPr/>
+          <p:nvPr/>
+        </p:nvSpPr>
+        <p:spPr>
+          <a:xfrm>
+            <a:off x="868680" y="1508760"/>
+            <a:ext cx="6537960" cy="4160520"/>
           </a:xfrm>
           <a:prstGeom prst="rect">
             <a:avLst/>
@@ -13966,7 +15212,7 @@
           <a:lstStyle/>
           <a:p>
             <a:r>
-              <a:rPr lang="en-US" sz="1700" dirty="0">
+              <a:rPr lang="en-US" sz="2100" dirty="0">
                 <a:solidFill>
                   <a:srgbClr val="17364A"/>
                 </a:solidFill>
@@ -13976,11 +15222,11 @@
               </a:rPr>
               <a:t>This module provides national-level training guidance for public health agencies and partners.</a:t>
             </a:r>
-            <a:endParaRPr lang="en-US" sz="1700" dirty="0"/>
-          </a:p>
-          <a:p>
-            <a:r>
-              <a:rPr lang="en-US" sz="1700" dirty="0">
+            <a:endParaRPr lang="en-US" sz="2100" dirty="0"/>
+          </a:p>
+          <a:p>
+            <a:r>
+              <a:rPr lang="en-US" sz="2100" dirty="0">
                 <a:solidFill>
                   <a:srgbClr val="17364A"/>
                 </a:solidFill>
@@ -13988,13 +15234,13 @@
                 <a:ea typeface="Aptos" pitchFamily="34" charset="-122"/>
                 <a:cs typeface="Aptos" pitchFamily="34" charset="-120"/>
               </a:rPr>
-              <a:t>It is not legal advice and does not replace review by agency legal counsel, privacy officers, procurement officials, civil.</a:t>
-            </a:r>
-            <a:endParaRPr lang="en-US" sz="1700" dirty="0"/>
-          </a:p>
-          <a:p>
-            <a:r>
-              <a:rPr lang="en-US" sz="1700" dirty="0">
+              <a:t>It is not legal advice and does not replace review by agency legal counsel, privacy officers,.</a:t>
+            </a:r>
+            <a:endParaRPr lang="en-US" sz="2100" dirty="0"/>
+          </a:p>
+          <a:p>
+            <a:r>
+              <a:rPr lang="en-US" sz="2100" dirty="0">
                 <a:solidFill>
                   <a:srgbClr val="17364A"/>
                 </a:solidFill>
@@ -14002,29 +15248,15 @@
                 <a:ea typeface="Aptos" pitchFamily="34" charset="-122"/>
                 <a:cs typeface="Aptos" pitchFamily="34" charset="-120"/>
               </a:rPr>
-              <a:t>Requirements may vary by state, locality, territory, Tribe, agency, funding source, data-sharing agreement, emergency.</a:t>
-            </a:r>
-            <a:endParaRPr lang="en-US" sz="1700" dirty="0"/>
-          </a:p>
-          <a:p>
-            <a:r>
-              <a:rPr lang="en-US" sz="1700" dirty="0">
-                <a:solidFill>
-                  <a:srgbClr val="17364A"/>
-                </a:solidFill>
-                <a:latin typeface="Aptos" pitchFamily="34" charset="0"/>
-                <a:ea typeface="Aptos" pitchFamily="34" charset="-122"/>
-                <a:cs typeface="Aptos" pitchFamily="34" charset="-120"/>
-              </a:rPr>
-              <a:t>Learners should use this module to identify the issues that require review and should confirm applicable requirements.</a:t>
-            </a:r>
-            <a:endParaRPr lang="en-US" sz="1700" dirty="0"/>
-          </a:p>
-        </p:txBody>
-      </p:sp>
-      <p:sp>
-        <p:nvSpPr>
-          <p:cNvPr id="11" name="Shape 9"/>
+              <a:t>Requirements may vary by state, locality, territory, Tribe, agency, funding source, data-sharing.</a:t>
+            </a:r>
+            <a:endParaRPr lang="en-US" sz="2100" dirty="0"/>
+          </a:p>
+        </p:txBody>
+      </p:sp>
+      <p:sp>
+        <p:nvSpPr>
+          <p:cNvPr id="12" name="Shape 10"/>
           <p:cNvSpPr/>
           <p:nvPr/>
         </p:nvSpPr>
@@ -14051,14 +15283,14 @@
       </p:sp>
       <p:sp>
         <p:nvSpPr>
-          <p:cNvPr id="12" name="Text 10"/>
+          <p:cNvPr id="13" name="Text 11"/>
           <p:cNvSpPr/>
           <p:nvPr/>
         </p:nvSpPr>
         <p:spPr>
           <a:xfrm>
             <a:off x="8074152" y="1563624"/>
-            <a:ext cx="2825496" cy="201168"/>
+            <a:ext cx="2825496" cy="256032"/>
           </a:xfrm>
           <a:prstGeom prst="rect">
             <a:avLst/>
@@ -14074,7 +15306,7 @@
               <a:buNone/>
             </a:pPr>
             <a:r>
-              <a:rPr lang="en-US" sz="950" b="1" dirty="0">
+              <a:rPr lang="en-US" sz="1300" b="1" dirty="0">
                 <a:solidFill>
                   <a:srgbClr val="0068B7"/>
                 </a:solidFill>
@@ -14084,20 +15316,20 @@
               </a:rPr>
               <a:t>Key idea</a:t>
             </a:r>
-            <a:endParaRPr lang="en-US" sz="950" dirty="0"/>
-          </a:p>
-        </p:txBody>
-      </p:sp>
-      <p:sp>
-        <p:nvSpPr>
-          <p:cNvPr id="13" name="Text 11"/>
-          <p:cNvSpPr/>
-          <p:nvPr/>
-        </p:nvSpPr>
-        <p:spPr>
-          <a:xfrm>
-            <a:off x="8074152" y="1856232"/>
-            <a:ext cx="2825496" cy="1261872"/>
+            <a:endParaRPr lang="en-US" sz="1300" dirty="0"/>
+          </a:p>
+        </p:txBody>
+      </p:sp>
+      <p:sp>
+        <p:nvSpPr>
+          <p:cNvPr id="14" name="Text 12"/>
+          <p:cNvSpPr/>
+          <p:nvPr/>
+        </p:nvSpPr>
+        <p:spPr>
+          <a:xfrm>
+            <a:off x="8074152" y="1920240"/>
+            <a:ext cx="2825496" cy="1188720"/>
           </a:xfrm>
           <a:prstGeom prst="rect">
             <a:avLst/>
@@ -14115,7 +15347,7 @@
               <a:buNone/>
             </a:pPr>
             <a:r>
-              <a:rPr lang="en-US" sz="1250" dirty="0">
+              <a:rPr lang="en-US" sz="1550" dirty="0">
                 <a:solidFill>
                   <a:srgbClr val="17364A"/>
                 </a:solidFill>
@@ -14125,13 +15357,13 @@
               </a:rPr>
               <a:t>This module provides national-level training guidance for public health agencies and partners.</a:t>
             </a:r>
-            <a:endParaRPr lang="en-US" sz="1250" dirty="0"/>
-          </a:p>
-        </p:txBody>
-      </p:sp>
-      <p:sp>
-        <p:nvSpPr>
-          <p:cNvPr id="14" name="Shape 12"/>
+            <a:endParaRPr lang="en-US" sz="1550" dirty="0"/>
+          </a:p>
+        </p:txBody>
+      </p:sp>
+      <p:sp>
+        <p:nvSpPr>
+          <p:cNvPr id="15" name="Shape 13"/>
           <p:cNvSpPr/>
           <p:nvPr/>
         </p:nvSpPr>
@@ -14158,14 +15390,14 @@
       </p:sp>
       <p:sp>
         <p:nvSpPr>
-          <p:cNvPr id="15" name="Text 13"/>
+          <p:cNvPr id="16" name="Text 14"/>
           <p:cNvSpPr/>
           <p:nvPr/>
         </p:nvSpPr>
         <p:spPr>
           <a:xfrm>
             <a:off x="8074152" y="3666744"/>
-            <a:ext cx="2825496" cy="201168"/>
+            <a:ext cx="2825496" cy="256032"/>
           </a:xfrm>
           <a:prstGeom prst="rect">
             <a:avLst/>
@@ -14181,7 +15413,7 @@
               <a:buNone/>
             </a:pPr>
             <a:r>
-              <a:rPr lang="en-US" sz="950" b="1" dirty="0">
+              <a:rPr lang="en-US" sz="1300" b="1" dirty="0">
                 <a:solidFill>
                   <a:srgbClr val="0068B7"/>
                 </a:solidFill>
@@ -14191,20 +15423,20 @@
               </a:rPr>
               <a:t>Use this for</a:t>
             </a:r>
-            <a:endParaRPr lang="en-US" sz="950" dirty="0"/>
-          </a:p>
-        </p:txBody>
-      </p:sp>
-      <p:sp>
-        <p:nvSpPr>
-          <p:cNvPr id="16" name="Text 14"/>
-          <p:cNvSpPr/>
-          <p:nvPr/>
-        </p:nvSpPr>
-        <p:spPr>
-          <a:xfrm>
-            <a:off x="8074152" y="3959352"/>
-            <a:ext cx="2825496" cy="1170432"/>
+            <a:endParaRPr lang="en-US" sz="1300" dirty="0"/>
+          </a:p>
+        </p:txBody>
+      </p:sp>
+      <p:sp>
+        <p:nvSpPr>
+          <p:cNvPr id="17" name="Text 15"/>
+          <p:cNvSpPr/>
+          <p:nvPr/>
+        </p:nvSpPr>
+        <p:spPr>
+          <a:xfrm>
+            <a:off x="8074152" y="4023360"/>
+            <a:ext cx="2825496" cy="1097280"/>
           </a:xfrm>
           <a:prstGeom prst="rect">
             <a:avLst/>
@@ -14222,7 +15454,7 @@
               <a:buNone/>
             </a:pPr>
             <a:r>
-              <a:rPr lang="en-US" sz="1250" dirty="0">
+              <a:rPr lang="en-US" sz="1550" dirty="0">
                 <a:solidFill>
                   <a:srgbClr val="17364A"/>
                 </a:solidFill>
@@ -14232,7 +15464,7 @@
               </a:rPr>
               <a:t>Connect the concept to public health decisions, safeguards, documentation, or implementation work.</a:t>
             </a:r>
-            <a:endParaRPr lang="en-US" sz="1250" dirty="0"/>
+            <a:endParaRPr lang="en-US" sz="1550" dirty="0"/>
           </a:p>
         </p:txBody>
       </p:sp>
@@ -14429,7 +15661,7 @@
                 <a:ea typeface="Aptos" pitchFamily="34" charset="-122"/>
                 <a:cs typeface="Aptos" pitchFamily="34" charset="-120"/>
               </a:rPr>
-              <a:t>© Paula Soper</a:t>
+              <a:t>Â© Paula Soper</a:t>
             </a:r>
             <a:endParaRPr lang="en-US" sz="800" dirty="0"/>
           </a:p>
@@ -14437,7 +15669,46 @@
       </p:sp>
       <p:sp>
         <p:nvSpPr>
-          <p:cNvPr id="7" name="Shape 5"/>
+          <p:cNvPr id="7" name="Text 5"/>
+          <p:cNvSpPr/>
+          <p:nvPr/>
+        </p:nvSpPr>
+        <p:spPr>
+          <a:xfrm>
+            <a:off x="11137392" y="6510528"/>
+            <a:ext cx="411480" cy="201168"/>
+          </a:xfrm>
+          <a:prstGeom prst="rect">
+            <a:avLst/>
+          </a:prstGeom>
+          <a:noFill/>
+          <a:ln/>
+        </p:spPr>
+        <p:txBody>
+          <a:bodyPr wrap="square" lIns="0" tIns="0" rIns="0" bIns="0" rtlCol="0" anchor="ctr"/>
+          <a:lstStyle/>
+          <a:p>
+            <a:pPr algn="r" indent="0" marL="0">
+              <a:buNone/>
+            </a:pPr>
+            <a:r>
+              <a:rPr lang="en-US" sz="900" dirty="0">
+                <a:solidFill>
+                  <a:srgbClr val="5F7181"/>
+                </a:solidFill>
+                <a:latin typeface="Aptos" pitchFamily="34" charset="0"/>
+                <a:ea typeface="Aptos" pitchFamily="34" charset="-122"/>
+                <a:cs typeface="Aptos" pitchFamily="34" charset="-120"/>
+              </a:rPr>
+              <a:t>8</a:t>
+            </a:r>
+            <a:endParaRPr lang="en-US" sz="900" dirty="0"/>
+          </a:p>
+        </p:txBody>
+      </p:sp>
+      <p:sp>
+        <p:nvSpPr>
+          <p:cNvPr id="8" name="Shape 6"/>
           <p:cNvSpPr/>
           <p:nvPr/>
         </p:nvSpPr>
@@ -14462,7 +15733,7 @@
       </p:sp>
       <p:sp>
         <p:nvSpPr>
-          <p:cNvPr id="8" name="Text 6"/>
+          <p:cNvPr id="9" name="Text 7"/>
           <p:cNvSpPr/>
           <p:nvPr/>
         </p:nvSpPr>
@@ -14501,14 +15772,14 @@
       </p:sp>
       <p:sp>
         <p:nvSpPr>
-          <p:cNvPr id="9" name="Text 7"/>
+          <p:cNvPr id="10" name="Text 8"/>
           <p:cNvSpPr/>
           <p:nvPr/>
         </p:nvSpPr>
         <p:spPr>
           <a:xfrm>
             <a:off x="640080" y="621792"/>
-            <a:ext cx="10881360" cy="566928"/>
+            <a:ext cx="10881360" cy="713232"/>
           </a:xfrm>
           <a:prstGeom prst="rect">
             <a:avLst/>
@@ -14526,7 +15797,7 @@
               <a:buNone/>
             </a:pPr>
             <a:r>
-              <a:rPr lang="en-US" sz="2700" b="1" dirty="0">
+              <a:rPr lang="en-US" sz="3400" b="1" dirty="0">
                 <a:solidFill>
                   <a:srgbClr val="003A63"/>
                 </a:solidFill>
@@ -14536,20 +15807,20 @@
               </a:rPr>
               <a:t>Public Health Example</a:t>
             </a:r>
-            <a:endParaRPr lang="en-US" sz="2700" dirty="0"/>
-          </a:p>
-        </p:txBody>
-      </p:sp>
-      <p:sp>
-        <p:nvSpPr>
-          <p:cNvPr id="10" name="Text 8"/>
-          <p:cNvSpPr/>
-          <p:nvPr/>
-        </p:nvSpPr>
-        <p:spPr>
-          <a:xfrm>
-            <a:off x="868680" y="1417320"/>
-            <a:ext cx="6675120" cy="4434840"/>
+            <a:endParaRPr lang="en-US" sz="3400" dirty="0"/>
+          </a:p>
+        </p:txBody>
+      </p:sp>
+      <p:sp>
+        <p:nvSpPr>
+          <p:cNvPr id="11" name="Text 9"/>
+          <p:cNvSpPr/>
+          <p:nvPr/>
+        </p:nvSpPr>
+        <p:spPr>
+          <a:xfrm>
+            <a:off x="868680" y="1508760"/>
+            <a:ext cx="6537960" cy="4160520"/>
           </a:xfrm>
           <a:prstGeom prst="rect">
             <a:avLst/>
@@ -14564,7 +15835,7 @@
           <a:lstStyle/>
           <a:p>
             <a:r>
-              <a:rPr lang="en-US" sz="1700" dirty="0">
+              <a:rPr lang="en-US" sz="2100" dirty="0">
                 <a:solidFill>
                   <a:srgbClr val="17364A"/>
                 </a:solidFill>
@@ -14574,11 +15845,11 @@
               </a:rPr>
               <a:t>A health department uses an AI tool to help classify public inquiries.</a:t>
             </a:r>
-            <a:endParaRPr lang="en-US" sz="1700" dirty="0"/>
-          </a:p>
-          <a:p>
-            <a:r>
-              <a:rPr lang="en-US" sz="1700" dirty="0">
+            <a:endParaRPr lang="en-US" sz="2100" dirty="0"/>
+          </a:p>
+          <a:p>
+            <a:r>
+              <a:rPr lang="en-US" sz="2100" dirty="0">
                 <a:solidFill>
                   <a:srgbClr val="17364A"/>
                 </a:solidFill>
@@ -14588,11 +15859,11 @@
               </a:rPr>
               <a:t>Six months later, a concern is raised that the tool may be misclassifying language access requests.</a:t>
             </a:r>
-            <a:endParaRPr lang="en-US" sz="1700" dirty="0"/>
-          </a:p>
-          <a:p>
-            <a:r>
-              <a:rPr lang="en-US" sz="1700" dirty="0">
+            <a:endParaRPr lang="en-US" sz="2100" dirty="0"/>
+          </a:p>
+          <a:p>
+            <a:r>
+              <a:rPr lang="en-US" sz="2100" dirty="0">
                 <a:solidFill>
                   <a:srgbClr val="17364A"/>
                 </a:solidFill>
@@ -14600,29 +15871,15 @@
                 <a:ea typeface="Aptos" pitchFamily="34" charset="-122"/>
                 <a:cs typeface="Aptos" pitchFamily="34" charset="-120"/>
               </a:rPr>
-              <a:t>Audit-ready evidence would include the approved use case, validation plan, subgroup review, SOP, training records, user.</a:t>
-            </a:r>
-            <a:endParaRPr lang="en-US" sz="1700" dirty="0"/>
-          </a:p>
-          <a:p>
-            <a:r>
-              <a:rPr lang="en-US" sz="1700" dirty="0">
-                <a:solidFill>
-                  <a:srgbClr val="17364A"/>
-                </a:solidFill>
-                <a:latin typeface="Aptos" pitchFamily="34" charset="0"/>
-                <a:ea typeface="Aptos" pitchFamily="34" charset="-122"/>
-                <a:cs typeface="Aptos" pitchFamily="34" charset="-120"/>
-              </a:rPr>
-              <a:t>This evidence allows the agency to investigate the concern and decide whether to modify, pause, or retire the workflow.</a:t>
-            </a:r>
-            <a:endParaRPr lang="en-US" sz="1700" dirty="0"/>
-          </a:p>
-        </p:txBody>
-      </p:sp>
-      <p:sp>
-        <p:nvSpPr>
-          <p:cNvPr id="11" name="Shape 9"/>
+              <a:t>Audit-ready evidence would include the approved use case, validation plan, subgroup review, SOP,.</a:t>
+            </a:r>
+            <a:endParaRPr lang="en-US" sz="2100" dirty="0"/>
+          </a:p>
+        </p:txBody>
+      </p:sp>
+      <p:sp>
+        <p:nvSpPr>
+          <p:cNvPr id="12" name="Shape 10"/>
           <p:cNvSpPr/>
           <p:nvPr/>
         </p:nvSpPr>
@@ -14649,14 +15906,14 @@
       </p:sp>
       <p:sp>
         <p:nvSpPr>
-          <p:cNvPr id="12" name="Text 10"/>
+          <p:cNvPr id="13" name="Text 11"/>
           <p:cNvSpPr/>
           <p:nvPr/>
         </p:nvSpPr>
         <p:spPr>
           <a:xfrm>
             <a:off x="8074152" y="1563624"/>
-            <a:ext cx="2825496" cy="201168"/>
+            <a:ext cx="2825496" cy="256032"/>
           </a:xfrm>
           <a:prstGeom prst="rect">
             <a:avLst/>
@@ -14672,7 +15929,7 @@
               <a:buNone/>
             </a:pPr>
             <a:r>
-              <a:rPr lang="en-US" sz="950" b="1" dirty="0">
+              <a:rPr lang="en-US" sz="1300" b="1" dirty="0">
                 <a:solidFill>
                   <a:srgbClr val="0068B7"/>
                 </a:solidFill>
@@ -14682,20 +15939,20 @@
               </a:rPr>
               <a:t>Key idea</a:t>
             </a:r>
-            <a:endParaRPr lang="en-US" sz="950" dirty="0"/>
-          </a:p>
-        </p:txBody>
-      </p:sp>
-      <p:sp>
-        <p:nvSpPr>
-          <p:cNvPr id="13" name="Text 11"/>
-          <p:cNvSpPr/>
-          <p:nvPr/>
-        </p:nvSpPr>
-        <p:spPr>
-          <a:xfrm>
-            <a:off x="8074152" y="1856232"/>
-            <a:ext cx="2825496" cy="1261872"/>
+            <a:endParaRPr lang="en-US" sz="1300" dirty="0"/>
+          </a:p>
+        </p:txBody>
+      </p:sp>
+      <p:sp>
+        <p:nvSpPr>
+          <p:cNvPr id="14" name="Text 12"/>
+          <p:cNvSpPr/>
+          <p:nvPr/>
+        </p:nvSpPr>
+        <p:spPr>
+          <a:xfrm>
+            <a:off x="8074152" y="1920240"/>
+            <a:ext cx="2825496" cy="1188720"/>
           </a:xfrm>
           <a:prstGeom prst="rect">
             <a:avLst/>
@@ -14713,7 +15970,7 @@
               <a:buNone/>
             </a:pPr>
             <a:r>
-              <a:rPr lang="en-US" sz="1250" dirty="0">
+              <a:rPr lang="en-US" sz="1550" dirty="0">
                 <a:solidFill>
                   <a:srgbClr val="17364A"/>
                 </a:solidFill>
@@ -14723,13 +15980,13 @@
               </a:rPr>
               <a:t>A health department uses an AI tool to help classify public inquiries.</a:t>
             </a:r>
-            <a:endParaRPr lang="en-US" sz="1250" dirty="0"/>
-          </a:p>
-        </p:txBody>
-      </p:sp>
-      <p:sp>
-        <p:nvSpPr>
-          <p:cNvPr id="14" name="Shape 12"/>
+            <a:endParaRPr lang="en-US" sz="1550" dirty="0"/>
+          </a:p>
+        </p:txBody>
+      </p:sp>
+      <p:sp>
+        <p:nvSpPr>
+          <p:cNvPr id="15" name="Shape 13"/>
           <p:cNvSpPr/>
           <p:nvPr/>
         </p:nvSpPr>
@@ -14756,14 +16013,14 @@
       </p:sp>
       <p:sp>
         <p:nvSpPr>
-          <p:cNvPr id="15" name="Text 13"/>
+          <p:cNvPr id="16" name="Text 14"/>
           <p:cNvSpPr/>
           <p:nvPr/>
         </p:nvSpPr>
         <p:spPr>
           <a:xfrm>
             <a:off x="8074152" y="3666744"/>
-            <a:ext cx="2825496" cy="201168"/>
+            <a:ext cx="2825496" cy="256032"/>
           </a:xfrm>
           <a:prstGeom prst="rect">
             <a:avLst/>
@@ -14779,7 +16036,7 @@
               <a:buNone/>
             </a:pPr>
             <a:r>
-              <a:rPr lang="en-US" sz="950" b="1" dirty="0">
+              <a:rPr lang="en-US" sz="1300" b="1" dirty="0">
                 <a:solidFill>
                   <a:srgbClr val="0068B7"/>
                 </a:solidFill>
@@ -14789,20 +16046,20 @@
               </a:rPr>
               <a:t>Use this for</a:t>
             </a:r>
-            <a:endParaRPr lang="en-US" sz="950" dirty="0"/>
-          </a:p>
-        </p:txBody>
-      </p:sp>
-      <p:sp>
-        <p:nvSpPr>
-          <p:cNvPr id="16" name="Text 14"/>
-          <p:cNvSpPr/>
-          <p:nvPr/>
-        </p:nvSpPr>
-        <p:spPr>
-          <a:xfrm>
-            <a:off x="8074152" y="3959352"/>
-            <a:ext cx="2825496" cy="1170432"/>
+            <a:endParaRPr lang="en-US" sz="1300" dirty="0"/>
+          </a:p>
+        </p:txBody>
+      </p:sp>
+      <p:sp>
+        <p:nvSpPr>
+          <p:cNvPr id="17" name="Text 15"/>
+          <p:cNvSpPr/>
+          <p:nvPr/>
+        </p:nvSpPr>
+        <p:spPr>
+          <a:xfrm>
+            <a:off x="8074152" y="4023360"/>
+            <a:ext cx="2825496" cy="1097280"/>
           </a:xfrm>
           <a:prstGeom prst="rect">
             <a:avLst/>
@@ -14820,7 +16077,7 @@
               <a:buNone/>
             </a:pPr>
             <a:r>
-              <a:rPr lang="en-US" sz="1250" dirty="0">
+              <a:rPr lang="en-US" sz="1550" dirty="0">
                 <a:solidFill>
                   <a:srgbClr val="17364A"/>
                 </a:solidFill>
@@ -14830,7 +16087,7 @@
               </a:rPr>
               <a:t>Connect the concept to public health decisions, safeguards, documentation, or implementation work.</a:t>
             </a:r>
-            <a:endParaRPr lang="en-US" sz="1250" dirty="0"/>
+            <a:endParaRPr lang="en-US" sz="1550" dirty="0"/>
           </a:p>
         </p:txBody>
       </p:sp>
@@ -15027,7 +16284,7 @@
                 <a:ea typeface="Aptos" pitchFamily="34" charset="-122"/>
                 <a:cs typeface="Aptos" pitchFamily="34" charset="-120"/>
               </a:rPr>
-              <a:t>© Paula Soper</a:t>
+              <a:t>Â© Paula Soper</a:t>
             </a:r>
             <a:endParaRPr lang="en-US" sz="800" dirty="0"/>
           </a:p>
@@ -15035,7 +16292,46 @@
       </p:sp>
       <p:sp>
         <p:nvSpPr>
-          <p:cNvPr id="7" name="Shape 5"/>
+          <p:cNvPr id="7" name="Text 5"/>
+          <p:cNvSpPr/>
+          <p:nvPr/>
+        </p:nvSpPr>
+        <p:spPr>
+          <a:xfrm>
+            <a:off x="11137392" y="6510528"/>
+            <a:ext cx="411480" cy="201168"/>
+          </a:xfrm>
+          <a:prstGeom prst="rect">
+            <a:avLst/>
+          </a:prstGeom>
+          <a:noFill/>
+          <a:ln/>
+        </p:spPr>
+        <p:txBody>
+          <a:bodyPr wrap="square" lIns="0" tIns="0" rIns="0" bIns="0" rtlCol="0" anchor="ctr"/>
+          <a:lstStyle/>
+          <a:p>
+            <a:pPr algn="r" indent="0" marL="0">
+              <a:buNone/>
+            </a:pPr>
+            <a:r>
+              <a:rPr lang="en-US" sz="900" dirty="0">
+                <a:solidFill>
+                  <a:srgbClr val="5F7181"/>
+                </a:solidFill>
+                <a:latin typeface="Aptos" pitchFamily="34" charset="0"/>
+                <a:ea typeface="Aptos" pitchFamily="34" charset="-122"/>
+                <a:cs typeface="Aptos" pitchFamily="34" charset="-120"/>
+              </a:rPr>
+              <a:t>9</a:t>
+            </a:r>
+            <a:endParaRPr lang="en-US" sz="900" dirty="0"/>
+          </a:p>
+        </p:txBody>
+      </p:sp>
+      <p:sp>
+        <p:nvSpPr>
+          <p:cNvPr id="8" name="Shape 6"/>
           <p:cNvSpPr/>
           <p:nvPr/>
         </p:nvSpPr>
@@ -15060,7 +16356,7 @@
       </p:sp>
       <p:sp>
         <p:nvSpPr>
-          <p:cNvPr id="8" name="Text 6"/>
+          <p:cNvPr id="9" name="Text 7"/>
           <p:cNvSpPr/>
           <p:nvPr/>
         </p:nvSpPr>
@@ -15099,14 +16395,14 @@
       </p:sp>
       <p:sp>
         <p:nvSpPr>
-          <p:cNvPr id="9" name="Text 7"/>
+          <p:cNvPr id="10" name="Text 8"/>
           <p:cNvSpPr/>
           <p:nvPr/>
         </p:nvSpPr>
         <p:spPr>
           <a:xfrm>
             <a:off x="640080" y="621792"/>
-            <a:ext cx="10881360" cy="566928"/>
+            <a:ext cx="10881360" cy="713232"/>
           </a:xfrm>
           <a:prstGeom prst="rect">
             <a:avLst/>
@@ -15124,7 +16420,7 @@
               <a:buNone/>
             </a:pPr>
             <a:r>
-              <a:rPr lang="en-US" sz="2700" b="1" dirty="0">
+              <a:rPr lang="en-US" sz="3400" b="1" dirty="0">
                 <a:solidFill>
                   <a:srgbClr val="003A63"/>
                 </a:solidFill>
@@ -15134,20 +16430,20 @@
               </a:rPr>
               <a:t>Technical and Operational Deep Dive</a:t>
             </a:r>
-            <a:endParaRPr lang="en-US" sz="2700" dirty="0"/>
-          </a:p>
-        </p:txBody>
-      </p:sp>
-      <p:sp>
-        <p:nvSpPr>
-          <p:cNvPr id="10" name="Text 8"/>
-          <p:cNvSpPr/>
-          <p:nvPr/>
-        </p:nvSpPr>
-        <p:spPr>
-          <a:xfrm>
-            <a:off x="868680" y="1417320"/>
-            <a:ext cx="6675120" cy="4434840"/>
+            <a:endParaRPr lang="en-US" sz="3400" dirty="0"/>
+          </a:p>
+        </p:txBody>
+      </p:sp>
+      <p:sp>
+        <p:nvSpPr>
+          <p:cNvPr id="11" name="Text 9"/>
+          <p:cNvSpPr/>
+          <p:nvPr/>
+        </p:nvSpPr>
+        <p:spPr>
+          <a:xfrm>
+            <a:off x="868680" y="1508760"/>
+            <a:ext cx="6537960" cy="4160520"/>
           </a:xfrm>
           <a:prstGeom prst="rect">
             <a:avLst/>
@@ -15162,7 +16458,7 @@
           <a:lstStyle/>
           <a:p>
             <a:r>
-              <a:rPr lang="en-US" sz="1700" dirty="0">
+              <a:rPr lang="en-US" sz="2100" dirty="0">
                 <a:solidFill>
                   <a:srgbClr val="17364A"/>
                 </a:solidFill>
@@ -15172,11 +16468,11 @@
               </a:rPr>
               <a:t>AI evidence begins at intake.</a:t>
             </a:r>
-            <a:endParaRPr lang="en-US" sz="1700" dirty="0"/>
-          </a:p>
-          <a:p>
-            <a:r>
-              <a:rPr lang="en-US" sz="1700" dirty="0">
+            <a:endParaRPr lang="en-US" sz="2100" dirty="0"/>
+          </a:p>
+          <a:p>
+            <a:r>
+              <a:rPr lang="en-US" sz="2100" dirty="0">
                 <a:solidFill>
                   <a:srgbClr val="17364A"/>
                 </a:solidFill>
@@ -15184,13 +16480,13 @@
                 <a:ea typeface="Aptos" pitchFamily="34" charset="-122"/>
                 <a:cs typeface="Aptos" pitchFamily="34" charset="-120"/>
               </a:rPr>
-              <a:t>The agency should preserve the use case description, risk triage, required reviewers, approval conditions, and rationale.</a:t>
-            </a:r>
-            <a:endParaRPr lang="en-US" sz="1700" dirty="0"/>
-          </a:p>
-          <a:p>
-            <a:r>
-              <a:rPr lang="en-US" sz="1700" dirty="0">
+              <a:t>The agency should preserve the use case description, risk triage, required reviewers, approval.</a:t>
+            </a:r>
+            <a:endParaRPr lang="en-US" sz="2100" dirty="0"/>
+          </a:p>
+          <a:p>
+            <a:r>
+              <a:rPr lang="en-US" sz="2100" dirty="0">
                 <a:solidFill>
                   <a:srgbClr val="17364A"/>
                 </a:solidFill>
@@ -15200,27 +16496,13 @@
               </a:rPr>
               <a:t>If a use case is rejected or deferred, that decision should also be documented.</a:t>
             </a:r>
-            <a:endParaRPr lang="en-US" sz="1700" dirty="0"/>
-          </a:p>
-          <a:p>
-            <a:r>
-              <a:rPr lang="en-US" sz="1700" dirty="0">
-                <a:solidFill>
-                  <a:srgbClr val="17364A"/>
-                </a:solidFill>
-                <a:latin typeface="Aptos" pitchFamily="34" charset="0"/>
-                <a:ea typeface="Aptos" pitchFamily="34" charset="-122"/>
-                <a:cs typeface="Aptos" pitchFamily="34" charset="-120"/>
-              </a:rPr>
-              <a:t>These early records help explain why a tool exists and what limits were placed on its use.</a:t>
-            </a:r>
-            <a:endParaRPr lang="en-US" sz="1700" dirty="0"/>
-          </a:p>
-        </p:txBody>
-      </p:sp>
-      <p:sp>
-        <p:nvSpPr>
-          <p:cNvPr id="11" name="Shape 9"/>
+            <a:endParaRPr lang="en-US" sz="2100" dirty="0"/>
+          </a:p>
+        </p:txBody>
+      </p:sp>
+      <p:sp>
+        <p:nvSpPr>
+          <p:cNvPr id="12" name="Shape 10"/>
           <p:cNvSpPr/>
           <p:nvPr/>
         </p:nvSpPr>
@@ -15247,14 +16529,14 @@
       </p:sp>
       <p:sp>
         <p:nvSpPr>
-          <p:cNvPr id="12" name="Text 10"/>
+          <p:cNvPr id="13" name="Text 11"/>
           <p:cNvSpPr/>
           <p:nvPr/>
         </p:nvSpPr>
         <p:spPr>
           <a:xfrm>
             <a:off x="8074152" y="1563624"/>
-            <a:ext cx="2825496" cy="201168"/>
+            <a:ext cx="2825496" cy="256032"/>
           </a:xfrm>
           <a:prstGeom prst="rect">
             <a:avLst/>
@@ -15270,7 +16552,7 @@
               <a:buNone/>
             </a:pPr>
             <a:r>
-              <a:rPr lang="en-US" sz="950" b="1" dirty="0">
+              <a:rPr lang="en-US" sz="1300" b="1" dirty="0">
                 <a:solidFill>
                   <a:srgbClr val="0068B7"/>
                 </a:solidFill>
@@ -15280,20 +16562,20 @@
               </a:rPr>
               <a:t>Key idea</a:t>
             </a:r>
-            <a:endParaRPr lang="en-US" sz="950" dirty="0"/>
-          </a:p>
-        </p:txBody>
-      </p:sp>
-      <p:sp>
-        <p:nvSpPr>
-          <p:cNvPr id="13" name="Text 11"/>
-          <p:cNvSpPr/>
-          <p:nvPr/>
-        </p:nvSpPr>
-        <p:spPr>
-          <a:xfrm>
-            <a:off x="8074152" y="1856232"/>
-            <a:ext cx="2825496" cy="1261872"/>
+            <a:endParaRPr lang="en-US" sz="1300" dirty="0"/>
+          </a:p>
+        </p:txBody>
+      </p:sp>
+      <p:sp>
+        <p:nvSpPr>
+          <p:cNvPr id="14" name="Text 12"/>
+          <p:cNvSpPr/>
+          <p:nvPr/>
+        </p:nvSpPr>
+        <p:spPr>
+          <a:xfrm>
+            <a:off x="8074152" y="1920240"/>
+            <a:ext cx="2825496" cy="1188720"/>
           </a:xfrm>
           <a:prstGeom prst="rect">
             <a:avLst/>
@@ -15311,7 +16593,7 @@
               <a:buNone/>
             </a:pPr>
             <a:r>
-              <a:rPr lang="en-US" sz="1250" dirty="0">
+              <a:rPr lang="en-US" sz="1550" dirty="0">
                 <a:solidFill>
                   <a:srgbClr val="17364A"/>
                 </a:solidFill>
@@ -15321,13 +16603,13 @@
               </a:rPr>
               <a:t>AI evidence begins at intake.</a:t>
             </a:r>
-            <a:endParaRPr lang="en-US" sz="1250" dirty="0"/>
-          </a:p>
-        </p:txBody>
-      </p:sp>
-      <p:sp>
-        <p:nvSpPr>
-          <p:cNvPr id="14" name="Shape 12"/>
+            <a:endParaRPr lang="en-US" sz="1550" dirty="0"/>
+          </a:p>
+        </p:txBody>
+      </p:sp>
+      <p:sp>
+        <p:nvSpPr>
+          <p:cNvPr id="15" name="Shape 13"/>
           <p:cNvSpPr/>
           <p:nvPr/>
         </p:nvSpPr>
@@ -15354,14 +16636,14 @@
       </p:sp>
       <p:sp>
         <p:nvSpPr>
-          <p:cNvPr id="15" name="Text 13"/>
+          <p:cNvPr id="16" name="Text 14"/>
           <p:cNvSpPr/>
           <p:nvPr/>
         </p:nvSpPr>
         <p:spPr>
           <a:xfrm>
             <a:off x="8074152" y="3666744"/>
-            <a:ext cx="2825496" cy="201168"/>
+            <a:ext cx="2825496" cy="256032"/>
           </a:xfrm>
           <a:prstGeom prst="rect">
             <a:avLst/>
@@ -15377,7 +16659,7 @@
               <a:buNone/>
             </a:pPr>
             <a:r>
-              <a:rPr lang="en-US" sz="950" b="1" dirty="0">
+              <a:rPr lang="en-US" sz="1300" b="1" dirty="0">
                 <a:solidFill>
                   <a:srgbClr val="0068B7"/>
                 </a:solidFill>
@@ -15387,20 +16669,20 @@
               </a:rPr>
               <a:t>Use this for</a:t>
             </a:r>
-            <a:endParaRPr lang="en-US" sz="950" dirty="0"/>
-          </a:p>
-        </p:txBody>
-      </p:sp>
-      <p:sp>
-        <p:nvSpPr>
-          <p:cNvPr id="16" name="Text 14"/>
-          <p:cNvSpPr/>
-          <p:nvPr/>
-        </p:nvSpPr>
-        <p:spPr>
-          <a:xfrm>
-            <a:off x="8074152" y="3959352"/>
-            <a:ext cx="2825496" cy="1170432"/>
+            <a:endParaRPr lang="en-US" sz="1300" dirty="0"/>
+          </a:p>
+        </p:txBody>
+      </p:sp>
+      <p:sp>
+        <p:nvSpPr>
+          <p:cNvPr id="17" name="Text 15"/>
+          <p:cNvSpPr/>
+          <p:nvPr/>
+        </p:nvSpPr>
+        <p:spPr>
+          <a:xfrm>
+            <a:off x="8074152" y="4023360"/>
+            <a:ext cx="2825496" cy="1097280"/>
           </a:xfrm>
           <a:prstGeom prst="rect">
             <a:avLst/>
@@ -15418,7 +16700,7 @@
               <a:buNone/>
             </a:pPr>
             <a:r>
-              <a:rPr lang="en-US" sz="1250" dirty="0">
+              <a:rPr lang="en-US" sz="1550" dirty="0">
                 <a:solidFill>
                   <a:srgbClr val="17364A"/>
                 </a:solidFill>
@@ -15428,7 +16710,7 @@
               </a:rPr>
               <a:t>Connect the concept to public health decisions, safeguards, documentation, or implementation work.</a:t>
             </a:r>
-            <a:endParaRPr lang="en-US" sz="1250" dirty="0"/>
+            <a:endParaRPr lang="en-US" sz="1550" dirty="0"/>
           </a:p>
         </p:txBody>
       </p:sp>
